--- a/Presentation/Edge_vs_Cloud_Latency_Presentation.pptx
+++ b/Presentation/Edge_vs_Cloud_Latency_Presentation.pptx
@@ -5,19 +5,15 @@
     <p:sldMasterId id="2147483648" r:id="rId1"/>
   </p:sldMasterIdLst>
   <p:notesMasterIdLst>
-    <p:notesMasterId r:id="rId12"/>
+    <p:notesMasterId r:id="rId8"/>
   </p:notesMasterIdLst>
   <p:sldIdLst>
     <p:sldId id="257" r:id="rId2"/>
-    <p:sldId id="266" r:id="rId3"/>
-    <p:sldId id="258" r:id="rId4"/>
-    <p:sldId id="259" r:id="rId5"/>
-    <p:sldId id="260" r:id="rId6"/>
-    <p:sldId id="261" r:id="rId7"/>
-    <p:sldId id="262" r:id="rId8"/>
-    <p:sldId id="263" r:id="rId9"/>
-    <p:sldId id="267" r:id="rId10"/>
-    <p:sldId id="264" r:id="rId11"/>
+    <p:sldId id="258" r:id="rId3"/>
+    <p:sldId id="259" r:id="rId4"/>
+    <p:sldId id="260" r:id="rId5"/>
+    <p:sldId id="263" r:id="rId6"/>
+    <p:sldId id="267" r:id="rId7"/>
   </p:sldIdLst>
   <p:sldSz cx="12192000" cy="6858000"/>
   <p:notesSz cx="6858000" cy="12192000"/>
@@ -113,11 +109,6 @@
       </a:defRPr>
     </a:lvl9pPr>
   </p:defaultTextStyle>
-  <p:extLst>
-    <p:ext uri="{EFAFB233-063F-42B5-8137-9DF3F51BA10A}">
-      <p15:sldGuideLst xmlns:p15="http://schemas.microsoft.com/office/powerpoint/2012/main"/>
-    </p:ext>
-  </p:extLst>
 </p:presentation>
 </file>
 
@@ -627,7 +618,7 @@
           <a:lstStyle/>
           <a:p>
             <a:r>
-              <a:rPr lang="en-US" dirty="0"/>
+              <a:rPr lang="en-US"/>
               <a:t>Explain that latency means the full round-trip time. The test used a mobile phone as the client, a laptop as the local edge server, and an external internet server for cloud comparison.</a:t>
             </a:r>
           </a:p>
@@ -651,93 +642,6 @@
             <a:fld id="{F7021451-1387-4CA6-816F-3879F97B5CBC}" type="slidenum">
               <a:rPr lang="en-US"/>
               <a:t>1</a:t>
-            </a:fld>
-            <a:endParaRPr lang="en-US"/>
-          </a:p>
-        </p:txBody>
-      </p:sp>
-    </p:spTree>
-    <p:extLst>
-      <p:ext uri="{BB962C8B-B14F-4D97-AF65-F5344CB8AC3E}">
-        <p14:creationId xmlns:p14="http://schemas.microsoft.com/office/powerpoint/2010/main" val="1024086991"/>
-      </p:ext>
-    </p:extLst>
-  </p:cSld>
-  <p:clrMapOvr>
-    <a:masterClrMapping/>
-  </p:clrMapOvr>
-</p:notes>
-</file>
-
-<file path=ppt/notesSlides/notesSlide10.xml><?xml version="1.0" encoding="utf-8"?>
-<p:notes xmlns:a="http://schemas.openxmlformats.org/drawingml/2006/main" xmlns:r="http://schemas.openxmlformats.org/officeDocument/2006/relationships" xmlns:p="http://schemas.openxmlformats.org/presentationml/2006/main">
-  <p:cSld>
-    <p:spTree>
-      <p:nvGrpSpPr>
-        <p:cNvPr id="1" name=""/>
-        <p:cNvGrpSpPr/>
-        <p:nvPr/>
-      </p:nvGrpSpPr>
-      <p:grpSpPr>
-        <a:xfrm>
-          <a:off x="0" y="0"/>
-          <a:ext cx="0" cy="0"/>
-          <a:chOff x="0" y="0"/>
-          <a:chExt cx="0" cy="0"/>
-        </a:xfrm>
-      </p:grpSpPr>
-      <p:sp>
-        <p:nvSpPr>
-          <p:cNvPr id="2" name="Slide Image Placeholder 1"/>
-          <p:cNvSpPr>
-            <a:spLocks noGrp="1" noRot="1" noChangeAspect="1"/>
-          </p:cNvSpPr>
-          <p:nvPr>
-            <p:ph type="sldImg"/>
-          </p:nvPr>
-        </p:nvSpPr>
-        <p:spPr/>
-      </p:sp>
-      <p:sp>
-        <p:nvSpPr>
-          <p:cNvPr id="3" name="Notes Placeholder 2"/>
-          <p:cNvSpPr>
-            <a:spLocks noGrp="1"/>
-          </p:cNvSpPr>
-          <p:nvPr>
-            <p:ph type="body" idx="1"/>
-          </p:nvPr>
-        </p:nvSpPr>
-        <p:spPr/>
-        <p:txBody>
-          <a:bodyPr/>
-          <a:lstStyle/>
-          <a:p>
-            <a:r>
-              <a:rPr lang="en-US" dirty="0"/>
-              <a:t>Use this slide as a summary table. Edge is better for low-latency and offline local operation. Cloud remains valuable for storage and large-scale analysis.</a:t>
-            </a:r>
-          </a:p>
-        </p:txBody>
-      </p:sp>
-      <p:sp>
-        <p:nvSpPr>
-          <p:cNvPr id="4" name="Slide Number Placeholder 3"/>
-          <p:cNvSpPr>
-            <a:spLocks noGrp="1"/>
-          </p:cNvSpPr>
-          <p:nvPr>
-            <p:ph type="sldNum" sz="quarter" idx="10"/>
-          </p:nvPr>
-        </p:nvSpPr>
-        <p:spPr/>
-        <p:txBody>
-          <a:bodyPr/>
-          <a:lstStyle/>
-          <a:p>
-            <a:fld id="{F7021451-1387-4CA6-816F-3879F97B5CBC}" type="slidenum">
-              <a:rPr lang="en-US"/>
-              <a:t>10</a:t>
             </a:fld>
             <a:endParaRPr lang="en-US"/>
           </a:p>
@@ -801,9 +705,8 @@
           <a:lstStyle/>
           <a:p>
             <a:r>
-              <a:rPr lang="en-US" dirty="0"/>
-              <a:t>Edge test: the laptop ran a Python Flask server. The mobile phone accessed it via its local IP on the same Wi-Fi. HTTP GET and POST requests confirmed working communication; the terminal showed status 200.
-Cloud test: a curl command measured the round-trip to httpbin.org over the public internet. The measured result was 0.510079 seconds = 510 ms.</a:t>
+              <a:rPr lang="en-US"/>
+              <a:t>Say that in the edge test, the laptop acts like a small local server. The phone sends data over the same Wi-Fi network, the laptop processes it, and the response comes back without going to a remote cloud server.</a:t>
             </a:r>
           </a:p>
         </p:txBody>
@@ -889,8 +792,8 @@
           <a:lstStyle/>
           <a:p>
             <a:r>
-              <a:rPr lang="en-US" dirty="0"/>
-              <a:t>Say that in the edge test, the laptop acts like a small local server. The phone sends data over the same Wi-Fi network, the laptop processes it, and the response comes back without going to a remote cloud server.</a:t>
+              <a:rPr lang="en-US"/>
+              <a:t>Explain that the cloud test used a remote HTTP server. The request must go through the public internet, reach the server, and return. This adds round-trip delay.</a:t>
             </a:r>
           </a:p>
         </p:txBody>
@@ -976,8 +879,8 @@
           <a:lstStyle/>
           <a:p>
             <a:r>
-              <a:rPr lang="en-US" dirty="0"/>
-              <a:t>Explain that the cloud test used a remote HTTP server. The request must go through the public internet, reach the server, and return. This adds round-trip delay.</a:t>
+              <a:rPr lang="en-US"/>
+              <a:t>Use the chart to show the numbers. At home, edge latency was 95 ms and cloud was 510 ms. At HSHL, edge was 422 ms and cloud was 2170 ms. The direction is the same: edge is lower.</a:t>
             </a:r>
           </a:p>
         </p:txBody>
@@ -1063,8 +966,8 @@
           <a:lstStyle/>
           <a:p>
             <a:r>
-              <a:rPr lang="en-US" dirty="0"/>
-              <a:t>Use the chart to show the numbers. At home, edge latency was 95 ms and cloud was 510 ms. At HSHL, edge was 422 ms and cloud was 2170 ms. The direction is the same: edge is lower.</a:t>
+              <a:rPr lang="en-US"/>
+              <a:t>This slide explains the equation in easy words. Edge reduces X because data travels a short local distance. Shared Wi-Fi reduces effective bandwidth, so latency rises. Cloud has a much longer internet route.</a:t>
             </a:r>
           </a:p>
         </p:txBody>
@@ -1150,8 +1053,8 @@
           <a:lstStyle/>
           <a:p>
             <a:r>
-              <a:rPr lang="en-US" dirty="0"/>
-              <a:t>Present this as the main comparison. In the stable environment, cloud took about 5.4 times longer. This is important because industrial systems often need reactions in milliseconds.</a:t>
+              <a:rPr lang="en-US"/>
+              <a:t>Table III from the paper summarises all key dimensions. Notice that storage and analysis scale is the ONE area where cloud wins. This is why the paper recommends a hybrid approach: edge handles all time-sensitive operations, cloud handles everything that doesn't require an immediate response (storage, analytics, AI model retraining).</a:t>
             </a:r>
           </a:p>
         </p:txBody>
@@ -1174,267 +1077,6 @@
             <a:fld id="{F7021451-1387-4CA6-816F-3879F97B5CBC}" type="slidenum">
               <a:rPr lang="en-US"/>
               <a:t>6</a:t>
-            </a:fld>
-            <a:endParaRPr lang="en-US"/>
-          </a:p>
-        </p:txBody>
-      </p:sp>
-    </p:spTree>
-    <p:extLst>
-      <p:ext uri="{BB962C8B-B14F-4D97-AF65-F5344CB8AC3E}">
-        <p14:creationId xmlns:p14="http://schemas.microsoft.com/office/powerpoint/2010/main" val="1024086991"/>
-      </p:ext>
-    </p:extLst>
-  </p:cSld>
-  <p:clrMapOvr>
-    <a:masterClrMapping/>
-  </p:clrMapOvr>
-</p:notes>
-</file>
-
-<file path=ppt/notesSlides/notesSlide7.xml><?xml version="1.0" encoding="utf-8"?>
-<p:notes xmlns:a="http://schemas.openxmlformats.org/drawingml/2006/main" xmlns:r="http://schemas.openxmlformats.org/officeDocument/2006/relationships" xmlns:p="http://schemas.openxmlformats.org/presentationml/2006/main">
-  <p:cSld>
-    <p:spTree>
-      <p:nvGrpSpPr>
-        <p:cNvPr id="1" name=""/>
-        <p:cNvGrpSpPr/>
-        <p:nvPr/>
-      </p:nvGrpSpPr>
-      <p:grpSpPr>
-        <a:xfrm>
-          <a:off x="0" y="0"/>
-          <a:ext cx="0" cy="0"/>
-          <a:chOff x="0" y="0"/>
-          <a:chExt cx="0" cy="0"/>
-        </a:xfrm>
-      </p:grpSpPr>
-      <p:sp>
-        <p:nvSpPr>
-          <p:cNvPr id="2" name="Slide Image Placeholder 1"/>
-          <p:cNvSpPr>
-            <a:spLocks noGrp="1" noRot="1" noChangeAspect="1"/>
-          </p:cNvSpPr>
-          <p:nvPr>
-            <p:ph type="sldImg"/>
-          </p:nvPr>
-        </p:nvSpPr>
-        <p:spPr/>
-      </p:sp>
-      <p:sp>
-        <p:nvSpPr>
-          <p:cNvPr id="3" name="Notes Placeholder 2"/>
-          <p:cNvSpPr>
-            <a:spLocks noGrp="1"/>
-          </p:cNvSpPr>
-          <p:nvPr>
-            <p:ph type="body" idx="1"/>
-          </p:nvPr>
-        </p:nvSpPr>
-        <p:spPr/>
-        <p:txBody>
-          <a:bodyPr/>
-          <a:lstStyle/>
-          <a:p>
-            <a:r>
-              <a:rPr lang="en-US" dirty="0"/>
-              <a:t>Explain that edge is not magic. Network quality matters. The HSHL shared Wi-Fi increased edge latency from 95 to 422 ms, but cloud became much worse at 2170 ms.</a:t>
-            </a:r>
-          </a:p>
-        </p:txBody>
-      </p:sp>
-      <p:sp>
-        <p:nvSpPr>
-          <p:cNvPr id="4" name="Slide Number Placeholder 3"/>
-          <p:cNvSpPr>
-            <a:spLocks noGrp="1"/>
-          </p:cNvSpPr>
-          <p:nvPr>
-            <p:ph type="sldNum" sz="quarter" idx="10"/>
-          </p:nvPr>
-        </p:nvSpPr>
-        <p:spPr/>
-        <p:txBody>
-          <a:bodyPr/>
-          <a:lstStyle/>
-          <a:p>
-            <a:fld id="{F7021451-1387-4CA6-816F-3879F97B5CBC}" type="slidenum">
-              <a:rPr lang="en-US"/>
-              <a:t>7</a:t>
-            </a:fld>
-            <a:endParaRPr lang="en-US"/>
-          </a:p>
-        </p:txBody>
-      </p:sp>
-    </p:spTree>
-    <p:extLst>
-      <p:ext uri="{BB962C8B-B14F-4D97-AF65-F5344CB8AC3E}">
-        <p14:creationId xmlns:p14="http://schemas.microsoft.com/office/powerpoint/2010/main" val="1024086991"/>
-      </p:ext>
-    </p:extLst>
-  </p:cSld>
-  <p:clrMapOvr>
-    <a:masterClrMapping/>
-  </p:clrMapOvr>
-</p:notes>
-</file>
-
-<file path=ppt/notesSlides/notesSlide8.xml><?xml version="1.0" encoding="utf-8"?>
-<p:notes xmlns:a="http://schemas.openxmlformats.org/drawingml/2006/main" xmlns:r="http://schemas.openxmlformats.org/officeDocument/2006/relationships" xmlns:p="http://schemas.openxmlformats.org/presentationml/2006/main">
-  <p:cSld>
-    <p:spTree>
-      <p:nvGrpSpPr>
-        <p:cNvPr id="1" name=""/>
-        <p:cNvGrpSpPr/>
-        <p:nvPr/>
-      </p:nvGrpSpPr>
-      <p:grpSpPr>
-        <a:xfrm>
-          <a:off x="0" y="0"/>
-          <a:ext cx="0" cy="0"/>
-          <a:chOff x="0" y="0"/>
-          <a:chExt cx="0" cy="0"/>
-        </a:xfrm>
-      </p:grpSpPr>
-      <p:sp>
-        <p:nvSpPr>
-          <p:cNvPr id="2" name="Slide Image Placeholder 1"/>
-          <p:cNvSpPr>
-            <a:spLocks noGrp="1" noRot="1" noChangeAspect="1"/>
-          </p:cNvSpPr>
-          <p:nvPr>
-            <p:ph type="sldImg"/>
-          </p:nvPr>
-        </p:nvSpPr>
-        <p:spPr/>
-      </p:sp>
-      <p:sp>
-        <p:nvSpPr>
-          <p:cNvPr id="3" name="Notes Placeholder 2"/>
-          <p:cNvSpPr>
-            <a:spLocks noGrp="1"/>
-          </p:cNvSpPr>
-          <p:nvPr>
-            <p:ph type="body" idx="1"/>
-          </p:nvPr>
-        </p:nvSpPr>
-        <p:spPr/>
-        <p:txBody>
-          <a:bodyPr/>
-          <a:lstStyle/>
-          <a:p>
-            <a:r>
-              <a:rPr lang="en-US" dirty="0"/>
-              <a:t>This slide explains the equation in easy words. Edge reduces X because data travels a short local distance. Shared Wi-Fi reduces effective bandwidth, so latency rises. Cloud has a much longer internet route.</a:t>
-            </a:r>
-          </a:p>
-        </p:txBody>
-      </p:sp>
-      <p:sp>
-        <p:nvSpPr>
-          <p:cNvPr id="4" name="Slide Number Placeholder 3"/>
-          <p:cNvSpPr>
-            <a:spLocks noGrp="1"/>
-          </p:cNvSpPr>
-          <p:nvPr>
-            <p:ph type="sldNum" sz="quarter" idx="10"/>
-          </p:nvPr>
-        </p:nvSpPr>
-        <p:spPr/>
-        <p:txBody>
-          <a:bodyPr/>
-          <a:lstStyle/>
-          <a:p>
-            <a:fld id="{F7021451-1387-4CA6-816F-3879F97B5CBC}" type="slidenum">
-              <a:rPr lang="en-US"/>
-              <a:t>8</a:t>
-            </a:fld>
-            <a:endParaRPr lang="en-US"/>
-          </a:p>
-        </p:txBody>
-      </p:sp>
-    </p:spTree>
-    <p:extLst>
-      <p:ext uri="{BB962C8B-B14F-4D97-AF65-F5344CB8AC3E}">
-        <p14:creationId xmlns:p14="http://schemas.microsoft.com/office/powerpoint/2010/main" val="1024086991"/>
-      </p:ext>
-    </p:extLst>
-  </p:cSld>
-  <p:clrMapOvr>
-    <a:masterClrMapping/>
-  </p:clrMapOvr>
-</p:notes>
-</file>
-
-<file path=ppt/notesSlides/notesSlide9.xml><?xml version="1.0" encoding="utf-8"?>
-<p:notes xmlns:a="http://schemas.openxmlformats.org/drawingml/2006/main" xmlns:r="http://schemas.openxmlformats.org/officeDocument/2006/relationships" xmlns:p="http://schemas.openxmlformats.org/presentationml/2006/main">
-  <p:cSld>
-    <p:spTree>
-      <p:nvGrpSpPr>
-        <p:cNvPr id="1" name=""/>
-        <p:cNvGrpSpPr/>
-        <p:nvPr/>
-      </p:nvGrpSpPr>
-      <p:grpSpPr>
-        <a:xfrm>
-          <a:off x="0" y="0"/>
-          <a:ext cx="0" cy="0"/>
-          <a:chOff x="0" y="0"/>
-          <a:chExt cx="0" cy="0"/>
-        </a:xfrm>
-      </p:grpSpPr>
-      <p:sp>
-        <p:nvSpPr>
-          <p:cNvPr id="2" name="Slide Image Placeholder 1"/>
-          <p:cNvSpPr>
-            <a:spLocks noGrp="1" noRot="1" noChangeAspect="1"/>
-          </p:cNvSpPr>
-          <p:nvPr>
-            <p:ph type="sldImg"/>
-          </p:nvPr>
-        </p:nvSpPr>
-        <p:spPr/>
-      </p:sp>
-      <p:sp>
-        <p:nvSpPr>
-          <p:cNvPr id="3" name="Notes Placeholder 2"/>
-          <p:cNvSpPr>
-            <a:spLocks noGrp="1"/>
-          </p:cNvSpPr>
-          <p:nvPr>
-            <p:ph type="body" idx="1"/>
-          </p:nvPr>
-        </p:nvSpPr>
-        <p:spPr/>
-        <p:txBody>
-          <a:bodyPr/>
-          <a:lstStyle/>
-          <a:p>
-            <a:r>
-              <a:rPr lang="en-US" dirty="0"/>
-              <a:t>Table III from the paper summarises all key dimensions. Notice that storage and analysis scale is the ONE area where cloud wins. This is why the paper recommends a hybrid approach: edge handles all time-sensitive operations, cloud handles everything that doesn't require an immediate response (storage, analytics, AI model retraining).</a:t>
-            </a:r>
-          </a:p>
-        </p:txBody>
-      </p:sp>
-      <p:sp>
-        <p:nvSpPr>
-          <p:cNvPr id="4" name="Slide Number Placeholder 3"/>
-          <p:cNvSpPr>
-            <a:spLocks noGrp="1"/>
-          </p:cNvSpPr>
-          <p:nvPr>
-            <p:ph type="sldNum" sz="quarter" idx="10"/>
-          </p:nvPr>
-        </p:nvSpPr>
-        <p:spPr/>
-        <p:txBody>
-          <a:bodyPr/>
-          <a:lstStyle/>
-          <a:p>
-            <a:fld id="{F7021451-1387-4CA6-816F-3879F97B5CBC}" type="slidenum">
-              <a:rPr lang="en-US"/>
-              <a:t>9</a:t>
             </a:fld>
             <a:endParaRPr lang="en-US"/>
           </a:p>
@@ -1820,19 +1462,19 @@
           <a:bodyPr/>
           <a:lstStyle/>
           <a:p>
-            <a:endParaRPr lang="en-US" dirty="0"/>
-          </a:p>
-          <a:p>
-            <a:endParaRPr lang="en-US" dirty="0"/>
-          </a:p>
-          <a:p>
-            <a:endParaRPr lang="en-US" dirty="0"/>
-          </a:p>
-          <a:p>
-            <a:endParaRPr lang="en-US" dirty="0"/>
-          </a:p>
-          <a:p>
-            <a:endParaRPr lang="en-US" dirty="0"/>
+            <a:endParaRPr lang="en-US"/>
+          </a:p>
+          <a:p>
+            <a:endParaRPr lang="en-US"/>
+          </a:p>
+          <a:p>
+            <a:endParaRPr lang="en-US"/>
+          </a:p>
+          <a:p>
+            <a:endParaRPr lang="en-US"/>
+          </a:p>
+          <a:p>
+            <a:endParaRPr lang="en-US"/>
           </a:p>
         </p:txBody>
       </p:sp>
@@ -1897,7 +1539,7 @@
               <a:buNone/>
             </a:pPr>
             <a:r>
-              <a:rPr lang="en-US" sz="2800" b="1" dirty="0">
+              <a:rPr lang="en-US" sz="2800" b="1">
                 <a:solidFill>
                   <a:srgbClr val="0B172A"/>
                 </a:solidFill>
@@ -1907,7 +1549,7 @@
               </a:rPr>
               <a:t>Latency test Setup</a:t>
             </a:r>
-            <a:endParaRPr lang="en-US" sz="2800" dirty="0"/>
+            <a:endParaRPr lang="en-US" sz="2800"/>
           </a:p>
         </p:txBody>
       </p:sp>
@@ -1936,7 +1578,7 @@
               <a:buNone/>
             </a:pPr>
             <a:r>
-              <a:rPr lang="en-US" sz="850" b="1" dirty="0">
+              <a:rPr lang="en-US" sz="850" b="1">
                 <a:solidFill>
                   <a:srgbClr val="64748B"/>
                 </a:solidFill>
@@ -1946,7 +1588,7 @@
               </a:rPr>
               <a:t>02</a:t>
             </a:r>
-            <a:endParaRPr lang="en-US" sz="850" dirty="0"/>
+            <a:endParaRPr lang="en-US" sz="850"/>
           </a:p>
         </p:txBody>
       </p:sp>
@@ -1975,14 +1617,14 @@
               <a:buNone/>
             </a:pPr>
             <a:r>
-              <a:rPr lang="en-US" sz="1800" b="1" dirty="0">
+              <a:rPr lang="en-US" sz="1800" b="1">
                 <a:solidFill>
                   <a:srgbClr val="0B172A"/>
                 </a:solidFill>
               </a:rPr>
               <a:t>Latency Definition</a:t>
             </a:r>
-            <a:endParaRPr lang="en-US" sz="1800" dirty="0"/>
+            <a:endParaRPr lang="en-US" sz="1800"/>
           </a:p>
         </p:txBody>
       </p:sp>
@@ -2013,14 +1655,14 @@
               <a:buNone/>
             </a:pPr>
             <a:r>
-              <a:rPr lang="en-US" sz="1700" dirty="0">
+              <a:rPr lang="en-US" sz="1700">
                 <a:solidFill>
                   <a:srgbClr val="1E293B"/>
                 </a:solidFill>
               </a:rPr>
               <a:t>Time from sending a request until the response is received.</a:t>
             </a:r>
-            <a:endParaRPr lang="en-US" sz="1700" dirty="0"/>
+            <a:endParaRPr lang="en-US" sz="1700"/>
           </a:p>
         </p:txBody>
       </p:sp>
@@ -2051,14 +1693,14 @@
               <a:buNone/>
             </a:pPr>
             <a:r>
-              <a:rPr lang="en-US" sz="1100" b="1" dirty="0">
+              <a:rPr lang="en-US" sz="1100" b="1">
                 <a:solidFill>
                   <a:srgbClr val="64748B"/>
                 </a:solidFill>
               </a:rPr>
               <a:t>Client device</a:t>
             </a:r>
-            <a:endParaRPr lang="en-US" sz="1100" dirty="0"/>
+            <a:endParaRPr lang="en-US" sz="1100"/>
           </a:p>
         </p:txBody>
       </p:sp>
@@ -2089,7 +1731,7 @@
               <a:buNone/>
             </a:pPr>
             <a:r>
-              <a:rPr lang="en-US" sz="2800" b="1" dirty="0">
+              <a:rPr lang="en-US" sz="2800" b="1">
                 <a:solidFill>
                   <a:srgbClr val="2563EB"/>
                 </a:solidFill>
@@ -2099,7 +1741,7 @@
               </a:rPr>
               <a:t>Mobile phone</a:t>
             </a:r>
-            <a:endParaRPr lang="en-US" sz="2800" dirty="0"/>
+            <a:endParaRPr lang="en-US" sz="2800"/>
           </a:p>
         </p:txBody>
       </p:sp>
@@ -2130,14 +1772,14 @@
               <a:buNone/>
             </a:pPr>
             <a:r>
-              <a:rPr lang="en-US" sz="1050" dirty="0">
+              <a:rPr lang="en-US" sz="1050">
                 <a:solidFill>
                   <a:srgbClr val="64748B"/>
                 </a:solidFill>
               </a:rPr>
               <a:t>Generated sensor-like data</a:t>
             </a:r>
-            <a:endParaRPr lang="en-US" sz="1050" dirty="0"/>
+            <a:endParaRPr lang="en-US" sz="1050"/>
           </a:p>
         </p:txBody>
       </p:sp>
@@ -2168,14 +1810,14 @@
               <a:buNone/>
             </a:pPr>
             <a:r>
-              <a:rPr lang="en-US" sz="1100" b="1" dirty="0">
+              <a:rPr lang="en-US" sz="1100" b="1">
                 <a:solidFill>
                   <a:srgbClr val="64748B"/>
                 </a:solidFill>
               </a:rPr>
               <a:t>Edge server</a:t>
             </a:r>
-            <a:endParaRPr lang="en-US" sz="1100" dirty="0"/>
+            <a:endParaRPr lang="en-US" sz="1100"/>
           </a:p>
         </p:txBody>
       </p:sp>
@@ -2206,7 +1848,7 @@
               <a:buNone/>
             </a:pPr>
             <a:r>
-              <a:rPr lang="en-US" sz="2800" b="1" dirty="0">
+              <a:rPr lang="en-US" sz="2800" b="1">
                 <a:solidFill>
                   <a:srgbClr val="14B8A6"/>
                 </a:solidFill>
@@ -2216,7 +1858,7 @@
               </a:rPr>
               <a:t>Ubuntu laptop</a:t>
             </a:r>
-            <a:endParaRPr lang="en-US" sz="2800" dirty="0"/>
+            <a:endParaRPr lang="en-US" sz="2800"/>
           </a:p>
         </p:txBody>
       </p:sp>
@@ -2247,14 +1889,14 @@
               <a:buNone/>
             </a:pPr>
             <a:r>
-              <a:rPr lang="en-US" sz="1050" dirty="0">
+              <a:rPr lang="en-US" sz="1050">
                 <a:solidFill>
                   <a:srgbClr val="64748B"/>
                 </a:solidFill>
               </a:rPr>
               <a:t>Processed the request locally</a:t>
             </a:r>
-            <a:endParaRPr lang="en-US" sz="1050" dirty="0"/>
+            <a:endParaRPr lang="en-US" sz="1050"/>
           </a:p>
         </p:txBody>
       </p:sp>
@@ -2285,14 +1927,14 @@
               <a:buNone/>
             </a:pPr>
             <a:r>
-              <a:rPr lang="en-US" sz="1100" b="1" dirty="0">
+              <a:rPr lang="en-US" sz="1100" b="1">
                 <a:solidFill>
                   <a:srgbClr val="64748B"/>
                 </a:solidFill>
               </a:rPr>
               <a:t>Cloud target</a:t>
             </a:r>
-            <a:endParaRPr lang="en-US" sz="1100" dirty="0"/>
+            <a:endParaRPr lang="en-US" sz="1100"/>
           </a:p>
         </p:txBody>
       </p:sp>
@@ -2323,7 +1965,7 @@
               <a:buNone/>
             </a:pPr>
             <a:r>
-              <a:rPr lang="en-US" sz="2800" b="1" dirty="0">
+              <a:rPr lang="en-US" sz="2800" b="1">
                 <a:solidFill>
                   <a:srgbClr val="F59E0B"/>
                 </a:solidFill>
@@ -2333,7 +1975,7 @@
               </a:rPr>
               <a:t>Internet server</a:t>
             </a:r>
-            <a:endParaRPr lang="en-US" sz="2800" dirty="0"/>
+            <a:endParaRPr lang="en-US" sz="2800"/>
           </a:p>
         </p:txBody>
       </p:sp>
@@ -2364,14 +2006,14 @@
               <a:buNone/>
             </a:pPr>
             <a:r>
-              <a:rPr lang="en-US" sz="1050" dirty="0">
+              <a:rPr lang="en-US" sz="1050">
                 <a:solidFill>
                   <a:srgbClr val="64748B"/>
                 </a:solidFill>
               </a:rPr>
               <a:t>External online server</a:t>
             </a:r>
-            <a:endParaRPr lang="en-US" sz="1050" dirty="0"/>
+            <a:endParaRPr lang="en-US" sz="1050"/>
           </a:p>
         </p:txBody>
       </p:sp>
@@ -2498,14 +2140,14 @@
               <a:buNone/>
             </a:pPr>
             <a:r>
-              <a:rPr lang="en-US" sz="1050" dirty="0">
+              <a:rPr lang="en-US" sz="1050">
                 <a:solidFill>
                   <a:srgbClr val="64748B"/>
                 </a:solidFill>
               </a:rPr>
               <a:t>Request sent</a:t>
             </a:r>
-            <a:endParaRPr lang="en-US" sz="1050" dirty="0"/>
+            <a:endParaRPr lang="en-US" sz="1050"/>
           </a:p>
         </p:txBody>
       </p:sp>
@@ -2534,14 +2176,14 @@
               <a:buNone/>
             </a:pPr>
             <a:r>
-              <a:rPr lang="en-US" sz="1050" dirty="0">
+              <a:rPr lang="en-US" sz="1050">
                 <a:solidFill>
                   <a:srgbClr val="64748B"/>
                 </a:solidFill>
               </a:rPr>
               <a:t>Response received</a:t>
             </a:r>
-            <a:endParaRPr lang="en-US" sz="1050" dirty="0"/>
+            <a:endParaRPr lang="en-US" sz="1050"/>
           </a:p>
         </p:txBody>
       </p:sp>
@@ -2570,14 +2212,14 @@
               <a:buNone/>
             </a:pPr>
             <a:r>
-              <a:rPr lang="en-US" sz="1500" b="1" dirty="0">
+              <a:rPr lang="en-US" sz="1500" b="1">
                 <a:solidFill>
                   <a:srgbClr val="0B172A"/>
                 </a:solidFill>
               </a:rPr>
               <a:t>Measured latency</a:t>
             </a:r>
-            <a:endParaRPr lang="en-US" sz="1500" dirty="0"/>
+            <a:endParaRPr lang="en-US" sz="1500"/>
           </a:p>
         </p:txBody>
       </p:sp>
@@ -2610,1330 +2252,13 @@
           <a:lstStyle/>
           <a:p>
             <a:r>
-              <a:rPr lang="en-US" b="1" dirty="0"/>
+              <a:rPr lang="en-US" b="1"/>
               <a:t>Tested in two environments: </a:t>
             </a:r>
             <a:r>
-              <a:rPr lang="en-US" dirty="0"/>
+              <a:rPr lang="en-US"/>
               <a:t>Paderborn home Wi-Fi (stable, private)  ·  HSHL central Wi-Fi (shared, congested)</a:t>
             </a:r>
-          </a:p>
-        </p:txBody>
-      </p:sp>
-    </p:spTree>
-  </p:cSld>
-  <p:clrMapOvr>
-    <a:masterClrMapping/>
-  </p:clrMapOvr>
-</p:sld>
-</file>
-
-<file path=ppt/slides/slide10.xml><?xml version="1.0" encoding="utf-8"?>
-<p:sld xmlns:a="http://schemas.openxmlformats.org/drawingml/2006/main" xmlns:r="http://schemas.openxmlformats.org/officeDocument/2006/relationships" xmlns:p="http://schemas.openxmlformats.org/presentationml/2006/main">
-  <p:cSld name="Slide 9">
-    <p:bg>
-      <p:bgPr>
-        <a:solidFill>
-          <a:srgbClr val="F8FAFC"/>
-        </a:solidFill>
-        <a:effectLst/>
-      </p:bgPr>
-    </p:bg>
-    <p:spTree>
-      <p:nvGrpSpPr>
-        <p:cNvPr id="1" name=""/>
-        <p:cNvGrpSpPr/>
-        <p:nvPr/>
-      </p:nvGrpSpPr>
-      <p:grpSpPr>
-        <a:xfrm>
-          <a:off x="0" y="0"/>
-          <a:ext cx="0" cy="0"/>
-          <a:chOff x="0" y="0"/>
-          <a:chExt cx="0" cy="0"/>
-        </a:xfrm>
-      </p:grpSpPr>
-      <p:sp>
-        <p:nvSpPr>
-          <p:cNvPr id="2" name="Shape 0"/>
-          <p:cNvSpPr/>
-          <p:nvPr/>
-        </p:nvSpPr>
-        <p:spPr>
-          <a:xfrm>
-            <a:off x="0" y="0"/>
-            <a:ext cx="12191695" cy="6858000"/>
-          </a:xfrm>
-          <a:prstGeom prst="rect">
-            <a:avLst/>
-          </a:prstGeom>
-          <a:solidFill>
-            <a:srgbClr val="F8FAFC"/>
-          </a:solidFill>
-          <a:ln w="12700">
-            <a:solidFill>
-              <a:srgbClr val="F8FAFC">
-                <a:alpha val="0"/>
-              </a:srgbClr>
-            </a:solidFill>
-            <a:prstDash val="solid"/>
-          </a:ln>
-        </p:spPr>
-        <p:txBody>
-          <a:bodyPr/>
-          <a:lstStyle/>
-          <a:p>
-            <a:endParaRPr lang="en-DE"/>
-          </a:p>
-        </p:txBody>
-      </p:sp>
-      <p:sp>
-        <p:nvSpPr>
-          <p:cNvPr id="3" name="Shape 1"/>
-          <p:cNvSpPr/>
-          <p:nvPr/>
-        </p:nvSpPr>
-        <p:spPr>
-          <a:xfrm>
-            <a:off x="0" y="0"/>
-            <a:ext cx="128016" cy="6858000"/>
-          </a:xfrm>
-          <a:prstGeom prst="rect">
-            <a:avLst/>
-          </a:prstGeom>
-          <a:solidFill>
-            <a:srgbClr val="2563EB"/>
-          </a:solidFill>
-          <a:ln w="12700">
-            <a:solidFill>
-              <a:srgbClr val="2563EB">
-                <a:alpha val="0"/>
-              </a:srgbClr>
-            </a:solidFill>
-            <a:prstDash val="solid"/>
-          </a:ln>
-        </p:spPr>
-        <p:txBody>
-          <a:bodyPr/>
-          <a:lstStyle/>
-          <a:p>
-            <a:endParaRPr lang="en-DE"/>
-          </a:p>
-        </p:txBody>
-      </p:sp>
-      <p:sp>
-        <p:nvSpPr>
-          <p:cNvPr id="4" name="Text 2"/>
-          <p:cNvSpPr/>
-          <p:nvPr/>
-        </p:nvSpPr>
-        <p:spPr>
-          <a:xfrm>
-            <a:off x="502920" y="384048"/>
-            <a:ext cx="10881360" cy="438912"/>
-          </a:xfrm>
-          <a:prstGeom prst="rect">
-            <a:avLst/>
-          </a:prstGeom>
-          <a:noFill/>
-          <a:ln/>
-        </p:spPr>
-        <p:txBody>
-          <a:bodyPr wrap="square" lIns="0" tIns="0" rIns="0" bIns="0" rtlCol="0" anchor="ctr">
-            <a:normAutofit/>
-          </a:bodyPr>
-          <a:lstStyle/>
-          <a:p>
-            <a:pPr marL="0" indent="0">
-              <a:buNone/>
-            </a:pPr>
-            <a:r>
-              <a:rPr lang="en-US" sz="2800" b="1" dirty="0">
-                <a:solidFill>
-                  <a:srgbClr val="0B172A"/>
-                </a:solidFill>
-                <a:latin typeface="Aptos Display" pitchFamily="34" charset="0"/>
-                <a:ea typeface="Aptos Display" pitchFamily="34" charset="-122"/>
-                <a:cs typeface="Aptos Display" pitchFamily="34" charset="-120"/>
-              </a:rPr>
-              <a:t>Edge vs cloud: what each is best for</a:t>
-            </a:r>
-            <a:endParaRPr lang="en-US" sz="2800" dirty="0"/>
-          </a:p>
-        </p:txBody>
-      </p:sp>
-      <p:sp>
-        <p:nvSpPr>
-          <p:cNvPr id="5" name="Text 3"/>
-          <p:cNvSpPr/>
-          <p:nvPr/>
-        </p:nvSpPr>
-        <p:spPr>
-          <a:xfrm>
-            <a:off x="530352" y="868680"/>
-            <a:ext cx="10241280" cy="274320"/>
-          </a:xfrm>
-          <a:prstGeom prst="rect">
-            <a:avLst/>
-          </a:prstGeom>
-          <a:noFill/>
-          <a:ln/>
-        </p:spPr>
-        <p:txBody>
-          <a:bodyPr wrap="square" lIns="0" tIns="0" rIns="0" bIns="0" rtlCol="0" anchor="ctr">
-            <a:normAutofit/>
-          </a:bodyPr>
-          <a:lstStyle/>
-          <a:p>
-            <a:pPr marL="0" indent="0">
-              <a:buNone/>
-            </a:pPr>
-            <a:r>
-              <a:rPr lang="en-US" sz="1250" dirty="0">
-                <a:solidFill>
-                  <a:srgbClr val="64748B"/>
-                </a:solidFill>
-                <a:latin typeface="Aptos" pitchFamily="34" charset="0"/>
-                <a:ea typeface="Aptos" pitchFamily="34" charset="-122"/>
-                <a:cs typeface="Aptos" pitchFamily="34" charset="-120"/>
-              </a:rPr>
-              <a:t>The comparative analysis points to a practical division of tasks.</a:t>
-            </a:r>
-            <a:endParaRPr lang="en-US" sz="1250" dirty="0"/>
-          </a:p>
-        </p:txBody>
-      </p:sp>
-      <p:sp>
-        <p:nvSpPr>
-          <p:cNvPr id="6" name="Text 4"/>
-          <p:cNvSpPr/>
-          <p:nvPr/>
-        </p:nvSpPr>
-        <p:spPr>
-          <a:xfrm>
-            <a:off x="502920" y="6492240"/>
-            <a:ext cx="7772400" cy="201168"/>
-          </a:xfrm>
-          <a:prstGeom prst="rect">
-            <a:avLst/>
-          </a:prstGeom>
-          <a:noFill/>
-          <a:ln/>
-        </p:spPr>
-        <p:txBody>
-          <a:bodyPr wrap="square" lIns="0" tIns="0" rIns="0" bIns="0" rtlCol="0" anchor="ctr"/>
-          <a:lstStyle/>
-          <a:p>
-            <a:pPr marL="0" indent="0">
-              <a:buNone/>
-            </a:pPr>
-            <a:r>
-              <a:rPr lang="en-US" sz="850" dirty="0">
-                <a:solidFill>
-                  <a:srgbClr val="64748B"/>
-                </a:solidFill>
-                <a:latin typeface="Aptos" pitchFamily="34" charset="0"/>
-                <a:ea typeface="Aptos" pitchFamily="34" charset="-122"/>
-                <a:cs typeface="Aptos" pitchFamily="34" charset="-120"/>
-              </a:rPr>
-              <a:t>Edge Computing in Industrial Communication • Sections VII–IX</a:t>
-            </a:r>
-            <a:endParaRPr lang="en-US" sz="850" dirty="0"/>
-          </a:p>
-        </p:txBody>
-      </p:sp>
-      <p:sp>
-        <p:nvSpPr>
-          <p:cNvPr id="7" name="Text 5"/>
-          <p:cNvSpPr/>
-          <p:nvPr/>
-        </p:nvSpPr>
-        <p:spPr>
-          <a:xfrm>
-            <a:off x="11384280" y="6446520"/>
-            <a:ext cx="320040" cy="228600"/>
-          </a:xfrm>
-          <a:prstGeom prst="rect">
-            <a:avLst/>
-          </a:prstGeom>
-          <a:noFill/>
-          <a:ln/>
-        </p:spPr>
-        <p:txBody>
-          <a:bodyPr wrap="square" lIns="0" tIns="0" rIns="0" bIns="0" rtlCol="0" anchor="ctr"/>
-          <a:lstStyle/>
-          <a:p>
-            <a:pPr marL="0" indent="0" algn="r">
-              <a:buNone/>
-            </a:pPr>
-            <a:r>
-              <a:rPr lang="en-US" sz="850" b="1" dirty="0">
-                <a:solidFill>
-                  <a:srgbClr val="64748B"/>
-                </a:solidFill>
-                <a:latin typeface="Aptos" pitchFamily="34" charset="0"/>
-                <a:ea typeface="Aptos" pitchFamily="34" charset="-122"/>
-                <a:cs typeface="Aptos" pitchFamily="34" charset="-120"/>
-              </a:rPr>
-              <a:t>09</a:t>
-            </a:r>
-            <a:endParaRPr lang="en-US" sz="850" dirty="0"/>
-          </a:p>
-        </p:txBody>
-      </p:sp>
-      <p:sp>
-        <p:nvSpPr>
-          <p:cNvPr id="8" name="Shape 6"/>
-          <p:cNvSpPr/>
-          <p:nvPr/>
-        </p:nvSpPr>
-        <p:spPr>
-          <a:xfrm>
-            <a:off x="822960" y="1463040"/>
-            <a:ext cx="10515600" cy="566928"/>
-          </a:xfrm>
-          <a:prstGeom prst="rect">
-            <a:avLst/>
-          </a:prstGeom>
-          <a:solidFill>
-            <a:srgbClr val="0B172A"/>
-          </a:solidFill>
-          <a:ln w="12700">
-            <a:solidFill>
-              <a:srgbClr val="0B172A">
-                <a:alpha val="0"/>
-              </a:srgbClr>
-            </a:solidFill>
-            <a:prstDash val="solid"/>
-          </a:ln>
-        </p:spPr>
-        <p:txBody>
-          <a:bodyPr/>
-          <a:lstStyle/>
-          <a:p>
-            <a:endParaRPr lang="en-DE"/>
-          </a:p>
-        </p:txBody>
-      </p:sp>
-      <p:sp>
-        <p:nvSpPr>
-          <p:cNvPr id="9" name="Text 7"/>
-          <p:cNvSpPr/>
-          <p:nvPr/>
-        </p:nvSpPr>
-        <p:spPr>
-          <a:xfrm>
-            <a:off x="1005840" y="1636776"/>
-            <a:ext cx="2743200" cy="182880"/>
-          </a:xfrm>
-          <a:prstGeom prst="rect">
-            <a:avLst/>
-          </a:prstGeom>
-          <a:noFill/>
-          <a:ln/>
-        </p:spPr>
-        <p:txBody>
-          <a:bodyPr wrap="square" lIns="0" tIns="0" rIns="0" bIns="0" rtlCol="0" anchor="ctr"/>
-          <a:lstStyle/>
-          <a:p>
-            <a:pPr marL="0" indent="0">
-              <a:buNone/>
-            </a:pPr>
-            <a:r>
-              <a:rPr lang="en-US" sz="1150" b="1" dirty="0">
-                <a:solidFill>
-                  <a:srgbClr val="FFFFFF"/>
-                </a:solidFill>
-              </a:rPr>
-              <a:t>Criterion</a:t>
-            </a:r>
-            <a:endParaRPr lang="en-US" sz="1150" dirty="0"/>
-          </a:p>
-        </p:txBody>
-      </p:sp>
-      <p:sp>
-        <p:nvSpPr>
-          <p:cNvPr id="10" name="Text 8"/>
-          <p:cNvSpPr/>
-          <p:nvPr/>
-        </p:nvSpPr>
-        <p:spPr>
-          <a:xfrm>
-            <a:off x="4343400" y="1636776"/>
-            <a:ext cx="2743200" cy="182880"/>
-          </a:xfrm>
-          <a:prstGeom prst="rect">
-            <a:avLst/>
-          </a:prstGeom>
-          <a:noFill/>
-          <a:ln/>
-        </p:spPr>
-        <p:txBody>
-          <a:bodyPr wrap="square" lIns="0" tIns="0" rIns="0" bIns="0" rtlCol="0" anchor="ctr"/>
-          <a:lstStyle/>
-          <a:p>
-            <a:pPr marL="0" indent="0">
-              <a:buNone/>
-            </a:pPr>
-            <a:r>
-              <a:rPr lang="en-US" sz="1150" b="1" dirty="0">
-                <a:solidFill>
-                  <a:srgbClr val="FFFFFF"/>
-                </a:solidFill>
-              </a:rPr>
-              <a:t>Edge computing</a:t>
-            </a:r>
-            <a:endParaRPr lang="en-US" sz="1150" dirty="0"/>
-          </a:p>
-        </p:txBody>
-      </p:sp>
-      <p:sp>
-        <p:nvSpPr>
-          <p:cNvPr id="11" name="Text 9"/>
-          <p:cNvSpPr/>
-          <p:nvPr/>
-        </p:nvSpPr>
-        <p:spPr>
-          <a:xfrm>
-            <a:off x="7680960" y="1636776"/>
-            <a:ext cx="2743200" cy="182880"/>
-          </a:xfrm>
-          <a:prstGeom prst="rect">
-            <a:avLst/>
-          </a:prstGeom>
-          <a:noFill/>
-          <a:ln/>
-        </p:spPr>
-        <p:txBody>
-          <a:bodyPr wrap="square" lIns="0" tIns="0" rIns="0" bIns="0" rtlCol="0" anchor="ctr"/>
-          <a:lstStyle/>
-          <a:p>
-            <a:pPr marL="0" indent="0">
-              <a:buNone/>
-            </a:pPr>
-            <a:r>
-              <a:rPr lang="en-US" sz="1150" b="1" dirty="0">
-                <a:solidFill>
-                  <a:srgbClr val="FFFFFF"/>
-                </a:solidFill>
-              </a:rPr>
-              <a:t>Cloud computing</a:t>
-            </a:r>
-            <a:endParaRPr lang="en-US" sz="1150" dirty="0"/>
-          </a:p>
-        </p:txBody>
-      </p:sp>
-      <p:sp>
-        <p:nvSpPr>
-          <p:cNvPr id="12" name="Shape 10"/>
-          <p:cNvSpPr/>
-          <p:nvPr/>
-        </p:nvSpPr>
-        <p:spPr>
-          <a:xfrm>
-            <a:off x="822960" y="2029968"/>
-            <a:ext cx="10515600" cy="530352"/>
-          </a:xfrm>
-          <a:prstGeom prst="rect">
-            <a:avLst/>
-          </a:prstGeom>
-          <a:solidFill>
-            <a:srgbClr val="FFFFFF"/>
-          </a:solidFill>
-          <a:ln w="6350">
-            <a:solidFill>
-              <a:srgbClr val="E2E8F0"/>
-            </a:solidFill>
-            <a:prstDash val="solid"/>
-          </a:ln>
-        </p:spPr>
-        <p:txBody>
-          <a:bodyPr/>
-          <a:lstStyle/>
-          <a:p>
-            <a:endParaRPr lang="en-DE"/>
-          </a:p>
-        </p:txBody>
-      </p:sp>
-      <p:sp>
-        <p:nvSpPr>
-          <p:cNvPr id="13" name="Text 11"/>
-          <p:cNvSpPr/>
-          <p:nvPr/>
-        </p:nvSpPr>
-        <p:spPr>
-          <a:xfrm>
-            <a:off x="1005840" y="2194560"/>
-            <a:ext cx="2926080" cy="182880"/>
-          </a:xfrm>
-          <a:prstGeom prst="rect">
-            <a:avLst/>
-          </a:prstGeom>
-          <a:noFill/>
-          <a:ln/>
-        </p:spPr>
-        <p:txBody>
-          <a:bodyPr wrap="square" lIns="0" tIns="0" rIns="0" bIns="0" rtlCol="0" anchor="ctr">
-            <a:normAutofit/>
-          </a:bodyPr>
-          <a:lstStyle/>
-          <a:p>
-            <a:pPr marL="0" indent="0">
-              <a:buNone/>
-            </a:pPr>
-            <a:r>
-              <a:rPr lang="en-US" sz="1060" b="1" dirty="0">
-                <a:solidFill>
-                  <a:srgbClr val="1E293B"/>
-                </a:solidFill>
-              </a:rPr>
-              <a:t>Stable latency</a:t>
-            </a:r>
-            <a:endParaRPr lang="en-US" sz="1060" dirty="0"/>
-          </a:p>
-        </p:txBody>
-      </p:sp>
-      <p:sp>
-        <p:nvSpPr>
-          <p:cNvPr id="14" name="Text 12"/>
-          <p:cNvSpPr/>
-          <p:nvPr/>
-        </p:nvSpPr>
-        <p:spPr>
-          <a:xfrm>
-            <a:off x="4343400" y="2194560"/>
-            <a:ext cx="2926080" cy="182880"/>
-          </a:xfrm>
-          <a:prstGeom prst="rect">
-            <a:avLst/>
-          </a:prstGeom>
-          <a:noFill/>
-          <a:ln/>
-        </p:spPr>
-        <p:txBody>
-          <a:bodyPr wrap="square" lIns="0" tIns="0" rIns="0" bIns="0" rtlCol="0" anchor="ctr">
-            <a:normAutofit/>
-          </a:bodyPr>
-          <a:lstStyle/>
-          <a:p>
-            <a:pPr marL="0" indent="0">
-              <a:buNone/>
-            </a:pPr>
-            <a:r>
-              <a:rPr lang="en-US" sz="1060" b="1" dirty="0">
-                <a:solidFill>
-                  <a:srgbClr val="10B981"/>
-                </a:solidFill>
-              </a:rPr>
-              <a:t>95 ms</a:t>
-            </a:r>
-            <a:endParaRPr lang="en-US" sz="1060" dirty="0"/>
-          </a:p>
-        </p:txBody>
-      </p:sp>
-      <p:sp>
-        <p:nvSpPr>
-          <p:cNvPr id="15" name="Text 13"/>
-          <p:cNvSpPr/>
-          <p:nvPr/>
-        </p:nvSpPr>
-        <p:spPr>
-          <a:xfrm>
-            <a:off x="7680960" y="2194560"/>
-            <a:ext cx="2926080" cy="182880"/>
-          </a:xfrm>
-          <a:prstGeom prst="rect">
-            <a:avLst/>
-          </a:prstGeom>
-          <a:noFill/>
-          <a:ln/>
-        </p:spPr>
-        <p:txBody>
-          <a:bodyPr wrap="square" lIns="0" tIns="0" rIns="0" bIns="0" rtlCol="0" anchor="ctr">
-            <a:normAutofit/>
-          </a:bodyPr>
-          <a:lstStyle/>
-          <a:p>
-            <a:pPr marL="0" indent="0">
-              <a:buNone/>
-            </a:pPr>
-            <a:r>
-              <a:rPr lang="en-US" sz="1060" b="1" dirty="0">
-                <a:solidFill>
-                  <a:srgbClr val="F59E0B"/>
-                </a:solidFill>
-              </a:rPr>
-              <a:t>510 ms</a:t>
-            </a:r>
-            <a:endParaRPr lang="en-US" sz="1060" dirty="0"/>
-          </a:p>
-        </p:txBody>
-      </p:sp>
-      <p:sp>
-        <p:nvSpPr>
-          <p:cNvPr id="16" name="Shape 14"/>
-          <p:cNvSpPr/>
-          <p:nvPr/>
-        </p:nvSpPr>
-        <p:spPr>
-          <a:xfrm>
-            <a:off x="822960" y="2560320"/>
-            <a:ext cx="10515600" cy="530352"/>
-          </a:xfrm>
-          <a:prstGeom prst="rect">
-            <a:avLst/>
-          </a:prstGeom>
-          <a:solidFill>
-            <a:srgbClr val="F1F5F9"/>
-          </a:solidFill>
-          <a:ln w="6350">
-            <a:solidFill>
-              <a:srgbClr val="E2E8F0"/>
-            </a:solidFill>
-            <a:prstDash val="solid"/>
-          </a:ln>
-        </p:spPr>
-        <p:txBody>
-          <a:bodyPr/>
-          <a:lstStyle/>
-          <a:p>
-            <a:endParaRPr lang="en-DE"/>
-          </a:p>
-        </p:txBody>
-      </p:sp>
-      <p:sp>
-        <p:nvSpPr>
-          <p:cNvPr id="17" name="Text 15"/>
-          <p:cNvSpPr/>
-          <p:nvPr/>
-        </p:nvSpPr>
-        <p:spPr>
-          <a:xfrm>
-            <a:off x="1005840" y="2724912"/>
-            <a:ext cx="2926080" cy="182880"/>
-          </a:xfrm>
-          <a:prstGeom prst="rect">
-            <a:avLst/>
-          </a:prstGeom>
-          <a:noFill/>
-          <a:ln/>
-        </p:spPr>
-        <p:txBody>
-          <a:bodyPr wrap="square" lIns="0" tIns="0" rIns="0" bIns="0" rtlCol="0" anchor="ctr">
-            <a:normAutofit/>
-          </a:bodyPr>
-          <a:lstStyle/>
-          <a:p>
-            <a:pPr marL="0" indent="0">
-              <a:buNone/>
-            </a:pPr>
-            <a:r>
-              <a:rPr lang="en-US" sz="1060" b="1" dirty="0">
-                <a:solidFill>
-                  <a:srgbClr val="1E293B"/>
-                </a:solidFill>
-              </a:rPr>
-              <a:t>Shared network latency</a:t>
-            </a:r>
-            <a:endParaRPr lang="en-US" sz="1060" dirty="0"/>
-          </a:p>
-        </p:txBody>
-      </p:sp>
-      <p:sp>
-        <p:nvSpPr>
-          <p:cNvPr id="18" name="Text 16"/>
-          <p:cNvSpPr/>
-          <p:nvPr/>
-        </p:nvSpPr>
-        <p:spPr>
-          <a:xfrm>
-            <a:off x="4343400" y="2724912"/>
-            <a:ext cx="2926080" cy="182880"/>
-          </a:xfrm>
-          <a:prstGeom prst="rect">
-            <a:avLst/>
-          </a:prstGeom>
-          <a:noFill/>
-          <a:ln/>
-        </p:spPr>
-        <p:txBody>
-          <a:bodyPr wrap="square" lIns="0" tIns="0" rIns="0" bIns="0" rtlCol="0" anchor="ctr">
-            <a:normAutofit/>
-          </a:bodyPr>
-          <a:lstStyle/>
-          <a:p>
-            <a:pPr marL="0" indent="0">
-              <a:buNone/>
-            </a:pPr>
-            <a:r>
-              <a:rPr lang="en-US" sz="1060" b="1" dirty="0">
-                <a:solidFill>
-                  <a:srgbClr val="10B981"/>
-                </a:solidFill>
-              </a:rPr>
-              <a:t>422 ms</a:t>
-            </a:r>
-            <a:endParaRPr lang="en-US" sz="1060" dirty="0"/>
-          </a:p>
-        </p:txBody>
-      </p:sp>
-      <p:sp>
-        <p:nvSpPr>
-          <p:cNvPr id="19" name="Text 17"/>
-          <p:cNvSpPr/>
-          <p:nvPr/>
-        </p:nvSpPr>
-        <p:spPr>
-          <a:xfrm>
-            <a:off x="7680960" y="2724912"/>
-            <a:ext cx="2926080" cy="182880"/>
-          </a:xfrm>
-          <a:prstGeom prst="rect">
-            <a:avLst/>
-          </a:prstGeom>
-          <a:noFill/>
-          <a:ln/>
-        </p:spPr>
-        <p:txBody>
-          <a:bodyPr wrap="square" lIns="0" tIns="0" rIns="0" bIns="0" rtlCol="0" anchor="ctr">
-            <a:normAutofit/>
-          </a:bodyPr>
-          <a:lstStyle/>
-          <a:p>
-            <a:pPr marL="0" indent="0">
-              <a:buNone/>
-            </a:pPr>
-            <a:r>
-              <a:rPr lang="en-US" sz="1060" b="1" dirty="0">
-                <a:solidFill>
-                  <a:srgbClr val="F59E0B"/>
-                </a:solidFill>
-              </a:rPr>
-              <a:t>2170 ms</a:t>
-            </a:r>
-            <a:endParaRPr lang="en-US" sz="1060" dirty="0"/>
-          </a:p>
-        </p:txBody>
-      </p:sp>
-      <p:sp>
-        <p:nvSpPr>
-          <p:cNvPr id="20" name="Shape 18"/>
-          <p:cNvSpPr/>
-          <p:nvPr/>
-        </p:nvSpPr>
-        <p:spPr>
-          <a:xfrm>
-            <a:off x="822960" y="3090672"/>
-            <a:ext cx="10515600" cy="530352"/>
-          </a:xfrm>
-          <a:prstGeom prst="rect">
-            <a:avLst/>
-          </a:prstGeom>
-          <a:solidFill>
-            <a:srgbClr val="FFFFFF"/>
-          </a:solidFill>
-          <a:ln w="6350">
-            <a:solidFill>
-              <a:srgbClr val="E2E8F0"/>
-            </a:solidFill>
-            <a:prstDash val="solid"/>
-          </a:ln>
-        </p:spPr>
-        <p:txBody>
-          <a:bodyPr/>
-          <a:lstStyle/>
-          <a:p>
-            <a:endParaRPr lang="en-DE"/>
-          </a:p>
-        </p:txBody>
-      </p:sp>
-      <p:sp>
-        <p:nvSpPr>
-          <p:cNvPr id="21" name="Text 19"/>
-          <p:cNvSpPr/>
-          <p:nvPr/>
-        </p:nvSpPr>
-        <p:spPr>
-          <a:xfrm>
-            <a:off x="1005840" y="3255264"/>
-            <a:ext cx="2926080" cy="182880"/>
-          </a:xfrm>
-          <a:prstGeom prst="rect">
-            <a:avLst/>
-          </a:prstGeom>
-          <a:noFill/>
-          <a:ln/>
-        </p:spPr>
-        <p:txBody>
-          <a:bodyPr wrap="square" lIns="0" tIns="0" rIns="0" bIns="0" rtlCol="0" anchor="ctr">
-            <a:normAutofit/>
-          </a:bodyPr>
-          <a:lstStyle/>
-          <a:p>
-            <a:pPr marL="0" indent="0">
-              <a:buNone/>
-            </a:pPr>
-            <a:r>
-              <a:rPr lang="en-US" sz="1060" b="1" dirty="0">
-                <a:solidFill>
-                  <a:srgbClr val="1E293B"/>
-                </a:solidFill>
-              </a:rPr>
-              <a:t>Network dependency</a:t>
-            </a:r>
-            <a:endParaRPr lang="en-US" sz="1060" dirty="0"/>
-          </a:p>
-        </p:txBody>
-      </p:sp>
-      <p:sp>
-        <p:nvSpPr>
-          <p:cNvPr id="22" name="Text 20"/>
-          <p:cNvSpPr/>
-          <p:nvPr/>
-        </p:nvSpPr>
-        <p:spPr>
-          <a:xfrm>
-            <a:off x="4343400" y="3255264"/>
-            <a:ext cx="2926080" cy="182880"/>
-          </a:xfrm>
-          <a:prstGeom prst="rect">
-            <a:avLst/>
-          </a:prstGeom>
-          <a:noFill/>
-          <a:ln/>
-        </p:spPr>
-        <p:txBody>
-          <a:bodyPr wrap="square" lIns="0" tIns="0" rIns="0" bIns="0" rtlCol="0" anchor="ctr">
-            <a:normAutofit/>
-          </a:bodyPr>
-          <a:lstStyle/>
-          <a:p>
-            <a:pPr marL="0" indent="0">
-              <a:buNone/>
-            </a:pPr>
-            <a:r>
-              <a:rPr lang="en-US" sz="1060" dirty="0">
-                <a:solidFill>
-                  <a:srgbClr val="10B981"/>
-                </a:solidFill>
-              </a:rPr>
-              <a:t>Local network</a:t>
-            </a:r>
-            <a:endParaRPr lang="en-US" sz="1060" dirty="0"/>
-          </a:p>
-        </p:txBody>
-      </p:sp>
-      <p:sp>
-        <p:nvSpPr>
-          <p:cNvPr id="23" name="Text 21"/>
-          <p:cNvSpPr/>
-          <p:nvPr/>
-        </p:nvSpPr>
-        <p:spPr>
-          <a:xfrm>
-            <a:off x="7680960" y="3255264"/>
-            <a:ext cx="2926080" cy="182880"/>
-          </a:xfrm>
-          <a:prstGeom prst="rect">
-            <a:avLst/>
-          </a:prstGeom>
-          <a:noFill/>
-          <a:ln/>
-        </p:spPr>
-        <p:txBody>
-          <a:bodyPr wrap="square" lIns="0" tIns="0" rIns="0" bIns="0" rtlCol="0" anchor="ctr">
-            <a:normAutofit/>
-          </a:bodyPr>
-          <a:lstStyle/>
-          <a:p>
-            <a:pPr marL="0" indent="0">
-              <a:buNone/>
-            </a:pPr>
-            <a:r>
-              <a:rPr lang="en-US" sz="1060" dirty="0">
-                <a:solidFill>
-                  <a:srgbClr val="1E293B"/>
-                </a:solidFill>
-              </a:rPr>
-              <a:t>Internet route</a:t>
-            </a:r>
-            <a:endParaRPr lang="en-US" sz="1060" dirty="0"/>
-          </a:p>
-        </p:txBody>
-      </p:sp>
-      <p:sp>
-        <p:nvSpPr>
-          <p:cNvPr id="24" name="Shape 22"/>
-          <p:cNvSpPr/>
-          <p:nvPr/>
-        </p:nvSpPr>
-        <p:spPr>
-          <a:xfrm>
-            <a:off x="822960" y="3621024"/>
-            <a:ext cx="10515600" cy="530352"/>
-          </a:xfrm>
-          <a:prstGeom prst="rect">
-            <a:avLst/>
-          </a:prstGeom>
-          <a:solidFill>
-            <a:srgbClr val="F1F5F9"/>
-          </a:solidFill>
-          <a:ln w="6350">
-            <a:solidFill>
-              <a:srgbClr val="E2E8F0"/>
-            </a:solidFill>
-            <a:prstDash val="solid"/>
-          </a:ln>
-        </p:spPr>
-        <p:txBody>
-          <a:bodyPr/>
-          <a:lstStyle/>
-          <a:p>
-            <a:endParaRPr lang="en-DE"/>
-          </a:p>
-        </p:txBody>
-      </p:sp>
-      <p:sp>
-        <p:nvSpPr>
-          <p:cNvPr id="25" name="Text 23"/>
-          <p:cNvSpPr/>
-          <p:nvPr/>
-        </p:nvSpPr>
-        <p:spPr>
-          <a:xfrm>
-            <a:off x="1005840" y="3785616"/>
-            <a:ext cx="2926080" cy="182880"/>
-          </a:xfrm>
-          <a:prstGeom prst="rect">
-            <a:avLst/>
-          </a:prstGeom>
-          <a:noFill/>
-          <a:ln/>
-        </p:spPr>
-        <p:txBody>
-          <a:bodyPr wrap="square" lIns="0" tIns="0" rIns="0" bIns="0" rtlCol="0" anchor="ctr">
-            <a:normAutofit/>
-          </a:bodyPr>
-          <a:lstStyle/>
-          <a:p>
-            <a:pPr marL="0" indent="0">
-              <a:buNone/>
-            </a:pPr>
-            <a:r>
-              <a:rPr lang="en-US" sz="1060" b="1" dirty="0">
-                <a:solidFill>
-                  <a:srgbClr val="1E293B"/>
-                </a:solidFill>
-              </a:rPr>
-              <a:t>Offline operation</a:t>
-            </a:r>
-            <a:endParaRPr lang="en-US" sz="1060" dirty="0"/>
-          </a:p>
-        </p:txBody>
-      </p:sp>
-      <p:sp>
-        <p:nvSpPr>
-          <p:cNvPr id="26" name="Text 24"/>
-          <p:cNvSpPr/>
-          <p:nvPr/>
-        </p:nvSpPr>
-        <p:spPr>
-          <a:xfrm>
-            <a:off x="4343400" y="3785616"/>
-            <a:ext cx="2926080" cy="182880"/>
-          </a:xfrm>
-          <a:prstGeom prst="rect">
-            <a:avLst/>
-          </a:prstGeom>
-          <a:noFill/>
-          <a:ln/>
-        </p:spPr>
-        <p:txBody>
-          <a:bodyPr wrap="square" lIns="0" tIns="0" rIns="0" bIns="0" rtlCol="0" anchor="ctr">
-            <a:normAutofit/>
-          </a:bodyPr>
-          <a:lstStyle/>
-          <a:p>
-            <a:pPr marL="0" indent="0">
-              <a:buNone/>
-            </a:pPr>
-            <a:r>
-              <a:rPr lang="en-US" sz="1060" dirty="0">
-                <a:solidFill>
-                  <a:srgbClr val="10B981"/>
-                </a:solidFill>
-              </a:rPr>
-              <a:t>Possible</a:t>
-            </a:r>
-            <a:endParaRPr lang="en-US" sz="1060" dirty="0"/>
-          </a:p>
-        </p:txBody>
-      </p:sp>
-      <p:sp>
-        <p:nvSpPr>
-          <p:cNvPr id="27" name="Text 25"/>
-          <p:cNvSpPr/>
-          <p:nvPr/>
-        </p:nvSpPr>
-        <p:spPr>
-          <a:xfrm>
-            <a:off x="7680960" y="3785616"/>
-            <a:ext cx="2926080" cy="182880"/>
-          </a:xfrm>
-          <a:prstGeom prst="rect">
-            <a:avLst/>
-          </a:prstGeom>
-          <a:noFill/>
-          <a:ln/>
-        </p:spPr>
-        <p:txBody>
-          <a:bodyPr wrap="square" lIns="0" tIns="0" rIns="0" bIns="0" rtlCol="0" anchor="ctr">
-            <a:normAutofit/>
-          </a:bodyPr>
-          <a:lstStyle/>
-          <a:p>
-            <a:pPr marL="0" indent="0">
-              <a:buNone/>
-            </a:pPr>
-            <a:r>
-              <a:rPr lang="en-US" sz="1060" dirty="0">
-                <a:solidFill>
-                  <a:srgbClr val="1E293B"/>
-                </a:solidFill>
-              </a:rPr>
-              <a:t>Not suitable alone</a:t>
-            </a:r>
-            <a:endParaRPr lang="en-US" sz="1060" dirty="0"/>
-          </a:p>
-        </p:txBody>
-      </p:sp>
-      <p:sp>
-        <p:nvSpPr>
-          <p:cNvPr id="28" name="Shape 26"/>
-          <p:cNvSpPr/>
-          <p:nvPr/>
-        </p:nvSpPr>
-        <p:spPr>
-          <a:xfrm>
-            <a:off x="822960" y="4151376"/>
-            <a:ext cx="10515600" cy="530352"/>
-          </a:xfrm>
-          <a:prstGeom prst="rect">
-            <a:avLst/>
-          </a:prstGeom>
-          <a:solidFill>
-            <a:srgbClr val="FFFFFF"/>
-          </a:solidFill>
-          <a:ln w="6350">
-            <a:solidFill>
-              <a:srgbClr val="E2E8F0"/>
-            </a:solidFill>
-            <a:prstDash val="solid"/>
-          </a:ln>
-        </p:spPr>
-        <p:txBody>
-          <a:bodyPr/>
-          <a:lstStyle/>
-          <a:p>
-            <a:endParaRPr lang="en-DE"/>
-          </a:p>
-        </p:txBody>
-      </p:sp>
-      <p:sp>
-        <p:nvSpPr>
-          <p:cNvPr id="29" name="Text 27"/>
-          <p:cNvSpPr/>
-          <p:nvPr/>
-        </p:nvSpPr>
-        <p:spPr>
-          <a:xfrm>
-            <a:off x="1005840" y="4315968"/>
-            <a:ext cx="2926080" cy="182880"/>
-          </a:xfrm>
-          <a:prstGeom prst="rect">
-            <a:avLst/>
-          </a:prstGeom>
-          <a:noFill/>
-          <a:ln/>
-        </p:spPr>
-        <p:txBody>
-          <a:bodyPr wrap="square" lIns="0" tIns="0" rIns="0" bIns="0" rtlCol="0" anchor="ctr">
-            <a:normAutofit/>
-          </a:bodyPr>
-          <a:lstStyle/>
-          <a:p>
-            <a:pPr marL="0" indent="0">
-              <a:buNone/>
-            </a:pPr>
-            <a:r>
-              <a:rPr lang="en-US" sz="1060" b="1" dirty="0">
-                <a:solidFill>
-                  <a:srgbClr val="1E293B"/>
-                </a:solidFill>
-              </a:rPr>
-              <a:t>Real-time suitability</a:t>
-            </a:r>
-            <a:endParaRPr lang="en-US" sz="1060" dirty="0"/>
-          </a:p>
-        </p:txBody>
-      </p:sp>
-      <p:sp>
-        <p:nvSpPr>
-          <p:cNvPr id="30" name="Text 28"/>
-          <p:cNvSpPr/>
-          <p:nvPr/>
-        </p:nvSpPr>
-        <p:spPr>
-          <a:xfrm>
-            <a:off x="4343400" y="4315968"/>
-            <a:ext cx="2926080" cy="182880"/>
-          </a:xfrm>
-          <a:prstGeom prst="rect">
-            <a:avLst/>
-          </a:prstGeom>
-          <a:noFill/>
-          <a:ln/>
-        </p:spPr>
-        <p:txBody>
-          <a:bodyPr wrap="square" lIns="0" tIns="0" rIns="0" bIns="0" rtlCol="0" anchor="ctr">
-            <a:normAutofit/>
-          </a:bodyPr>
-          <a:lstStyle/>
-          <a:p>
-            <a:pPr marL="0" indent="0">
-              <a:buNone/>
-            </a:pPr>
-            <a:r>
-              <a:rPr lang="en-US" sz="1060" dirty="0">
-                <a:solidFill>
-                  <a:srgbClr val="10B981"/>
-                </a:solidFill>
-              </a:rPr>
-              <a:t>High</a:t>
-            </a:r>
-            <a:endParaRPr lang="en-US" sz="1060" dirty="0"/>
-          </a:p>
-        </p:txBody>
-      </p:sp>
-      <p:sp>
-        <p:nvSpPr>
-          <p:cNvPr id="31" name="Text 29"/>
-          <p:cNvSpPr/>
-          <p:nvPr/>
-        </p:nvSpPr>
-        <p:spPr>
-          <a:xfrm>
-            <a:off x="7680960" y="4315968"/>
-            <a:ext cx="2926080" cy="182880"/>
-          </a:xfrm>
-          <a:prstGeom prst="rect">
-            <a:avLst/>
-          </a:prstGeom>
-          <a:noFill/>
-          <a:ln/>
-        </p:spPr>
-        <p:txBody>
-          <a:bodyPr wrap="square" lIns="0" tIns="0" rIns="0" bIns="0" rtlCol="0" anchor="ctr">
-            <a:normAutofit/>
-          </a:bodyPr>
-          <a:lstStyle/>
-          <a:p>
-            <a:pPr marL="0" indent="0">
-              <a:buNone/>
-            </a:pPr>
-            <a:r>
-              <a:rPr lang="en-US" sz="1060" dirty="0">
-                <a:solidFill>
-                  <a:srgbClr val="1E293B"/>
-                </a:solidFill>
-              </a:rPr>
-              <a:t>Limited</a:t>
-            </a:r>
-            <a:endParaRPr lang="en-US" sz="1060" dirty="0"/>
-          </a:p>
-        </p:txBody>
-      </p:sp>
-      <p:sp>
-        <p:nvSpPr>
-          <p:cNvPr id="32" name="Shape 30"/>
-          <p:cNvSpPr/>
-          <p:nvPr/>
-        </p:nvSpPr>
-        <p:spPr>
-          <a:xfrm>
-            <a:off x="822960" y="4681728"/>
-            <a:ext cx="10515600" cy="530352"/>
-          </a:xfrm>
-          <a:prstGeom prst="rect">
-            <a:avLst/>
-          </a:prstGeom>
-          <a:solidFill>
-            <a:srgbClr val="F1F5F9"/>
-          </a:solidFill>
-          <a:ln w="6350">
-            <a:solidFill>
-              <a:srgbClr val="E2E8F0"/>
-            </a:solidFill>
-            <a:prstDash val="solid"/>
-          </a:ln>
-        </p:spPr>
-        <p:txBody>
-          <a:bodyPr/>
-          <a:lstStyle/>
-          <a:p>
-            <a:endParaRPr lang="en-DE"/>
-          </a:p>
-        </p:txBody>
-      </p:sp>
-      <p:sp>
-        <p:nvSpPr>
-          <p:cNvPr id="33" name="Text 31"/>
-          <p:cNvSpPr/>
-          <p:nvPr/>
-        </p:nvSpPr>
-        <p:spPr>
-          <a:xfrm>
-            <a:off x="1005840" y="4846320"/>
-            <a:ext cx="2926080" cy="182880"/>
-          </a:xfrm>
-          <a:prstGeom prst="rect">
-            <a:avLst/>
-          </a:prstGeom>
-          <a:noFill/>
-          <a:ln/>
-        </p:spPr>
-        <p:txBody>
-          <a:bodyPr wrap="square" lIns="0" tIns="0" rIns="0" bIns="0" rtlCol="0" anchor="ctr">
-            <a:normAutofit/>
-          </a:bodyPr>
-          <a:lstStyle/>
-          <a:p>
-            <a:pPr marL="0" indent="0">
-              <a:buNone/>
-            </a:pPr>
-            <a:r>
-              <a:rPr lang="en-US" sz="1060" b="1" dirty="0">
-                <a:solidFill>
-                  <a:srgbClr val="1E293B"/>
-                </a:solidFill>
-              </a:rPr>
-              <a:t>Storage &amp; analysis scale</a:t>
-            </a:r>
-            <a:endParaRPr lang="en-US" sz="1060" dirty="0"/>
-          </a:p>
-        </p:txBody>
-      </p:sp>
-      <p:sp>
-        <p:nvSpPr>
-          <p:cNvPr id="34" name="Text 32"/>
-          <p:cNvSpPr/>
-          <p:nvPr/>
-        </p:nvSpPr>
-        <p:spPr>
-          <a:xfrm>
-            <a:off x="4343400" y="4846320"/>
-            <a:ext cx="2926080" cy="182880"/>
-          </a:xfrm>
-          <a:prstGeom prst="rect">
-            <a:avLst/>
-          </a:prstGeom>
-          <a:noFill/>
-          <a:ln/>
-        </p:spPr>
-        <p:txBody>
-          <a:bodyPr wrap="square" lIns="0" tIns="0" rIns="0" bIns="0" rtlCol="0" anchor="ctr">
-            <a:normAutofit/>
-          </a:bodyPr>
-          <a:lstStyle/>
-          <a:p>
-            <a:pPr marL="0" indent="0">
-              <a:buNone/>
-            </a:pPr>
-            <a:r>
-              <a:rPr lang="en-US" sz="1060" dirty="0">
-                <a:solidFill>
-                  <a:srgbClr val="10B981"/>
-                </a:solidFill>
-              </a:rPr>
-              <a:t>Limited</a:t>
-            </a:r>
-            <a:endParaRPr lang="en-US" sz="1060" dirty="0"/>
-          </a:p>
-        </p:txBody>
-      </p:sp>
-      <p:sp>
-        <p:nvSpPr>
-          <p:cNvPr id="35" name="Text 33"/>
-          <p:cNvSpPr/>
-          <p:nvPr/>
-        </p:nvSpPr>
-        <p:spPr>
-          <a:xfrm>
-            <a:off x="7680960" y="4846320"/>
-            <a:ext cx="2926080" cy="182880"/>
-          </a:xfrm>
-          <a:prstGeom prst="rect">
-            <a:avLst/>
-          </a:prstGeom>
-          <a:noFill/>
-          <a:ln/>
-        </p:spPr>
-        <p:txBody>
-          <a:bodyPr wrap="square" lIns="0" tIns="0" rIns="0" bIns="0" rtlCol="0" anchor="ctr">
-            <a:normAutofit/>
-          </a:bodyPr>
-          <a:lstStyle/>
-          <a:p>
-            <a:pPr marL="0" indent="0">
-              <a:buNone/>
-            </a:pPr>
-            <a:r>
-              <a:rPr lang="en-US" sz="1060" dirty="0">
-                <a:solidFill>
-                  <a:srgbClr val="1E293B"/>
-                </a:solidFill>
-              </a:rPr>
-              <a:t>High</a:t>
-            </a:r>
-            <a:endParaRPr lang="en-US" sz="1060" dirty="0"/>
-          </a:p>
-        </p:txBody>
-      </p:sp>
-      <p:sp>
-        <p:nvSpPr>
-          <p:cNvPr id="36" name="Text 34"/>
-          <p:cNvSpPr/>
-          <p:nvPr/>
-        </p:nvSpPr>
-        <p:spPr>
-          <a:xfrm>
-            <a:off x="1051560" y="5806440"/>
-            <a:ext cx="9966960" cy="292608"/>
-          </a:xfrm>
-          <a:prstGeom prst="rect">
-            <a:avLst/>
-          </a:prstGeom>
-          <a:noFill/>
-          <a:ln/>
-        </p:spPr>
-        <p:txBody>
-          <a:bodyPr wrap="square" lIns="0" tIns="0" rIns="0" bIns="0" rtlCol="0" anchor="ctr">
-            <a:normAutofit/>
-          </a:bodyPr>
-          <a:lstStyle/>
-          <a:p>
-            <a:pPr marL="0" indent="0" algn="ctr">
-              <a:buNone/>
-            </a:pPr>
-            <a:r>
-              <a:rPr lang="en-US" sz="1500" b="1" dirty="0">
-                <a:solidFill>
-                  <a:srgbClr val="0B172A"/>
-                </a:solidFill>
-              </a:rPr>
-              <a:t>Edge is best for fast local actions. Cloud is best for heavy storage, training, reporting, and long-term analytics.</a:t>
-            </a:r>
-            <a:endParaRPr lang="en-US" sz="1500" dirty="0"/>
           </a:p>
         </p:txBody>
       </p:sp>
@@ -3946,882 +2271,6 @@
 </file>
 
 <file path=ppt/slides/slide2.xml><?xml version="1.0" encoding="utf-8"?>
-<p:sld xmlns:a="http://schemas.openxmlformats.org/drawingml/2006/main" xmlns:r="http://schemas.openxmlformats.org/officeDocument/2006/relationships" xmlns:p="http://schemas.openxmlformats.org/presentationml/2006/main">
-  <p:cSld>
-    <p:spTree>
-      <p:nvGrpSpPr>
-        <p:cNvPr id="1" name=""/>
-        <p:cNvGrpSpPr/>
-        <p:nvPr/>
-      </p:nvGrpSpPr>
-      <p:grpSpPr>
-        <a:xfrm>
-          <a:off x="0" y="0"/>
-          <a:ext cx="0" cy="0"/>
-          <a:chOff x="0" y="0"/>
-          <a:chExt cx="0" cy="0"/>
-        </a:xfrm>
-      </p:grpSpPr>
-      <p:sp>
-        <p:nvSpPr>
-          <p:cNvPr id="2" name="Shape 0"/>
-          <p:cNvSpPr/>
-          <p:nvPr/>
-        </p:nvSpPr>
-        <p:spPr>
-          <a:xfrm>
-            <a:off x="0" y="0"/>
-            <a:ext cx="12192000" cy="1280160"/>
-          </a:xfrm>
-          <a:prstGeom prst="rect">
-            <a:avLst/>
-          </a:prstGeom>
-          <a:solidFill>
-            <a:srgbClr val="0F1C2E"/>
-          </a:solidFill>
-          <a:ln w="12700">
-            <a:solidFill>
-              <a:srgbClr val="0F1C2E"/>
-            </a:solidFill>
-            <a:prstDash val="solid"/>
-          </a:ln>
-        </p:spPr>
-        <p:txBody>
-          <a:bodyPr/>
-          <a:lstStyle/>
-          <a:p>
-            <a:endParaRPr lang="en-DE" sz="2400"/>
-          </a:p>
-        </p:txBody>
-      </p:sp>
-      <p:sp>
-        <p:nvSpPr>
-          <p:cNvPr id="3" name="Text 1"/>
-          <p:cNvSpPr/>
-          <p:nvPr/>
-        </p:nvSpPr>
-        <p:spPr>
-          <a:xfrm>
-            <a:off x="609600" y="0"/>
-            <a:ext cx="9753600" cy="1280160"/>
-          </a:xfrm>
-          <a:prstGeom prst="rect">
-            <a:avLst/>
-          </a:prstGeom>
-          <a:noFill/>
-          <a:ln/>
-        </p:spPr>
-        <p:txBody>
-          <a:bodyPr wrap="square" lIns="0" tIns="0" rIns="0" bIns="0" rtlCol="0" anchor="ctr"/>
-          <a:lstStyle/>
-          <a:p>
-            <a:r>
-              <a:rPr lang="en-US" sz="3733" b="1" dirty="0">
-                <a:solidFill>
-                  <a:srgbClr val="FFFFFF"/>
-                </a:solidFill>
-                <a:latin typeface="Cambria" pitchFamily="34" charset="0"/>
-                <a:ea typeface="Cambria" pitchFamily="34" charset="-122"/>
-                <a:cs typeface="Cambria" pitchFamily="34" charset="-120"/>
-              </a:rPr>
-              <a:t>Test Procedure</a:t>
-            </a:r>
-            <a:endParaRPr lang="en-US" sz="3733" dirty="0"/>
-          </a:p>
-        </p:txBody>
-      </p:sp>
-      <p:sp>
-        <p:nvSpPr>
-          <p:cNvPr id="4" name="Text 2"/>
-          <p:cNvSpPr/>
-          <p:nvPr/>
-        </p:nvSpPr>
-        <p:spPr>
-          <a:xfrm>
-            <a:off x="9509760" y="0"/>
-            <a:ext cx="2316480" cy="1280160"/>
-          </a:xfrm>
-          <a:prstGeom prst="rect">
-            <a:avLst/>
-          </a:prstGeom>
-          <a:noFill/>
-          <a:ln/>
-        </p:spPr>
-        <p:txBody>
-          <a:bodyPr wrap="square" lIns="0" tIns="0" rIns="0" bIns="0" rtlCol="0" anchor="ctr"/>
-          <a:lstStyle/>
-          <a:p>
-            <a:pPr algn="r"/>
-            <a:r>
-              <a:rPr lang="en-US" sz="1867" b="1" dirty="0">
-                <a:solidFill>
-                  <a:srgbClr val="00B4D8"/>
-                </a:solidFill>
-                <a:latin typeface="Calibri" pitchFamily="34" charset="0"/>
-                <a:ea typeface="Calibri" pitchFamily="34" charset="-122"/>
-                <a:cs typeface="Calibri" pitchFamily="34" charset="-120"/>
-              </a:rPr>
-              <a:t>§ VII B–C</a:t>
-            </a:r>
-            <a:endParaRPr lang="en-US" sz="1867" dirty="0"/>
-          </a:p>
-        </p:txBody>
-      </p:sp>
-      <p:sp>
-        <p:nvSpPr>
-          <p:cNvPr id="5" name="Shape 3"/>
-          <p:cNvSpPr/>
-          <p:nvPr/>
-        </p:nvSpPr>
-        <p:spPr>
-          <a:xfrm>
-            <a:off x="426720" y="1463040"/>
-            <a:ext cx="5425440" cy="5059680"/>
-          </a:xfrm>
-          <a:prstGeom prst="roundRect">
-            <a:avLst>
-              <a:gd name="adj" fmla="val 2410"/>
-            </a:avLst>
-          </a:prstGeom>
-          <a:solidFill>
-            <a:srgbClr val="ECFDF5"/>
-          </a:solidFill>
-          <a:ln/>
-          <a:effectLst>
-            <a:outerShdw blurRad="101600" dist="25400" dir="2700000" algn="bl" rotWithShape="0">
-              <a:srgbClr val="000000">
-                <a:alpha val="12000"/>
-              </a:srgbClr>
-            </a:outerShdw>
-          </a:effectLst>
-        </p:spPr>
-        <p:txBody>
-          <a:bodyPr/>
-          <a:lstStyle/>
-          <a:p>
-            <a:endParaRPr lang="en-DE" sz="2400"/>
-          </a:p>
-        </p:txBody>
-      </p:sp>
-      <p:sp>
-        <p:nvSpPr>
-          <p:cNvPr id="6" name="Text 4"/>
-          <p:cNvSpPr/>
-          <p:nvPr/>
-        </p:nvSpPr>
-        <p:spPr>
-          <a:xfrm>
-            <a:off x="609600" y="1584960"/>
-            <a:ext cx="5059680" cy="341376"/>
-          </a:xfrm>
-          <a:prstGeom prst="rect">
-            <a:avLst/>
-          </a:prstGeom>
-          <a:noFill/>
-          <a:ln/>
-        </p:spPr>
-        <p:txBody>
-          <a:bodyPr wrap="square" lIns="0" tIns="0" rIns="0" bIns="0" rtlCol="0" anchor="ctr"/>
-          <a:lstStyle/>
-          <a:p>
-            <a:pPr algn="ctr"/>
-            <a:r>
-              <a:rPr lang="en-US" sz="1333" b="1" kern="0" spc="267" dirty="0">
-                <a:solidFill>
-                  <a:srgbClr val="047857"/>
-                </a:solidFill>
-                <a:latin typeface="Calibri" pitchFamily="34" charset="0"/>
-                <a:ea typeface="Calibri" pitchFamily="34" charset="-122"/>
-                <a:cs typeface="Calibri" pitchFamily="34" charset="-120"/>
-              </a:rPr>
-              <a:t>EDGE LATENCY TEST</a:t>
-            </a:r>
-            <a:endParaRPr lang="en-US" sz="1333" dirty="0"/>
-          </a:p>
-        </p:txBody>
-      </p:sp>
-      <p:sp>
-        <p:nvSpPr>
-          <p:cNvPr id="7" name="Text 5"/>
-          <p:cNvSpPr/>
-          <p:nvPr/>
-        </p:nvSpPr>
-        <p:spPr>
-          <a:xfrm>
-            <a:off x="633984" y="2048256"/>
-            <a:ext cx="4998720" cy="1341120"/>
-          </a:xfrm>
-          <a:prstGeom prst="rect">
-            <a:avLst/>
-          </a:prstGeom>
-          <a:noFill/>
-          <a:ln/>
-        </p:spPr>
-        <p:txBody>
-          <a:bodyPr wrap="square" rtlCol="0" anchor="t"/>
-          <a:lstStyle/>
-          <a:p>
-            <a:r>
-              <a:rPr lang="en-US" sz="1600" b="1" dirty="0">
-                <a:solidFill>
-                  <a:srgbClr val="1E293B"/>
-                </a:solidFill>
-                <a:latin typeface="Calibri" pitchFamily="34" charset="0"/>
-                <a:ea typeface="Calibri" pitchFamily="34" charset="-122"/>
-                <a:cs typeface="Calibri" pitchFamily="34" charset="-120"/>
-              </a:rPr>
-              <a:t>Server: </a:t>
-            </a:r>
-            <a:r>
-              <a:rPr lang="en-US" sz="1600" dirty="0">
-                <a:solidFill>
-                  <a:srgbClr val="334155"/>
-                </a:solidFill>
-                <a:latin typeface="Calibri" pitchFamily="34" charset="0"/>
-                <a:ea typeface="Calibri" pitchFamily="34" charset="-122"/>
-                <a:cs typeface="Calibri" pitchFamily="34" charset="-120"/>
-              </a:rPr>
-              <a:t>Ubuntu 22.04 running Python Flask</a:t>
-            </a:r>
-            <a:endParaRPr lang="en-US" sz="1600" dirty="0"/>
-          </a:p>
-          <a:p>
-            <a:r>
-              <a:rPr lang="en-US" sz="1600" b="1" dirty="0">
-                <a:solidFill>
-                  <a:srgbClr val="1E293B"/>
-                </a:solidFill>
-                <a:latin typeface="Calibri" pitchFamily="34" charset="0"/>
-                <a:ea typeface="Calibri" pitchFamily="34" charset="-122"/>
-                <a:cs typeface="Calibri" pitchFamily="34" charset="-120"/>
-              </a:rPr>
-              <a:t>Client: </a:t>
-            </a:r>
-            <a:endParaRPr lang="en-US" sz="1600" dirty="0"/>
-          </a:p>
-          <a:p>
-            <a:r>
-              <a:rPr lang="en-US" sz="1600" dirty="0">
-                <a:solidFill>
-                  <a:srgbClr val="334155"/>
-                </a:solidFill>
-                <a:latin typeface="Calibri" pitchFamily="34" charset="0"/>
-                <a:ea typeface="Calibri" pitchFamily="34" charset="-122"/>
-                <a:cs typeface="Calibri" pitchFamily="34" charset="-120"/>
-              </a:rPr>
-              <a:t>Mobile phone → http://192.168.178.78:5000</a:t>
-            </a:r>
-            <a:endParaRPr lang="en-US" sz="1600" dirty="0"/>
-          </a:p>
-          <a:p>
-            <a:r>
-              <a:rPr lang="en-US" sz="1600" b="1" dirty="0">
-                <a:solidFill>
-                  <a:srgbClr val="1E293B"/>
-                </a:solidFill>
-                <a:latin typeface="Calibri" pitchFamily="34" charset="0"/>
-                <a:ea typeface="Calibri" pitchFamily="34" charset="-122"/>
-                <a:cs typeface="Calibri" pitchFamily="34" charset="-120"/>
-              </a:rPr>
-              <a:t>Terminal log:</a:t>
-            </a:r>
-            <a:endParaRPr lang="en-US" sz="1600" dirty="0"/>
-          </a:p>
-        </p:txBody>
-      </p:sp>
-      <p:sp>
-        <p:nvSpPr>
-          <p:cNvPr id="8" name="Shape 6"/>
-          <p:cNvSpPr/>
-          <p:nvPr/>
-        </p:nvSpPr>
-        <p:spPr>
-          <a:xfrm>
-            <a:off x="633984" y="3438144"/>
-            <a:ext cx="4974336" cy="877824"/>
-          </a:xfrm>
-          <a:prstGeom prst="roundRect">
-            <a:avLst>
-              <a:gd name="adj" fmla="val 8333"/>
-            </a:avLst>
-          </a:prstGeom>
-          <a:solidFill>
-            <a:srgbClr val="162440"/>
-          </a:solidFill>
-          <a:ln/>
-        </p:spPr>
-        <p:txBody>
-          <a:bodyPr/>
-          <a:lstStyle/>
-          <a:p>
-            <a:endParaRPr lang="en-DE" sz="2400"/>
-          </a:p>
-        </p:txBody>
-      </p:sp>
-      <p:sp>
-        <p:nvSpPr>
-          <p:cNvPr id="9" name="Text 7"/>
-          <p:cNvSpPr/>
-          <p:nvPr/>
-        </p:nvSpPr>
-        <p:spPr>
-          <a:xfrm>
-            <a:off x="792480" y="3486912"/>
-            <a:ext cx="4657344" cy="731520"/>
-          </a:xfrm>
-          <a:prstGeom prst="rect">
-            <a:avLst/>
-          </a:prstGeom>
-          <a:noFill/>
-          <a:ln/>
-        </p:spPr>
-        <p:txBody>
-          <a:bodyPr wrap="square" rtlCol="0" anchor="ctr"/>
-          <a:lstStyle/>
-          <a:p>
-            <a:r>
-              <a:rPr lang="en-US" sz="1333" dirty="0">
-                <a:solidFill>
-                  <a:srgbClr val="7DD8EC"/>
-                </a:solidFill>
-                <a:latin typeface="Courier New" pitchFamily="34" charset="0"/>
-                <a:ea typeface="Courier New" pitchFamily="34" charset="-122"/>
-                <a:cs typeface="Courier New" pitchFamily="34" charset="-120"/>
-              </a:rPr>
-              <a:t>POST /process HTTP/1.1" 200</a:t>
-            </a:r>
-            <a:endParaRPr lang="en-US" sz="1333" dirty="0"/>
-          </a:p>
-          <a:p>
-            <a:r>
-              <a:rPr lang="en-US" sz="1333" dirty="0">
-                <a:solidFill>
-                  <a:srgbClr val="7DD8EC"/>
-                </a:solidFill>
-                <a:latin typeface="Courier New" pitchFamily="34" charset="0"/>
-                <a:ea typeface="Courier New" pitchFamily="34" charset="-122"/>
-                <a:cs typeface="Courier New" pitchFamily="34" charset="-120"/>
-              </a:rPr>
-              <a:t>192.168.178.117 → .78:5000</a:t>
-            </a:r>
-            <a:endParaRPr lang="en-US" sz="1333" dirty="0"/>
-          </a:p>
-        </p:txBody>
-      </p:sp>
-      <p:sp>
-        <p:nvSpPr>
-          <p:cNvPr id="10" name="Text 8"/>
-          <p:cNvSpPr/>
-          <p:nvPr/>
-        </p:nvSpPr>
-        <p:spPr>
-          <a:xfrm>
-            <a:off x="633984" y="4425696"/>
-            <a:ext cx="4998720" cy="548640"/>
-          </a:xfrm>
-          <a:prstGeom prst="rect">
-            <a:avLst/>
-          </a:prstGeom>
-          <a:noFill/>
-          <a:ln/>
-        </p:spPr>
-        <p:txBody>
-          <a:bodyPr wrap="square" rtlCol="0" anchor="ctr"/>
-          <a:lstStyle/>
-          <a:p>
-            <a:r>
-              <a:rPr lang="en-US" sz="1467" b="1" dirty="0">
-                <a:solidFill>
-                  <a:srgbClr val="047857"/>
-                </a:solidFill>
-                <a:latin typeface="Calibri" pitchFamily="34" charset="0"/>
-                <a:ea typeface="Calibri" pitchFamily="34" charset="-122"/>
-                <a:cs typeface="Calibri" pitchFamily="34" charset="-120"/>
-              </a:rPr>
-              <a:t>Status 200 OK </a:t>
-            </a:r>
-            <a:r>
-              <a:rPr lang="en-US" sz="1467" dirty="0">
-                <a:solidFill>
-                  <a:srgbClr val="334155"/>
-                </a:solidFill>
-                <a:latin typeface="Calibri" pitchFamily="34" charset="0"/>
-                <a:ea typeface="Calibri" pitchFamily="34" charset="-122"/>
-                <a:cs typeface="Calibri" pitchFamily="34" charset="-120"/>
-              </a:rPr>
-              <a:t>confirms successful edge communication.</a:t>
-            </a:r>
-            <a:endParaRPr lang="en-US" sz="1467" dirty="0"/>
-          </a:p>
-        </p:txBody>
-      </p:sp>
-      <p:sp>
-        <p:nvSpPr>
-          <p:cNvPr id="11" name="Text 9"/>
-          <p:cNvSpPr/>
-          <p:nvPr/>
-        </p:nvSpPr>
-        <p:spPr>
-          <a:xfrm>
-            <a:off x="633984" y="4998720"/>
-            <a:ext cx="4998720" cy="999744"/>
-          </a:xfrm>
-          <a:prstGeom prst="rect">
-            <a:avLst/>
-          </a:prstGeom>
-          <a:noFill/>
-          <a:ln/>
-        </p:spPr>
-        <p:txBody>
-          <a:bodyPr wrap="square" lIns="0" tIns="0" rIns="0" bIns="0" rtlCol="0" anchor="ctr"/>
-          <a:lstStyle/>
-          <a:p>
-            <a:pPr algn="ctr"/>
-            <a:r>
-              <a:rPr lang="en-US" sz="7466" b="1" dirty="0">
-                <a:solidFill>
-                  <a:srgbClr val="10B981"/>
-                </a:solidFill>
-                <a:latin typeface="Cambria" pitchFamily="34" charset="0"/>
-                <a:ea typeface="Cambria" pitchFamily="34" charset="-122"/>
-                <a:cs typeface="Cambria" pitchFamily="34" charset="-120"/>
-              </a:rPr>
-              <a:t>95 ms</a:t>
-            </a:r>
-            <a:endParaRPr lang="en-US" sz="7466" dirty="0"/>
-          </a:p>
-        </p:txBody>
-      </p:sp>
-      <p:sp>
-        <p:nvSpPr>
-          <p:cNvPr id="12" name="Text 10"/>
-          <p:cNvSpPr/>
-          <p:nvPr/>
-        </p:nvSpPr>
-        <p:spPr>
-          <a:xfrm>
-            <a:off x="633984" y="5974080"/>
-            <a:ext cx="4998720" cy="390144"/>
-          </a:xfrm>
-          <a:prstGeom prst="rect">
-            <a:avLst/>
-          </a:prstGeom>
-          <a:noFill/>
-          <a:ln/>
-        </p:spPr>
-        <p:txBody>
-          <a:bodyPr wrap="square" lIns="0" tIns="0" rIns="0" bIns="0" rtlCol="0" anchor="ctr"/>
-          <a:lstStyle/>
-          <a:p>
-            <a:pPr algn="ctr"/>
-            <a:r>
-              <a:rPr lang="en-US" sz="1467" dirty="0">
-                <a:solidFill>
-                  <a:srgbClr val="64748B"/>
-                </a:solidFill>
-                <a:latin typeface="Calibri" pitchFamily="34" charset="0"/>
-                <a:ea typeface="Calibri" pitchFamily="34" charset="-122"/>
-                <a:cs typeface="Calibri" pitchFamily="34" charset="-120"/>
-              </a:rPr>
-              <a:t>Paderborn Home Wi-Fi</a:t>
-            </a:r>
-            <a:endParaRPr lang="en-US" sz="1467" dirty="0"/>
-          </a:p>
-        </p:txBody>
-      </p:sp>
-      <p:sp>
-        <p:nvSpPr>
-          <p:cNvPr id="13" name="Shape 11"/>
-          <p:cNvSpPr/>
-          <p:nvPr/>
-        </p:nvSpPr>
-        <p:spPr>
-          <a:xfrm>
-            <a:off x="6339840" y="1463040"/>
-            <a:ext cx="5425440" cy="5059680"/>
-          </a:xfrm>
-          <a:prstGeom prst="roundRect">
-            <a:avLst>
-              <a:gd name="adj" fmla="val 2410"/>
-            </a:avLst>
-          </a:prstGeom>
-          <a:solidFill>
-            <a:srgbClr val="FFF7ED"/>
-          </a:solidFill>
-          <a:ln/>
-          <a:effectLst>
-            <a:outerShdw blurRad="101600" dist="25400" dir="2700000" algn="bl" rotWithShape="0">
-              <a:srgbClr val="000000">
-                <a:alpha val="12000"/>
-              </a:srgbClr>
-            </a:outerShdw>
-          </a:effectLst>
-        </p:spPr>
-        <p:txBody>
-          <a:bodyPr/>
-          <a:lstStyle/>
-          <a:p>
-            <a:endParaRPr lang="en-DE" sz="2400"/>
-          </a:p>
-        </p:txBody>
-      </p:sp>
-      <p:sp>
-        <p:nvSpPr>
-          <p:cNvPr id="14" name="Text 12"/>
-          <p:cNvSpPr/>
-          <p:nvPr/>
-        </p:nvSpPr>
-        <p:spPr>
-          <a:xfrm>
-            <a:off x="6522720" y="1584960"/>
-            <a:ext cx="5059680" cy="341376"/>
-          </a:xfrm>
-          <a:prstGeom prst="rect">
-            <a:avLst/>
-          </a:prstGeom>
-          <a:noFill/>
-          <a:ln/>
-        </p:spPr>
-        <p:txBody>
-          <a:bodyPr wrap="square" lIns="0" tIns="0" rIns="0" bIns="0" rtlCol="0" anchor="ctr"/>
-          <a:lstStyle/>
-          <a:p>
-            <a:pPr algn="ctr"/>
-            <a:r>
-              <a:rPr lang="en-US" sz="1333" b="1" kern="0" spc="267" dirty="0">
-                <a:solidFill>
-                  <a:srgbClr val="92400E"/>
-                </a:solidFill>
-                <a:latin typeface="Calibri" pitchFamily="34" charset="0"/>
-                <a:ea typeface="Calibri" pitchFamily="34" charset="-122"/>
-                <a:cs typeface="Calibri" pitchFamily="34" charset="-120"/>
-              </a:rPr>
-              <a:t>CLOUD LATENCY TEST</a:t>
-            </a:r>
-            <a:endParaRPr lang="en-US" sz="1333" dirty="0"/>
-          </a:p>
-        </p:txBody>
-      </p:sp>
-      <p:sp>
-        <p:nvSpPr>
-          <p:cNvPr id="15" name="Text 13"/>
-          <p:cNvSpPr/>
-          <p:nvPr/>
-        </p:nvSpPr>
-        <p:spPr>
-          <a:xfrm>
-            <a:off x="6559296" y="2048256"/>
-            <a:ext cx="4998720" cy="1341120"/>
-          </a:xfrm>
-          <a:prstGeom prst="rect">
-            <a:avLst/>
-          </a:prstGeom>
-          <a:noFill/>
-          <a:ln/>
-        </p:spPr>
-        <p:txBody>
-          <a:bodyPr wrap="square" rtlCol="0" anchor="t"/>
-          <a:lstStyle/>
-          <a:p>
-            <a:r>
-              <a:rPr lang="en-US" sz="1600" b="1" dirty="0">
-                <a:solidFill>
-                  <a:srgbClr val="1E293B"/>
-                </a:solidFill>
-                <a:latin typeface="Calibri" pitchFamily="34" charset="0"/>
-                <a:ea typeface="Calibri" pitchFamily="34" charset="-122"/>
-                <a:cs typeface="Calibri" pitchFamily="34" charset="-120"/>
-              </a:rPr>
-              <a:t>Method: </a:t>
-            </a:r>
-            <a:r>
-              <a:rPr lang="en-US" sz="1600" dirty="0">
-                <a:solidFill>
-                  <a:srgbClr val="334155"/>
-                </a:solidFill>
-                <a:latin typeface="Calibri" pitchFamily="34" charset="0"/>
-                <a:ea typeface="Calibri" pitchFamily="34" charset="-122"/>
-                <a:cs typeface="Calibri" pitchFamily="34" charset="-120"/>
-              </a:rPr>
-              <a:t>HTTP request via public internet</a:t>
-            </a:r>
-            <a:endParaRPr lang="en-US" sz="1600" dirty="0"/>
-          </a:p>
-          <a:p>
-            <a:r>
-              <a:rPr lang="en-US" sz="1600" b="1" dirty="0">
-                <a:solidFill>
-                  <a:srgbClr val="1E293B"/>
-                </a:solidFill>
-                <a:latin typeface="Calibri" pitchFamily="34" charset="0"/>
-                <a:ea typeface="Calibri" pitchFamily="34" charset="-122"/>
-                <a:cs typeface="Calibri" pitchFamily="34" charset="-120"/>
-              </a:rPr>
-              <a:t>Target: </a:t>
-            </a:r>
-            <a:endParaRPr lang="en-US" sz="1600" dirty="0"/>
-          </a:p>
-          <a:p>
-            <a:r>
-              <a:rPr lang="en-US" sz="1600" dirty="0">
-                <a:solidFill>
-                  <a:srgbClr val="334155"/>
-                </a:solidFill>
-                <a:latin typeface="Calibri" pitchFamily="34" charset="0"/>
-                <a:ea typeface="Calibri" pitchFamily="34" charset="-122"/>
-                <a:cs typeface="Calibri" pitchFamily="34" charset="-120"/>
-              </a:rPr>
-              <a:t>https://httpbin.org/get</a:t>
-            </a:r>
-            <a:endParaRPr lang="en-US" sz="1600" dirty="0"/>
-          </a:p>
-          <a:p>
-            <a:r>
-              <a:rPr lang="en-US" sz="1600" b="1" dirty="0">
-                <a:solidFill>
-                  <a:srgbClr val="1E293B"/>
-                </a:solidFill>
-                <a:latin typeface="Calibri" pitchFamily="34" charset="0"/>
-                <a:ea typeface="Calibri" pitchFamily="34" charset="-122"/>
-                <a:cs typeface="Calibri" pitchFamily="34" charset="-120"/>
-              </a:rPr>
-              <a:t>Command:</a:t>
-            </a:r>
-            <a:endParaRPr lang="en-US" sz="1600" dirty="0"/>
-          </a:p>
-        </p:txBody>
-      </p:sp>
-      <p:sp>
-        <p:nvSpPr>
-          <p:cNvPr id="16" name="Shape 14"/>
-          <p:cNvSpPr/>
-          <p:nvPr/>
-        </p:nvSpPr>
-        <p:spPr>
-          <a:xfrm>
-            <a:off x="6559296" y="3438144"/>
-            <a:ext cx="4974336" cy="877824"/>
-          </a:xfrm>
-          <a:prstGeom prst="roundRect">
-            <a:avLst>
-              <a:gd name="adj" fmla="val 8333"/>
-            </a:avLst>
-          </a:prstGeom>
-          <a:solidFill>
-            <a:srgbClr val="162440"/>
-          </a:solidFill>
-          <a:ln/>
-        </p:spPr>
-        <p:txBody>
-          <a:bodyPr/>
-          <a:lstStyle/>
-          <a:p>
-            <a:endParaRPr lang="en-DE" sz="2400"/>
-          </a:p>
-        </p:txBody>
-      </p:sp>
-      <p:sp>
-        <p:nvSpPr>
-          <p:cNvPr id="17" name="Text 15"/>
-          <p:cNvSpPr/>
-          <p:nvPr/>
-        </p:nvSpPr>
-        <p:spPr>
-          <a:xfrm>
-            <a:off x="6705600" y="3486912"/>
-            <a:ext cx="4657344" cy="731520"/>
-          </a:xfrm>
-          <a:prstGeom prst="rect">
-            <a:avLst/>
-          </a:prstGeom>
-          <a:noFill/>
-          <a:ln/>
-        </p:spPr>
-        <p:txBody>
-          <a:bodyPr wrap="square" rtlCol="0" anchor="ctr"/>
-          <a:lstStyle/>
-          <a:p>
-            <a:r>
-              <a:rPr lang="en-US" sz="1333" dirty="0">
-                <a:solidFill>
-                  <a:srgbClr val="7DD8EC"/>
-                </a:solidFill>
-                <a:latin typeface="Courier New" pitchFamily="34" charset="0"/>
-                <a:ea typeface="Courier New" pitchFamily="34" charset="-122"/>
-                <a:cs typeface="Courier New" pitchFamily="34" charset="-120"/>
-              </a:rPr>
-              <a:t>curl -w "%{time_total}s"</a:t>
-            </a:r>
-            <a:endParaRPr lang="en-US" sz="1333" dirty="0"/>
-          </a:p>
-          <a:p>
-            <a:r>
-              <a:rPr lang="en-US" sz="1333" dirty="0">
-                <a:solidFill>
-                  <a:srgbClr val="7DD8EC"/>
-                </a:solidFill>
-                <a:latin typeface="Courier New" pitchFamily="34" charset="0"/>
-                <a:ea typeface="Courier New" pitchFamily="34" charset="-122"/>
-                <a:cs typeface="Courier New" pitchFamily="34" charset="-120"/>
-              </a:rPr>
-              <a:t>https://httpbin.org/get</a:t>
-            </a:r>
-            <a:endParaRPr lang="en-US" sz="1333" dirty="0"/>
-          </a:p>
-        </p:txBody>
-      </p:sp>
-      <p:sp>
-        <p:nvSpPr>
-          <p:cNvPr id="18" name="Text 16"/>
-          <p:cNvSpPr/>
-          <p:nvPr/>
-        </p:nvSpPr>
-        <p:spPr>
-          <a:xfrm>
-            <a:off x="6559296" y="4425696"/>
-            <a:ext cx="4998720" cy="548640"/>
-          </a:xfrm>
-          <a:prstGeom prst="rect">
-            <a:avLst/>
-          </a:prstGeom>
-          <a:noFill/>
-          <a:ln/>
-        </p:spPr>
-        <p:txBody>
-          <a:bodyPr wrap="square" rtlCol="0" anchor="ctr"/>
-          <a:lstStyle/>
-          <a:p>
-            <a:r>
-              <a:rPr lang="en-US" sz="1467" b="1" dirty="0">
-                <a:solidFill>
-                  <a:srgbClr val="92400E"/>
-                </a:solidFill>
-                <a:latin typeface="Calibri" pitchFamily="34" charset="0"/>
-                <a:ea typeface="Calibri" pitchFamily="34" charset="-122"/>
-                <a:cs typeface="Calibri" pitchFamily="34" charset="-120"/>
-              </a:rPr>
-              <a:t>Result: </a:t>
-            </a:r>
-            <a:r>
-              <a:rPr lang="en-US" sz="1467" dirty="0">
-                <a:solidFill>
-                  <a:srgbClr val="334155"/>
-                </a:solidFill>
-                <a:latin typeface="Calibri" pitchFamily="34" charset="0"/>
-                <a:ea typeface="Calibri" pitchFamily="34" charset="-122"/>
-                <a:cs typeface="Calibri" pitchFamily="34" charset="-120"/>
-              </a:rPr>
-              <a:t>0.510079 s = </a:t>
-            </a:r>
-            <a:r>
-              <a:rPr lang="en-US" sz="1467" b="1" dirty="0">
-                <a:solidFill>
-                  <a:srgbClr val="92400E"/>
-                </a:solidFill>
-                <a:latin typeface="Calibri" pitchFamily="34" charset="0"/>
-                <a:ea typeface="Calibri" pitchFamily="34" charset="-122"/>
-                <a:cs typeface="Calibri" pitchFamily="34" charset="-120"/>
-              </a:rPr>
-              <a:t>510 ms</a:t>
-            </a:r>
-            <a:r>
-              <a:rPr lang="en-US" sz="1467" dirty="0">
-                <a:solidFill>
-                  <a:srgbClr val="334155"/>
-                </a:solidFill>
-                <a:latin typeface="Calibri" pitchFamily="34" charset="0"/>
-                <a:ea typeface="Calibri" pitchFamily="34" charset="-122"/>
-                <a:cs typeface="Calibri" pitchFamily="34" charset="-120"/>
-              </a:rPr>
-              <a:t> internet round-trip.</a:t>
-            </a:r>
-            <a:endParaRPr lang="en-US" sz="1467" dirty="0"/>
-          </a:p>
-        </p:txBody>
-      </p:sp>
-      <p:sp>
-        <p:nvSpPr>
-          <p:cNvPr id="19" name="Text 17"/>
-          <p:cNvSpPr/>
-          <p:nvPr/>
-        </p:nvSpPr>
-        <p:spPr>
-          <a:xfrm>
-            <a:off x="6559296" y="4998720"/>
-            <a:ext cx="4998720" cy="999744"/>
-          </a:xfrm>
-          <a:prstGeom prst="rect">
-            <a:avLst/>
-          </a:prstGeom>
-          <a:noFill/>
-          <a:ln/>
-        </p:spPr>
-        <p:txBody>
-          <a:bodyPr wrap="square" lIns="0" tIns="0" rIns="0" bIns="0" rtlCol="0" anchor="ctr"/>
-          <a:lstStyle/>
-          <a:p>
-            <a:pPr algn="ctr"/>
-            <a:r>
-              <a:rPr lang="en-US" sz="7466" b="1" dirty="0">
-                <a:solidFill>
-                  <a:srgbClr val="F59E0B"/>
-                </a:solidFill>
-                <a:latin typeface="Cambria" pitchFamily="34" charset="0"/>
-                <a:ea typeface="Cambria" pitchFamily="34" charset="-122"/>
-                <a:cs typeface="Cambria" pitchFamily="34" charset="-120"/>
-              </a:rPr>
-              <a:t>510 ms</a:t>
-            </a:r>
-            <a:endParaRPr lang="en-US" sz="7466" dirty="0"/>
-          </a:p>
-        </p:txBody>
-      </p:sp>
-      <p:sp>
-        <p:nvSpPr>
-          <p:cNvPr id="20" name="Text 18"/>
-          <p:cNvSpPr/>
-          <p:nvPr/>
-        </p:nvSpPr>
-        <p:spPr>
-          <a:xfrm>
-            <a:off x="6559296" y="5974080"/>
-            <a:ext cx="4998720" cy="390144"/>
-          </a:xfrm>
-          <a:prstGeom prst="rect">
-            <a:avLst/>
-          </a:prstGeom>
-          <a:noFill/>
-          <a:ln/>
-        </p:spPr>
-        <p:txBody>
-          <a:bodyPr wrap="square" lIns="0" tIns="0" rIns="0" bIns="0" rtlCol="0" anchor="ctr"/>
-          <a:lstStyle/>
-          <a:p>
-            <a:pPr algn="ctr"/>
-            <a:r>
-              <a:rPr lang="en-US" sz="1467" dirty="0">
-                <a:solidFill>
-                  <a:srgbClr val="64748B"/>
-                </a:solidFill>
-                <a:latin typeface="Calibri" pitchFamily="34" charset="0"/>
-                <a:ea typeface="Calibri" pitchFamily="34" charset="-122"/>
-                <a:cs typeface="Calibri" pitchFamily="34" charset="-120"/>
-              </a:rPr>
-              <a:t>Paderborn Home Wi-Fi</a:t>
-            </a:r>
-            <a:endParaRPr lang="en-US" sz="1467" dirty="0"/>
-          </a:p>
-        </p:txBody>
-      </p:sp>
-    </p:spTree>
-  </p:cSld>
-  <p:clrMapOvr>
-    <a:masterClrMapping/>
-  </p:clrMapOvr>
-</p:sld>
-</file>
-
-<file path=ppt/slides/slide3.xml><?xml version="1.0" encoding="utf-8"?>
 <p:sld xmlns:a="http://schemas.openxmlformats.org/drawingml/2006/main" xmlns:r="http://schemas.openxmlformats.org/officeDocument/2006/relationships" xmlns:p="http://schemas.openxmlformats.org/presentationml/2006/main">
   <p:cSld name="Slide 3">
     <p:bg>
@@ -4907,7 +2356,7 @@
               <a:buNone/>
             </a:pPr>
             <a:r>
-              <a:rPr lang="en-US" sz="2800" b="1" dirty="0">
+              <a:rPr lang="en-US" sz="2800" b="1">
                 <a:solidFill>
                   <a:srgbClr val="0B172A"/>
                 </a:solidFill>
@@ -4917,7 +2366,7 @@
               </a:rPr>
               <a:t>Edge Latency Test</a:t>
             </a:r>
-            <a:endParaRPr lang="en-US" sz="2800" dirty="0"/>
+            <a:endParaRPr lang="en-US" sz="2800"/>
           </a:p>
         </p:txBody>
       </p:sp>
@@ -4945,7 +2394,7 @@
             <a:pPr marL="0" indent="0">
               <a:buNone/>
             </a:pPr>
-            <a:endParaRPr lang="en-US" sz="850" dirty="0"/>
+            <a:endParaRPr lang="en-US" sz="850"/>
           </a:p>
         </p:txBody>
       </p:sp>
@@ -4974,7 +2423,7 @@
               <a:buNone/>
             </a:pPr>
             <a:r>
-              <a:rPr lang="en-US" sz="850" b="1" dirty="0">
+              <a:rPr lang="en-US" sz="850" b="1">
                 <a:solidFill>
                   <a:srgbClr val="64748B"/>
                 </a:solidFill>
@@ -4984,7 +2433,7 @@
               </a:rPr>
               <a:t>03</a:t>
             </a:r>
-            <a:endParaRPr lang="en-US" sz="850" dirty="0"/>
+            <a:endParaRPr lang="en-US" sz="850"/>
           </a:p>
         </p:txBody>
       </p:sp>
@@ -5152,7 +2601,7 @@
               <a:buNone/>
             </a:pPr>
             <a:r>
-              <a:rPr lang="en-US" sz="1150" b="1" dirty="0">
+              <a:rPr lang="en-US" sz="1150" b="1">
                 <a:solidFill>
                   <a:srgbClr val="0B172A"/>
                 </a:solidFill>
@@ -5162,14 +2611,14 @@
               </a:rPr>
               <a:t>Mobile</a:t>
             </a:r>
-            <a:endParaRPr lang="en-US" sz="1150" dirty="0"/>
+            <a:endParaRPr lang="en-US" sz="1150"/>
           </a:p>
           <a:p>
             <a:pPr marL="0" indent="0" algn="ctr">
               <a:buNone/>
             </a:pPr>
             <a:r>
-              <a:rPr lang="en-US" sz="1150" b="1" dirty="0">
+              <a:rPr lang="en-US" sz="1150" b="1">
                 <a:solidFill>
                   <a:srgbClr val="0B172A"/>
                 </a:solidFill>
@@ -5179,7 +2628,7 @@
               </a:rPr>
               <a:t>phone client</a:t>
             </a:r>
-            <a:endParaRPr lang="en-US" sz="1150" dirty="0"/>
+            <a:endParaRPr lang="en-US" sz="1150"/>
           </a:p>
         </p:txBody>
       </p:sp>
@@ -5251,7 +2700,7 @@
               <a:buNone/>
             </a:pPr>
             <a:r>
-              <a:rPr lang="en-US" sz="1120" b="1" dirty="0">
+              <a:rPr lang="en-US" sz="1120" b="1">
                 <a:solidFill>
                   <a:srgbClr val="0B172A"/>
                 </a:solidFill>
@@ -5261,14 +2710,14 @@
               </a:rPr>
               <a:t>Home or HSHL</a:t>
             </a:r>
-            <a:endParaRPr lang="en-US" sz="1120" dirty="0"/>
+            <a:endParaRPr lang="en-US" sz="1120"/>
           </a:p>
           <a:p>
             <a:pPr marL="0" indent="0" algn="ctr">
               <a:buNone/>
             </a:pPr>
             <a:r>
-              <a:rPr lang="en-US" sz="1120" b="1" dirty="0">
+              <a:rPr lang="en-US" sz="1120" b="1">
                 <a:solidFill>
                   <a:srgbClr val="0B172A"/>
                 </a:solidFill>
@@ -5278,7 +2727,7 @@
               </a:rPr>
               <a:t>Wi‑Fi network</a:t>
             </a:r>
-            <a:endParaRPr lang="en-US" sz="1120" dirty="0"/>
+            <a:endParaRPr lang="en-US" sz="1120"/>
           </a:p>
         </p:txBody>
       </p:sp>
@@ -5350,7 +2799,7 @@
               <a:buNone/>
             </a:pPr>
             <a:r>
-              <a:rPr lang="en-US" sz="1120" b="1" dirty="0">
+              <a:rPr lang="en-US" sz="1120" b="1">
                 <a:solidFill>
                   <a:srgbClr val="0B172A"/>
                 </a:solidFill>
@@ -5360,14 +2809,14 @@
               </a:rPr>
               <a:t>Ubuntu laptop</a:t>
             </a:r>
-            <a:endParaRPr lang="en-US" sz="1120" dirty="0"/>
+            <a:endParaRPr lang="en-US" sz="1120"/>
           </a:p>
           <a:p>
             <a:pPr marL="0" indent="0" algn="ctr">
               <a:buNone/>
             </a:pPr>
             <a:r>
-              <a:rPr lang="en-US" sz="1120" b="1" dirty="0">
+              <a:rPr lang="en-US" sz="1120" b="1">
                 <a:solidFill>
                   <a:srgbClr val="0B172A"/>
                 </a:solidFill>
@@ -5377,7 +2826,7 @@
               </a:rPr>
               <a:t>Flask server</a:t>
             </a:r>
-            <a:endParaRPr lang="en-US" sz="1120" dirty="0"/>
+            <a:endParaRPr lang="en-US" sz="1120"/>
           </a:p>
         </p:txBody>
       </p:sp>
@@ -5449,7 +2898,7 @@
               <a:buNone/>
             </a:pPr>
             <a:r>
-              <a:rPr lang="en-US" sz="1120" b="1" dirty="0">
+              <a:rPr lang="en-US" sz="1120" b="1">
                 <a:solidFill>
                   <a:srgbClr val="0B172A"/>
                 </a:solidFill>
@@ -5459,14 +2908,14 @@
               </a:rPr>
               <a:t>Response</a:t>
             </a:r>
-            <a:endParaRPr lang="en-US" sz="1120" dirty="0"/>
+            <a:endParaRPr lang="en-US" sz="1120"/>
           </a:p>
           <a:p>
             <a:pPr marL="0" indent="0" algn="ctr">
               <a:buNone/>
             </a:pPr>
             <a:r>
-              <a:rPr lang="en-US" sz="1120" b="1" dirty="0">
+              <a:rPr lang="en-US" sz="1120" b="1">
                 <a:solidFill>
                   <a:srgbClr val="0B172A"/>
                 </a:solidFill>
@@ -5476,7 +2925,7 @@
               </a:rPr>
               <a:t>back to phone</a:t>
             </a:r>
-            <a:endParaRPr lang="en-US" sz="1120" dirty="0"/>
+            <a:endParaRPr lang="en-US" sz="1120"/>
           </a:p>
         </p:txBody>
       </p:sp>
@@ -5507,14 +2956,14 @@
               <a:buNone/>
             </a:pPr>
             <a:r>
-              <a:rPr lang="en-US" sz="1100" b="1" dirty="0">
+              <a:rPr lang="en-US" sz="1100" b="1">
                 <a:solidFill>
                   <a:srgbClr val="64748B"/>
                 </a:solidFill>
               </a:rPr>
               <a:t>Stable local network</a:t>
             </a:r>
-            <a:endParaRPr lang="en-US" sz="1100" dirty="0"/>
+            <a:endParaRPr lang="en-US" sz="1100"/>
           </a:p>
         </p:txBody>
       </p:sp>
@@ -5545,7 +2994,7 @@
               <a:buNone/>
             </a:pPr>
             <a:r>
-              <a:rPr lang="en-US" sz="2800" b="1" dirty="0">
+              <a:rPr lang="en-US" sz="2800" b="1">
                 <a:solidFill>
                   <a:srgbClr val="10B981"/>
                 </a:solidFill>
@@ -5555,7 +3004,7 @@
               </a:rPr>
               <a:t>95 ms</a:t>
             </a:r>
-            <a:endParaRPr lang="en-US" sz="2800" dirty="0"/>
+            <a:endParaRPr lang="en-US" sz="2800"/>
           </a:p>
         </p:txBody>
       </p:sp>
@@ -5586,14 +3035,14 @@
               <a:buNone/>
             </a:pPr>
             <a:r>
-              <a:rPr lang="en-US" sz="1050" dirty="0">
+              <a:rPr lang="en-US" sz="1050">
                 <a:solidFill>
                   <a:srgbClr val="64748B"/>
                 </a:solidFill>
               </a:rPr>
               <a:t>Paderborn home Wi‑Fi</a:t>
             </a:r>
-            <a:endParaRPr lang="en-US" sz="1050" dirty="0"/>
+            <a:endParaRPr lang="en-US" sz="1050"/>
           </a:p>
         </p:txBody>
       </p:sp>
@@ -5624,14 +3073,14 @@
               <a:buNone/>
             </a:pPr>
             <a:r>
-              <a:rPr lang="en-US" sz="1100" b="1" dirty="0">
+              <a:rPr lang="en-US" sz="1100" b="1">
                 <a:solidFill>
                   <a:srgbClr val="64748B"/>
                 </a:solidFill>
               </a:rPr>
               <a:t>Shared network</a:t>
             </a:r>
-            <a:endParaRPr lang="en-US" sz="1100" dirty="0"/>
+            <a:endParaRPr lang="en-US" sz="1100"/>
           </a:p>
         </p:txBody>
       </p:sp>
@@ -5662,7 +3111,7 @@
               <a:buNone/>
             </a:pPr>
             <a:r>
-              <a:rPr lang="en-US" sz="2800" b="1" dirty="0">
+              <a:rPr lang="en-US" sz="2800" b="1">
                 <a:solidFill>
                   <a:srgbClr val="F59E0B"/>
                 </a:solidFill>
@@ -5672,7 +3121,7 @@
               </a:rPr>
               <a:t>422 ms</a:t>
             </a:r>
-            <a:endParaRPr lang="en-US" sz="2800" dirty="0"/>
+            <a:endParaRPr lang="en-US" sz="2800"/>
           </a:p>
         </p:txBody>
       </p:sp>
@@ -5703,14 +3152,14 @@
               <a:buNone/>
             </a:pPr>
             <a:r>
-              <a:rPr lang="en-US" sz="1050" dirty="0">
+              <a:rPr lang="en-US" sz="1050">
                 <a:solidFill>
                   <a:srgbClr val="64748B"/>
                 </a:solidFill>
               </a:rPr>
               <a:t>HSHL central Wi‑Fi</a:t>
             </a:r>
-            <a:endParaRPr lang="en-US" sz="1050" dirty="0"/>
+            <a:endParaRPr lang="en-US" sz="1050"/>
           </a:p>
         </p:txBody>
       </p:sp>
@@ -5785,7 +3234,7 @@
           <a:p>
             <a:pPr algn="ctr"/>
             <a:r>
-              <a:rPr lang="en-US" sz="1333" b="1" kern="0" spc="267" dirty="0">
+              <a:rPr lang="en-US" sz="1333" b="1" kern="0" spc="267">
                 <a:solidFill>
                   <a:srgbClr val="047857"/>
                 </a:solidFill>
@@ -5826,7 +3275,7 @@
           <a:lstStyle/>
           <a:p>
             <a:r>
-              <a:rPr lang="en-US" sz="1200" b="1" dirty="0">
+              <a:rPr lang="en-US" sz="1200" b="1">
                 <a:solidFill>
                   <a:srgbClr val="1E293B"/>
                 </a:solidFill>
@@ -5837,7 +3286,7 @@
               <a:t>Server: </a:t>
             </a:r>
             <a:r>
-              <a:rPr lang="en-US" sz="1200" dirty="0">
+              <a:rPr lang="en-US" sz="1200">
                 <a:solidFill>
                   <a:srgbClr val="334155"/>
                 </a:solidFill>
@@ -5847,11 +3296,11 @@
               </a:rPr>
               <a:t>Ubuntu 22.04 running Python Flask</a:t>
             </a:r>
-            <a:endParaRPr lang="en-US" sz="1200" dirty="0"/>
-          </a:p>
-          <a:p>
-            <a:r>
-              <a:rPr lang="en-US" sz="1200" b="1" dirty="0">
+            <a:endParaRPr lang="en-US" sz="1200"/>
+          </a:p>
+          <a:p>
+            <a:r>
+              <a:rPr lang="en-US" sz="1200" b="1">
                 <a:solidFill>
                   <a:srgbClr val="1E293B"/>
                 </a:solidFill>
@@ -5861,11 +3310,11 @@
               </a:rPr>
               <a:t>Client: </a:t>
             </a:r>
-            <a:endParaRPr lang="en-US" sz="1200" dirty="0"/>
-          </a:p>
-          <a:p>
-            <a:r>
-              <a:rPr lang="en-US" sz="1200" dirty="0">
+            <a:endParaRPr lang="en-US" sz="1200"/>
+          </a:p>
+          <a:p>
+            <a:r>
+              <a:rPr lang="en-US" sz="1200">
                 <a:solidFill>
                   <a:srgbClr val="334155"/>
                 </a:solidFill>
@@ -5875,11 +3324,11 @@
               </a:rPr>
               <a:t>Mobile phone → http://192.168.178.78:5000</a:t>
             </a:r>
-            <a:endParaRPr lang="en-US" sz="1200" dirty="0"/>
-          </a:p>
-          <a:p>
-            <a:r>
-              <a:rPr lang="en-US" sz="1200" b="1" dirty="0">
+            <a:endParaRPr lang="en-US" sz="1200"/>
+          </a:p>
+          <a:p>
+            <a:r>
+              <a:rPr lang="en-US" sz="1200" b="1">
                 <a:solidFill>
                   <a:srgbClr val="1E293B"/>
                 </a:solidFill>
@@ -5889,7 +3338,7 @@
               </a:rPr>
               <a:t>Terminal log:</a:t>
             </a:r>
-            <a:endParaRPr lang="en-US" sz="1200" dirty="0"/>
+            <a:endParaRPr lang="en-US" sz="1200"/>
           </a:p>
         </p:txBody>
       </p:sp>
@@ -5956,7 +3405,7 @@
           <a:lstStyle/>
           <a:p>
             <a:r>
-              <a:rPr lang="en-US" sz="1200" dirty="0">
+              <a:rPr lang="en-US" sz="1200">
                 <a:solidFill>
                   <a:srgbClr val="7DD8EC"/>
                 </a:solidFill>
@@ -5966,11 +3415,11 @@
               </a:rPr>
               <a:t>POST /process HTTP/1.1" 200</a:t>
             </a:r>
-            <a:endParaRPr lang="en-US" sz="1200" dirty="0"/>
-          </a:p>
-          <a:p>
-            <a:r>
-              <a:rPr lang="en-US" sz="1200" dirty="0">
+            <a:endParaRPr lang="en-US" sz="1200"/>
+          </a:p>
+          <a:p>
+            <a:r>
+              <a:rPr lang="en-US" sz="1200">
                 <a:solidFill>
                   <a:srgbClr val="7DD8EC"/>
                 </a:solidFill>
@@ -5980,7 +3429,7 @@
               </a:rPr>
               <a:t>192.168.178.117 → .78:5000</a:t>
             </a:r>
-            <a:endParaRPr lang="en-US" sz="1200" dirty="0"/>
+            <a:endParaRPr lang="en-US" sz="1200"/>
           </a:p>
         </p:txBody>
       </p:sp>
@@ -6012,7 +3461,7 @@
           <a:lstStyle/>
           <a:p>
             <a:r>
-              <a:rPr lang="en-US" sz="1200" b="1" dirty="0">
+              <a:rPr lang="en-US" sz="1200" b="1">
                 <a:solidFill>
                   <a:srgbClr val="047857"/>
                 </a:solidFill>
@@ -6023,7 +3472,7 @@
               <a:t>Status 200 OK </a:t>
             </a:r>
             <a:r>
-              <a:rPr lang="en-US" sz="1200" dirty="0">
+              <a:rPr lang="en-US" sz="1200">
                 <a:solidFill>
                   <a:srgbClr val="334155"/>
                 </a:solidFill>
@@ -6033,7 +3482,7 @@
               </a:rPr>
               <a:t>confirms successful edge communication.</a:t>
             </a:r>
-            <a:endParaRPr lang="en-US" sz="1200" dirty="0"/>
+            <a:endParaRPr lang="en-US" sz="1200"/>
           </a:p>
         </p:txBody>
       </p:sp>
@@ -6045,7 +3494,7 @@
 </p:sld>
 </file>
 
-<file path=ppt/slides/slide4.xml><?xml version="1.0" encoding="utf-8"?>
+<file path=ppt/slides/slide3.xml><?xml version="1.0" encoding="utf-8"?>
 <p:sld xmlns:a="http://schemas.openxmlformats.org/drawingml/2006/main" xmlns:r="http://schemas.openxmlformats.org/officeDocument/2006/relationships" xmlns:p="http://schemas.openxmlformats.org/presentationml/2006/main">
   <p:cSld name="Slide 4">
     <p:bg>
@@ -6165,7 +3614,7 @@
               <a:buNone/>
             </a:pPr>
             <a:r>
-              <a:rPr lang="en-US" sz="2800" b="1" dirty="0">
+              <a:rPr lang="en-US" sz="2800" b="1">
                 <a:solidFill>
                   <a:srgbClr val="0B172A"/>
                 </a:solidFill>
@@ -6173,22 +3622,22 @@
                 <a:ea typeface="Aptos Display" pitchFamily="34" charset="-122"/>
                 <a:cs typeface="Aptos Display" pitchFamily="34" charset="-120"/>
               </a:rPr>
-              <a:t>Cloud latency test: remote internet path</a:t>
-            </a:r>
-            <a:endParaRPr lang="en-US" sz="2800" dirty="0"/>
-          </a:p>
-        </p:txBody>
-      </p:sp>
-      <p:sp>
-        <p:nvSpPr>
-          <p:cNvPr id="5" name="Text 3"/>
-          <p:cNvSpPr/>
-          <p:nvPr/>
-        </p:nvSpPr>
-        <p:spPr>
-          <a:xfrm>
-            <a:off x="530352" y="868680"/>
-            <a:ext cx="10241280" cy="274320"/>
+              <a:t>Cloud Latency Test</a:t>
+            </a:r>
+            <a:endParaRPr lang="en-US" sz="2800"/>
+          </a:p>
+        </p:txBody>
+      </p:sp>
+      <p:sp>
+        <p:nvSpPr>
+          <p:cNvPr id="7" name="Text 5"/>
+          <p:cNvSpPr/>
+          <p:nvPr/>
+        </p:nvSpPr>
+        <p:spPr>
+          <a:xfrm>
+            <a:off x="11384280" y="6446520"/>
+            <a:ext cx="320040" cy="228600"/>
           </a:xfrm>
           <a:prstGeom prst="rect">
             <a:avLst/>
@@ -6197,16 +3646,14 @@
           <a:ln/>
         </p:spPr>
         <p:txBody>
-          <a:bodyPr wrap="square" lIns="0" tIns="0" rIns="0" bIns="0" rtlCol="0" anchor="ctr">
-            <a:normAutofit/>
-          </a:bodyPr>
-          <a:lstStyle/>
-          <a:p>
-            <a:pPr marL="0" indent="0">
+          <a:bodyPr wrap="square" lIns="0" tIns="0" rIns="0" bIns="0" rtlCol="0" anchor="ctr"/>
+          <a:lstStyle/>
+          <a:p>
+            <a:pPr marL="0" indent="0" algn="r">
               <a:buNone/>
             </a:pPr>
             <a:r>
-              <a:rPr lang="en-US" sz="1250" dirty="0">
+              <a:rPr lang="en-US" sz="850" b="1">
                 <a:solidFill>
                   <a:srgbClr val="64748B"/>
                 </a:solidFill>
@@ -6214,87 +3661,9 @@
                 <a:ea typeface="Aptos" pitchFamily="34" charset="-122"/>
                 <a:cs typeface="Aptos" pitchFamily="34" charset="-120"/>
               </a:rPr>
-              <a:t>The request traveled through the public internet to an external server and back.</a:t>
-            </a:r>
-            <a:endParaRPr lang="en-US" sz="1250" dirty="0"/>
-          </a:p>
-        </p:txBody>
-      </p:sp>
-      <p:sp>
-        <p:nvSpPr>
-          <p:cNvPr id="6" name="Text 4"/>
-          <p:cNvSpPr/>
-          <p:nvPr/>
-        </p:nvSpPr>
-        <p:spPr>
-          <a:xfrm>
-            <a:off x="502920" y="6492240"/>
-            <a:ext cx="7772400" cy="201168"/>
-          </a:xfrm>
-          <a:prstGeom prst="rect">
-            <a:avLst/>
-          </a:prstGeom>
-          <a:noFill/>
-          <a:ln/>
-        </p:spPr>
-        <p:txBody>
-          <a:bodyPr wrap="square" lIns="0" tIns="0" rIns="0" bIns="0" rtlCol="0" anchor="ctr"/>
-          <a:lstStyle/>
-          <a:p>
-            <a:pPr marL="0" indent="0">
-              <a:buNone/>
-            </a:pPr>
-            <a:r>
-              <a:rPr lang="en-US" sz="850" dirty="0">
-                <a:solidFill>
-                  <a:srgbClr val="64748B"/>
-                </a:solidFill>
-                <a:latin typeface="Aptos" pitchFamily="34" charset="0"/>
-                <a:ea typeface="Aptos" pitchFamily="34" charset="-122"/>
-                <a:cs typeface="Aptos" pitchFamily="34" charset="-120"/>
-              </a:rPr>
-              <a:t>Edge Computing in Industrial Communication • Sections VII–IX</a:t>
-            </a:r>
-            <a:endParaRPr lang="en-US" sz="850" dirty="0"/>
-          </a:p>
-        </p:txBody>
-      </p:sp>
-      <p:sp>
-        <p:nvSpPr>
-          <p:cNvPr id="7" name="Text 5"/>
-          <p:cNvSpPr/>
-          <p:nvPr/>
-        </p:nvSpPr>
-        <p:spPr>
-          <a:xfrm>
-            <a:off x="11384280" y="6446520"/>
-            <a:ext cx="320040" cy="228600"/>
-          </a:xfrm>
-          <a:prstGeom prst="rect">
-            <a:avLst/>
-          </a:prstGeom>
-          <a:noFill/>
-          <a:ln/>
-        </p:spPr>
-        <p:txBody>
-          <a:bodyPr wrap="square" lIns="0" tIns="0" rIns="0" bIns="0" rtlCol="0" anchor="ctr"/>
-          <a:lstStyle/>
-          <a:p>
-            <a:pPr marL="0" indent="0" algn="r">
-              <a:buNone/>
-            </a:pPr>
-            <a:r>
-              <a:rPr lang="en-US" sz="850" b="1" dirty="0">
-                <a:solidFill>
-                  <a:srgbClr val="64748B"/>
-                </a:solidFill>
-                <a:latin typeface="Aptos" pitchFamily="34" charset="0"/>
-                <a:ea typeface="Aptos" pitchFamily="34" charset="-122"/>
-                <a:cs typeface="Aptos" pitchFamily="34" charset="-120"/>
-              </a:rPr>
               <a:t>04</a:t>
             </a:r>
-            <a:endParaRPr lang="en-US" sz="850" dirty="0"/>
+            <a:endParaRPr lang="en-US" sz="850"/>
           </a:p>
         </p:txBody>
       </p:sp>
@@ -6307,7 +3676,7 @@
         <p:spPr>
           <a:xfrm>
             <a:off x="2148840" y="2606040"/>
-            <a:ext cx="1645920" cy="0"/>
+            <a:ext cx="958154" cy="0"/>
           </a:xfrm>
           <a:prstGeom prst="line">
             <a:avLst/>
@@ -6338,8 +3707,8 @@
         </p:nvSpPr>
         <p:spPr>
           <a:xfrm>
-            <a:off x="5349240" y="2606040"/>
-            <a:ext cx="1828800" cy="0"/>
+            <a:off x="4661474" y="2606040"/>
+            <a:ext cx="874087" cy="0"/>
           </a:xfrm>
           <a:prstGeom prst="line">
             <a:avLst/>
@@ -6370,8 +3739,8 @@
         </p:nvSpPr>
         <p:spPr>
           <a:xfrm>
-            <a:off x="8732520" y="2606040"/>
-            <a:ext cx="1325880" cy="0"/>
+            <a:off x="9548194" y="2606040"/>
+            <a:ext cx="796413" cy="0"/>
           </a:xfrm>
           <a:prstGeom prst="line">
             <a:avLst/>
@@ -6462,7 +3831,7 @@
               <a:buNone/>
             </a:pPr>
             <a:r>
-              <a:rPr lang="en-US" sz="1150" b="1" dirty="0">
+              <a:rPr lang="en-US" sz="1150" b="1">
                 <a:solidFill>
                   <a:srgbClr val="0B172A"/>
                 </a:solidFill>
@@ -6472,14 +3841,14 @@
               </a:rPr>
               <a:t>Mobile</a:t>
             </a:r>
-            <a:endParaRPr lang="en-US" sz="1150" dirty="0"/>
+            <a:endParaRPr lang="en-US" sz="1150"/>
           </a:p>
           <a:p>
             <a:pPr marL="0" indent="0" algn="ctr">
               <a:buNone/>
             </a:pPr>
             <a:r>
-              <a:rPr lang="en-US" sz="1150" b="1" dirty="0">
+              <a:rPr lang="en-US" sz="1150" b="1">
                 <a:solidFill>
                   <a:srgbClr val="0B172A"/>
                 </a:solidFill>
@@ -6489,7 +3858,7 @@
               </a:rPr>
               <a:t>phone</a:t>
             </a:r>
-            <a:endParaRPr lang="en-US" sz="1150" dirty="0"/>
+            <a:endParaRPr lang="en-US" sz="1150"/>
           </a:p>
         </p:txBody>
       </p:sp>
@@ -6501,7 +3870,7 @@
         </p:nvSpPr>
         <p:spPr>
           <a:xfrm>
-            <a:off x="3794760" y="2057400"/>
+            <a:off x="3106994" y="2042703"/>
             <a:ext cx="1554480" cy="1097280"/>
           </a:xfrm>
           <a:prstGeom prst="roundRect">
@@ -6542,7 +3911,7 @@
         </p:nvSpPr>
         <p:spPr>
           <a:xfrm>
-            <a:off x="3904488" y="2185416"/>
+            <a:off x="3216722" y="2170719"/>
             <a:ext cx="1335024" cy="841248"/>
           </a:xfrm>
           <a:prstGeom prst="rect">
@@ -6561,7 +3930,7 @@
               <a:buNone/>
             </a:pPr>
             <a:r>
-              <a:rPr lang="en-US" sz="1150" b="1" dirty="0">
+              <a:rPr lang="en-US" sz="1150" b="1">
                 <a:solidFill>
                   <a:srgbClr val="0B172A"/>
                 </a:solidFill>
@@ -6571,14 +3940,14 @@
               </a:rPr>
               <a:t>Internet</a:t>
             </a:r>
-            <a:endParaRPr lang="en-US" sz="1150" dirty="0"/>
+            <a:endParaRPr lang="en-US" sz="1150"/>
           </a:p>
           <a:p>
             <a:pPr marL="0" indent="0" algn="ctr">
               <a:buNone/>
             </a:pPr>
             <a:r>
-              <a:rPr lang="en-US" sz="1150" b="1" dirty="0">
+              <a:rPr lang="en-US" sz="1150" b="1">
                 <a:solidFill>
                   <a:srgbClr val="0B172A"/>
                 </a:solidFill>
@@ -6588,7 +3957,7 @@
               </a:rPr>
               <a:t>route</a:t>
             </a:r>
-            <a:endParaRPr lang="en-US" sz="1150" dirty="0"/>
+            <a:endParaRPr lang="en-US" sz="1150"/>
           </a:p>
         </p:txBody>
       </p:sp>
@@ -6600,7 +3969,7 @@
         </p:nvSpPr>
         <p:spPr>
           <a:xfrm>
-            <a:off x="7178040" y="2057400"/>
+            <a:off x="5535561" y="2047889"/>
             <a:ext cx="1554480" cy="1097280"/>
           </a:xfrm>
           <a:prstGeom prst="roundRect">
@@ -6641,7 +4010,7 @@
         </p:nvSpPr>
         <p:spPr>
           <a:xfrm>
-            <a:off x="7287768" y="2185416"/>
+            <a:off x="5645289" y="2175905"/>
             <a:ext cx="1335024" cy="841248"/>
           </a:xfrm>
           <a:prstGeom prst="rect">
@@ -6660,7 +4029,7 @@
               <a:buNone/>
             </a:pPr>
             <a:r>
-              <a:rPr lang="en-US" sz="1120" b="1" dirty="0">
+              <a:rPr lang="en-US" sz="1120" b="1">
                 <a:solidFill>
                   <a:srgbClr val="0B172A"/>
                 </a:solidFill>
@@ -6670,14 +4039,14 @@
               </a:rPr>
               <a:t>Remote cloud</a:t>
             </a:r>
-            <a:endParaRPr lang="en-US" sz="1120" dirty="0"/>
+            <a:endParaRPr lang="en-US" sz="1120"/>
           </a:p>
           <a:p>
             <a:pPr marL="0" indent="0" algn="ctr">
               <a:buNone/>
             </a:pPr>
             <a:r>
-              <a:rPr lang="en-US" sz="1120" b="1" dirty="0">
+              <a:rPr lang="en-US" sz="1120" b="1">
                 <a:solidFill>
                   <a:srgbClr val="0B172A"/>
                 </a:solidFill>
@@ -6687,7 +4056,7 @@
               </a:rPr>
               <a:t>server</a:t>
             </a:r>
-            <a:endParaRPr lang="en-US" sz="1120" dirty="0"/>
+            <a:endParaRPr lang="en-US" sz="1120"/>
           </a:p>
         </p:txBody>
       </p:sp>
@@ -6699,7 +4068,7 @@
         </p:nvSpPr>
         <p:spPr>
           <a:xfrm>
-            <a:off x="10058400" y="2057400"/>
+            <a:off x="10344607" y="2057400"/>
             <a:ext cx="1417320" cy="1097280"/>
           </a:xfrm>
           <a:prstGeom prst="roundRect">
@@ -6740,7 +4109,7 @@
         </p:nvSpPr>
         <p:spPr>
           <a:xfrm>
-            <a:off x="10168128" y="2185416"/>
+            <a:off x="10454335" y="2185416"/>
             <a:ext cx="1197864" cy="841248"/>
           </a:xfrm>
           <a:prstGeom prst="rect">
@@ -6759,7 +4128,7 @@
               <a:buNone/>
             </a:pPr>
             <a:r>
-              <a:rPr lang="en-US" sz="1120" b="1" dirty="0">
+              <a:rPr lang="en-US" sz="1120" b="1">
                 <a:solidFill>
                   <a:srgbClr val="0B172A"/>
                 </a:solidFill>
@@ -6769,14 +4138,14 @@
               </a:rPr>
               <a:t>Response</a:t>
             </a:r>
-            <a:endParaRPr lang="en-US" sz="1120" dirty="0"/>
+            <a:endParaRPr lang="en-US" sz="1120"/>
           </a:p>
           <a:p>
             <a:pPr marL="0" indent="0" algn="ctr">
               <a:buNone/>
             </a:pPr>
             <a:r>
-              <a:rPr lang="en-US" sz="1120" b="1" dirty="0">
+              <a:rPr lang="en-US" sz="1120" b="1">
                 <a:solidFill>
                   <a:srgbClr val="0B172A"/>
                 </a:solidFill>
@@ -6786,7 +4155,7 @@
               </a:rPr>
               <a:t>returns</a:t>
             </a:r>
-            <a:endParaRPr lang="en-US" sz="1120" dirty="0"/>
+            <a:endParaRPr lang="en-US" sz="1120"/>
           </a:p>
         </p:txBody>
       </p:sp>
@@ -6817,7 +4186,7 @@
               <a:buNone/>
             </a:pPr>
             <a:r>
-              <a:rPr lang="en-US" sz="1200" dirty="0">
+              <a:rPr lang="en-US" sz="1200">
                 <a:solidFill>
                   <a:srgbClr val="DCFCE7"/>
                 </a:solidFill>
@@ -6827,14 +4196,14 @@
               </a:rPr>
               <a:t>curl -w "Total time: %{time_total} seconds"</a:t>
             </a:r>
-            <a:endParaRPr lang="en-US" sz="1200" dirty="0"/>
+            <a:endParaRPr lang="en-US" sz="1200"/>
           </a:p>
           <a:p>
             <a:pPr marL="0" indent="0">
               <a:buNone/>
             </a:pPr>
             <a:r>
-              <a:rPr lang="en-US" sz="1200" dirty="0">
+              <a:rPr lang="en-US" sz="1200">
                 <a:solidFill>
                   <a:srgbClr val="DCFCE7"/>
                 </a:solidFill>
@@ -6844,7 +4213,7 @@
               </a:rPr>
               <a:t>https://httpbin.org/get</a:t>
             </a:r>
-            <a:endParaRPr lang="en-US" sz="1200" dirty="0"/>
+            <a:endParaRPr lang="en-US" sz="1200"/>
           </a:p>
         </p:txBody>
       </p:sp>
@@ -6875,14 +4244,14 @@
               <a:buNone/>
             </a:pPr>
             <a:r>
-              <a:rPr lang="en-US" sz="1100" b="1" dirty="0">
+              <a:rPr lang="en-US" sz="1100" b="1">
                 <a:solidFill>
                   <a:srgbClr val="64748B"/>
                 </a:solidFill>
               </a:rPr>
               <a:t>Measured cloud latency</a:t>
             </a:r>
-            <a:endParaRPr lang="en-US" sz="1100" dirty="0"/>
+            <a:endParaRPr lang="en-US" sz="1100"/>
           </a:p>
         </p:txBody>
       </p:sp>
@@ -6913,7 +4282,7 @@
               <a:buNone/>
             </a:pPr>
             <a:r>
-              <a:rPr lang="en-US" sz="2800" b="1" dirty="0">
+              <a:rPr lang="en-US" sz="2800" b="1">
                 <a:solidFill>
                   <a:srgbClr val="F59E0B"/>
                 </a:solidFill>
@@ -6923,20 +4292,20 @@
               </a:rPr>
               <a:t>510 ms</a:t>
             </a:r>
-            <a:endParaRPr lang="en-US" sz="2800" dirty="0"/>
-          </a:p>
-        </p:txBody>
-      </p:sp>
-      <p:sp>
-        <p:nvSpPr>
-          <p:cNvPr id="23" name="Text 21"/>
-          <p:cNvSpPr/>
-          <p:nvPr/>
-        </p:nvSpPr>
-        <p:spPr>
-          <a:xfrm>
-            <a:off x="7040880" y="5029200"/>
-            <a:ext cx="2103120" cy="292608"/>
+            <a:endParaRPr lang="en-US" sz="2800"/>
+          </a:p>
+        </p:txBody>
+      </p:sp>
+      <p:sp>
+        <p:nvSpPr>
+          <p:cNvPr id="24" name="Text 22"/>
+          <p:cNvSpPr/>
+          <p:nvPr/>
+        </p:nvSpPr>
+        <p:spPr>
+          <a:xfrm>
+            <a:off x="9326880" y="4160520"/>
+            <a:ext cx="2194560" cy="228600"/>
           </a:xfrm>
           <a:prstGeom prst="rect">
             <a:avLst/>
@@ -6954,27 +4323,27 @@
               <a:buNone/>
             </a:pPr>
             <a:r>
-              <a:rPr lang="en-US" sz="1050" dirty="0">
+              <a:rPr lang="en-US" sz="1100" b="1">
                 <a:solidFill>
                   <a:srgbClr val="64748B"/>
                 </a:solidFill>
               </a:rPr>
-              <a:t>0.510079 seconds × 1000</a:t>
-            </a:r>
-            <a:endParaRPr lang="en-US" sz="1050" dirty="0"/>
-          </a:p>
-        </p:txBody>
-      </p:sp>
-      <p:sp>
-        <p:nvSpPr>
-          <p:cNvPr id="24" name="Text 22"/>
-          <p:cNvSpPr/>
-          <p:nvPr/>
-        </p:nvSpPr>
-        <p:spPr>
-          <a:xfrm>
-            <a:off x="9326880" y="4160520"/>
-            <a:ext cx="2194560" cy="228600"/>
+              <a:t>Worst shared network result</a:t>
+            </a:r>
+            <a:endParaRPr lang="en-US" sz="1100"/>
+          </a:p>
+        </p:txBody>
+      </p:sp>
+      <p:sp>
+        <p:nvSpPr>
+          <p:cNvPr id="25" name="Text 23"/>
+          <p:cNvSpPr/>
+          <p:nvPr/>
+        </p:nvSpPr>
+        <p:spPr>
+          <a:xfrm>
+            <a:off x="9326880" y="4480560"/>
+            <a:ext cx="2194560" cy="512064"/>
           </a:xfrm>
           <a:prstGeom prst="rect">
             <a:avLst/>
@@ -6992,27 +4361,30 @@
               <a:buNone/>
             </a:pPr>
             <a:r>
-              <a:rPr lang="en-US" sz="1100" b="1" dirty="0">
-                <a:solidFill>
-                  <a:srgbClr val="64748B"/>
-                </a:solidFill>
-              </a:rPr>
-              <a:t>Worst shared network result</a:t>
-            </a:r>
-            <a:endParaRPr lang="en-US" sz="1100" dirty="0"/>
-          </a:p>
-        </p:txBody>
-      </p:sp>
-      <p:sp>
-        <p:nvSpPr>
-          <p:cNvPr id="25" name="Text 23"/>
-          <p:cNvSpPr/>
-          <p:nvPr/>
-        </p:nvSpPr>
-        <p:spPr>
-          <a:xfrm>
-            <a:off x="9326880" y="4480560"/>
-            <a:ext cx="2194560" cy="512064"/>
+              <a:rPr lang="en-US" sz="2800" b="1">
+                <a:solidFill>
+                  <a:srgbClr val="EF4444"/>
+                </a:solidFill>
+                <a:latin typeface="Aptos Display" pitchFamily="34" charset="0"/>
+                <a:ea typeface="Aptos Display" pitchFamily="34" charset="-122"/>
+                <a:cs typeface="Aptos Display" pitchFamily="34" charset="-120"/>
+              </a:rPr>
+              <a:t>2170 ms</a:t>
+            </a:r>
+            <a:endParaRPr lang="en-US" sz="2800"/>
+          </a:p>
+        </p:txBody>
+      </p:sp>
+      <p:sp>
+        <p:nvSpPr>
+          <p:cNvPr id="26" name="Text 24"/>
+          <p:cNvSpPr/>
+          <p:nvPr/>
+        </p:nvSpPr>
+        <p:spPr>
+          <a:xfrm>
+            <a:off x="9436018" y="5029200"/>
+            <a:ext cx="2194560" cy="292608"/>
           </a:xfrm>
           <a:prstGeom prst="rect">
             <a:avLst/>
@@ -7030,55 +4402,14 @@
               <a:buNone/>
             </a:pPr>
             <a:r>
-              <a:rPr lang="en-US" sz="2800" b="1" dirty="0">
-                <a:solidFill>
-                  <a:srgbClr val="EF4444"/>
-                </a:solidFill>
-                <a:latin typeface="Aptos Display" pitchFamily="34" charset="0"/>
-                <a:ea typeface="Aptos Display" pitchFamily="34" charset="-122"/>
-                <a:cs typeface="Aptos Display" pitchFamily="34" charset="-120"/>
-              </a:rPr>
-              <a:t>2170 ms</a:t>
-            </a:r>
-            <a:endParaRPr lang="en-US" sz="2800" dirty="0"/>
-          </a:p>
-        </p:txBody>
-      </p:sp>
-      <p:sp>
-        <p:nvSpPr>
-          <p:cNvPr id="26" name="Text 24"/>
-          <p:cNvSpPr/>
-          <p:nvPr/>
-        </p:nvSpPr>
-        <p:spPr>
-          <a:xfrm>
-            <a:off x="9326880" y="5029200"/>
-            <a:ext cx="2194560" cy="292608"/>
-          </a:xfrm>
-          <a:prstGeom prst="rect">
-            <a:avLst/>
-          </a:prstGeom>
-          <a:noFill/>
-          <a:ln/>
-        </p:spPr>
-        <p:txBody>
-          <a:bodyPr wrap="square" lIns="0" tIns="0" rIns="0" bIns="0" rtlCol="0" anchor="ctr">
-            <a:normAutofit/>
-          </a:bodyPr>
-          <a:lstStyle/>
-          <a:p>
-            <a:pPr marL="0" indent="0">
-              <a:buNone/>
-            </a:pPr>
-            <a:r>
-              <a:rPr lang="en-US" sz="1050" dirty="0">
+              <a:rPr lang="en-US" sz="1050">
                 <a:solidFill>
                   <a:srgbClr val="64748B"/>
                 </a:solidFill>
               </a:rPr>
               <a:t>HSHL central Wi‑Fi</a:t>
             </a:r>
-            <a:endParaRPr lang="en-US" sz="1050" dirty="0"/>
+            <a:endParaRPr lang="en-US" sz="1050"/>
           </a:p>
         </p:txBody>
       </p:sp>
@@ -7096,8 +4427,8 @@
         </p:nvSpPr>
         <p:spPr>
           <a:xfrm>
-            <a:off x="670560" y="3543302"/>
-            <a:ext cx="3517982" cy="2618231"/>
+            <a:off x="670560" y="3766835"/>
+            <a:ext cx="3517982" cy="2394698"/>
           </a:xfrm>
           <a:prstGeom prst="roundRect">
             <a:avLst>
@@ -7138,7 +4469,7 @@
         </p:nvSpPr>
         <p:spPr>
           <a:xfrm>
-            <a:off x="1259905" y="3950273"/>
+            <a:off x="1119939" y="3882576"/>
             <a:ext cx="2204294" cy="368367"/>
           </a:xfrm>
           <a:prstGeom prst="rect">
@@ -7153,7 +4484,7 @@
           <a:p>
             <a:pPr algn="ctr"/>
             <a:r>
-              <a:rPr lang="en-US" sz="1333" b="1" kern="0" spc="267" dirty="0">
+              <a:rPr lang="en-US" sz="1333" b="1" kern="0" spc="267">
                 <a:solidFill>
                   <a:srgbClr val="047857"/>
                 </a:solidFill>
@@ -7194,7 +4525,7 @@
           <a:lstStyle/>
           <a:p>
             <a:r>
-              <a:rPr lang="en-US" sz="1200" b="1" dirty="0">
+              <a:rPr lang="en-US" sz="1200" b="1">
                 <a:solidFill>
                   <a:srgbClr val="1E293B"/>
                 </a:solidFill>
@@ -7205,7 +4536,7 @@
               <a:t>Method: </a:t>
             </a:r>
             <a:r>
-              <a:rPr lang="en-US" sz="1200" dirty="0">
+              <a:rPr lang="en-US" sz="1200">
                 <a:solidFill>
                   <a:srgbClr val="334155"/>
                 </a:solidFill>
@@ -7215,11 +4546,11 @@
               </a:rPr>
               <a:t>HTTP request via public internet</a:t>
             </a:r>
-            <a:endParaRPr lang="en-US" sz="1200" dirty="0"/>
-          </a:p>
-          <a:p>
-            <a:r>
-              <a:rPr lang="en-US" sz="1200" b="1" dirty="0">
+            <a:endParaRPr lang="en-US" sz="1200"/>
+          </a:p>
+          <a:p>
+            <a:r>
+              <a:rPr lang="en-US" sz="1200" b="1">
                 <a:solidFill>
                   <a:srgbClr val="1E293B"/>
                 </a:solidFill>
@@ -7229,11 +4560,11 @@
               </a:rPr>
               <a:t>Target: </a:t>
             </a:r>
-            <a:endParaRPr lang="en-US" sz="1200" dirty="0"/>
-          </a:p>
-          <a:p>
-            <a:r>
-              <a:rPr lang="en-US" sz="1200" dirty="0">
+            <a:endParaRPr lang="en-US" sz="1200"/>
+          </a:p>
+          <a:p>
+            <a:r>
+              <a:rPr lang="en-US" sz="1200">
                 <a:solidFill>
                   <a:srgbClr val="334155"/>
                 </a:solidFill>
@@ -7243,11 +4574,11 @@
               </a:rPr>
               <a:t>https://httpbin.org/get</a:t>
             </a:r>
-            <a:endParaRPr lang="en-US" sz="1200" dirty="0"/>
-          </a:p>
-          <a:p>
-            <a:r>
-              <a:rPr lang="en-US" sz="1200" b="1" dirty="0">
+            <a:endParaRPr lang="en-US" sz="1200"/>
+          </a:p>
+          <a:p>
+            <a:r>
+              <a:rPr lang="en-US" sz="1200" b="1">
                 <a:solidFill>
                   <a:srgbClr val="1E293B"/>
                 </a:solidFill>
@@ -7257,7 +4588,7 @@
               </a:rPr>
               <a:t>Command:</a:t>
             </a:r>
-            <a:endParaRPr lang="en-US" sz="1200" dirty="0"/>
+            <a:endParaRPr lang="en-US" sz="1200"/>
           </a:p>
         </p:txBody>
       </p:sp>
@@ -7324,7 +4655,7 @@
           <a:lstStyle/>
           <a:p>
             <a:r>
-              <a:rPr lang="en-US" sz="1200" dirty="0">
+              <a:rPr lang="en-US" sz="1200">
                 <a:solidFill>
                   <a:srgbClr val="7DD8EC"/>
                 </a:solidFill>
@@ -7335,7 +4666,7 @@
               <a:t>curl -w "%{</a:t>
             </a:r>
             <a:r>
-              <a:rPr lang="en-US" sz="1200" dirty="0" err="1">
+              <a:rPr lang="en-US" sz="1200" err="1">
                 <a:solidFill>
                   <a:srgbClr val="7DD8EC"/>
                 </a:solidFill>
@@ -7346,7 +4677,7 @@
               <a:t>time_total</a:t>
             </a:r>
             <a:r>
-              <a:rPr lang="en-US" sz="1200" dirty="0">
+              <a:rPr lang="en-US" sz="1200">
                 <a:solidFill>
                   <a:srgbClr val="7DD8EC"/>
                 </a:solidFill>
@@ -7356,11 +4687,11 @@
               </a:rPr>
               <a:t>}s"</a:t>
             </a:r>
-            <a:endParaRPr lang="en-US" sz="1200" dirty="0"/>
-          </a:p>
-          <a:p>
-            <a:r>
-              <a:rPr lang="en-US" sz="1200" dirty="0">
+            <a:endParaRPr lang="en-US" sz="1200"/>
+          </a:p>
+          <a:p>
+            <a:r>
+              <a:rPr lang="en-US" sz="1200">
                 <a:solidFill>
                   <a:srgbClr val="7DD8EC"/>
                 </a:solidFill>
@@ -7370,7 +4701,7 @@
               </a:rPr>
               <a:t>https://httpbin.org/get</a:t>
             </a:r>
-            <a:endParaRPr lang="en-US" sz="1200" dirty="0"/>
+            <a:endParaRPr lang="en-US" sz="1200"/>
           </a:p>
         </p:txBody>
       </p:sp>
@@ -7402,7 +4733,7 @@
           <a:lstStyle/>
           <a:p>
             <a:r>
-              <a:rPr lang="en-US" sz="1200" b="1" dirty="0">
+              <a:rPr lang="en-US" sz="1200" b="1">
                 <a:solidFill>
                   <a:srgbClr val="92400E"/>
                 </a:solidFill>
@@ -7413,7 +4744,7 @@
               <a:t>Result: </a:t>
             </a:r>
             <a:r>
-              <a:rPr lang="en-US" sz="1200" dirty="0">
+              <a:rPr lang="en-US" sz="1200">
                 <a:solidFill>
                   <a:srgbClr val="334155"/>
                 </a:solidFill>
@@ -7424,7 +4755,7 @@
               <a:t>0.510079 s = </a:t>
             </a:r>
             <a:r>
-              <a:rPr lang="en-US" sz="1200" b="1" dirty="0">
+              <a:rPr lang="en-US" sz="1200" b="1">
                 <a:solidFill>
                   <a:srgbClr val="92400E"/>
                 </a:solidFill>
@@ -7435,7 +4766,7 @@
               <a:t>510 </a:t>
             </a:r>
             <a:r>
-              <a:rPr lang="en-US" sz="1200" b="1" dirty="0" err="1">
+              <a:rPr lang="en-US" sz="1200" b="1" err="1">
                 <a:solidFill>
                   <a:srgbClr val="92400E"/>
                 </a:solidFill>
@@ -7446,7 +4777,7 @@
               <a:t>ms</a:t>
             </a:r>
             <a:r>
-              <a:rPr lang="en-US" sz="1200" dirty="0">
+              <a:rPr lang="en-US" sz="1200">
                 <a:solidFill>
                   <a:srgbClr val="334155"/>
                 </a:solidFill>
@@ -7456,7 +4787,200 @@
               </a:rPr>
               <a:t> internet round-trip.</a:t>
             </a:r>
-            <a:endParaRPr lang="en-US" sz="1200" dirty="0"/>
+            <a:endParaRPr lang="en-US" sz="1200"/>
+          </a:p>
+        </p:txBody>
+      </p:sp>
+      <p:sp>
+        <p:nvSpPr>
+          <p:cNvPr id="35" name="Text 26">
+            <a:extLst>
+              <a:ext uri="{FF2B5EF4-FFF2-40B4-BE49-F238E27FC236}">
+                <a16:creationId xmlns:a16="http://schemas.microsoft.com/office/drawing/2014/main" id="{DCC7BCEA-7C16-450C-0713-96C5488C24AF}"/>
+              </a:ext>
+            </a:extLst>
+          </p:cNvPr>
+          <p:cNvSpPr/>
+          <p:nvPr/>
+        </p:nvSpPr>
+        <p:spPr>
+          <a:xfrm>
+            <a:off x="7040880" y="5030183"/>
+            <a:ext cx="1737360" cy="292608"/>
+          </a:xfrm>
+          <a:prstGeom prst="rect">
+            <a:avLst/>
+          </a:prstGeom>
+          <a:noFill/>
+          <a:ln/>
+        </p:spPr>
+        <p:txBody>
+          <a:bodyPr wrap="square" lIns="0" tIns="0" rIns="0" bIns="0" rtlCol="0" anchor="ctr">
+            <a:normAutofit/>
+          </a:bodyPr>
+          <a:lstStyle/>
+          <a:p>
+            <a:pPr marL="0" indent="0">
+              <a:buNone/>
+            </a:pPr>
+            <a:r>
+              <a:rPr lang="en-US" sz="1050">
+                <a:solidFill>
+                  <a:srgbClr val="64748B"/>
+                </a:solidFill>
+              </a:rPr>
+              <a:t>Paderborn home Wi‑Fi</a:t>
+            </a:r>
+            <a:endParaRPr lang="en-US" sz="1050"/>
+          </a:p>
+        </p:txBody>
+      </p:sp>
+      <p:sp>
+        <p:nvSpPr>
+          <p:cNvPr id="36" name="Shape 11">
+            <a:extLst>
+              <a:ext uri="{FF2B5EF4-FFF2-40B4-BE49-F238E27FC236}">
+                <a16:creationId xmlns:a16="http://schemas.microsoft.com/office/drawing/2014/main" id="{D746AE5D-CABF-7C5A-39DD-214BBDEBFA28}"/>
+              </a:ext>
+            </a:extLst>
+          </p:cNvPr>
+          <p:cNvSpPr/>
+          <p:nvPr/>
+        </p:nvSpPr>
+        <p:spPr>
+          <a:xfrm>
+            <a:off x="7993714" y="2042703"/>
+            <a:ext cx="1554480" cy="1097280"/>
+          </a:xfrm>
+          <a:prstGeom prst="roundRect">
+            <a:avLst>
+              <a:gd name="adj" fmla="val 6667"/>
+            </a:avLst>
+          </a:prstGeom>
+          <a:solidFill>
+            <a:srgbClr val="FFEDD5"/>
+          </a:solidFill>
+          <a:ln w="15240">
+            <a:solidFill>
+              <a:srgbClr val="F59E0B"/>
+            </a:solidFill>
+            <a:prstDash val="solid"/>
+          </a:ln>
+          <a:effectLst>
+            <a:outerShdw blurRad="19050" dist="12700" dir="2700000" algn="bl" rotWithShape="0">
+              <a:srgbClr val="000000">
+                <a:alpha val="10000"/>
+              </a:srgbClr>
+            </a:outerShdw>
+          </a:effectLst>
+        </p:spPr>
+        <p:txBody>
+          <a:bodyPr/>
+          <a:lstStyle/>
+          <a:p>
+            <a:endParaRPr lang="en-DE"/>
+          </a:p>
+        </p:txBody>
+      </p:sp>
+      <p:sp>
+        <p:nvSpPr>
+          <p:cNvPr id="37" name="Text 12">
+            <a:extLst>
+              <a:ext uri="{FF2B5EF4-FFF2-40B4-BE49-F238E27FC236}">
+                <a16:creationId xmlns:a16="http://schemas.microsoft.com/office/drawing/2014/main" id="{428937AF-3B7A-668E-7C56-2239A24C261A}"/>
+              </a:ext>
+            </a:extLst>
+          </p:cNvPr>
+          <p:cNvSpPr/>
+          <p:nvPr/>
+        </p:nvSpPr>
+        <p:spPr>
+          <a:xfrm>
+            <a:off x="8103442" y="2170719"/>
+            <a:ext cx="1335024" cy="841248"/>
+          </a:xfrm>
+          <a:prstGeom prst="rect">
+            <a:avLst/>
+          </a:prstGeom>
+          <a:noFill/>
+          <a:ln/>
+        </p:spPr>
+        <p:txBody>
+          <a:bodyPr wrap="square" lIns="0" tIns="0" rIns="0" bIns="0" rtlCol="0" anchor="ctr">
+            <a:normAutofit/>
+          </a:bodyPr>
+          <a:lstStyle/>
+          <a:p>
+            <a:pPr marL="0" indent="0" algn="ctr">
+              <a:buNone/>
+            </a:pPr>
+            <a:r>
+              <a:rPr lang="en-US" sz="1150" b="1">
+                <a:solidFill>
+                  <a:srgbClr val="0B172A"/>
+                </a:solidFill>
+                <a:latin typeface="Aptos" pitchFamily="34" charset="0"/>
+                <a:ea typeface="Aptos" pitchFamily="34" charset="-122"/>
+                <a:cs typeface="Aptos" pitchFamily="34" charset="-120"/>
+              </a:rPr>
+              <a:t>Internet</a:t>
+            </a:r>
+            <a:endParaRPr lang="en-US" sz="1150"/>
+          </a:p>
+          <a:p>
+            <a:pPr marL="0" indent="0" algn="ctr">
+              <a:buNone/>
+            </a:pPr>
+            <a:r>
+              <a:rPr lang="en-US" sz="1150" b="1">
+                <a:solidFill>
+                  <a:srgbClr val="0B172A"/>
+                </a:solidFill>
+                <a:latin typeface="Aptos" pitchFamily="34" charset="0"/>
+                <a:ea typeface="Aptos" pitchFamily="34" charset="-122"/>
+                <a:cs typeface="Aptos" pitchFamily="34" charset="-120"/>
+              </a:rPr>
+              <a:t>route</a:t>
+            </a:r>
+            <a:endParaRPr lang="en-US" sz="1150"/>
+          </a:p>
+        </p:txBody>
+      </p:sp>
+      <p:sp>
+        <p:nvSpPr>
+          <p:cNvPr id="38" name="Shape 7">
+            <a:extLst>
+              <a:ext uri="{FF2B5EF4-FFF2-40B4-BE49-F238E27FC236}">
+                <a16:creationId xmlns:a16="http://schemas.microsoft.com/office/drawing/2014/main" id="{799F995C-BCBC-AC77-B8E7-D4CE7448141C}"/>
+              </a:ext>
+            </a:extLst>
+          </p:cNvPr>
+          <p:cNvSpPr/>
+          <p:nvPr/>
+        </p:nvSpPr>
+        <p:spPr>
+          <a:xfrm>
+            <a:off x="7090041" y="2591783"/>
+            <a:ext cx="903673" cy="0"/>
+          </a:xfrm>
+          <a:prstGeom prst="line">
+            <a:avLst/>
+          </a:prstGeom>
+          <a:noFill/>
+          <a:ln w="30480">
+            <a:solidFill>
+              <a:srgbClr val="F59E0B"/>
+            </a:solidFill>
+            <a:prstDash val="solid"/>
+            <a:headEnd type="none"/>
+            <a:tailEnd type="triangle"/>
+          </a:ln>
+        </p:spPr>
+        <p:txBody>
+          <a:bodyPr/>
+          <a:lstStyle/>
+          <a:p>
+            <a:endParaRPr lang="en-DE"/>
           </a:p>
         </p:txBody>
       </p:sp>
@@ -7468,7 +4992,7 @@
 </p:sld>
 </file>
 
-<file path=ppt/slides/slide5.xml><?xml version="1.0" encoding="utf-8"?>
+<file path=ppt/slides/slide4.xml><?xml version="1.0" encoding="utf-8"?>
 <p:sld xmlns:a="http://schemas.openxmlformats.org/drawingml/2006/main" xmlns:r="http://schemas.openxmlformats.org/officeDocument/2006/relationships" xmlns:p="http://schemas.openxmlformats.org/presentationml/2006/main">
   <p:cSld name="Slide 5">
     <p:bg>
@@ -7588,7 +5112,7 @@
               <a:buNone/>
             </a:pPr>
             <a:r>
-              <a:rPr lang="en-US" sz="2800" b="1" dirty="0">
+              <a:rPr lang="en-US" sz="2800" b="1">
                 <a:solidFill>
                   <a:srgbClr val="0B172A"/>
                 </a:solidFill>
@@ -7596,9 +5120,9 @@
                 <a:ea typeface="Aptos Display" pitchFamily="34" charset="-122"/>
                 <a:cs typeface="Aptos Display" pitchFamily="34" charset="-120"/>
               </a:rPr>
-              <a:t>Measured results: edge was consistently lower</a:t>
-            </a:r>
-            <a:endParaRPr lang="en-US" sz="2800" dirty="0"/>
+              <a:t>Measured Results: Edge vs Cloud</a:t>
+            </a:r>
+            <a:endParaRPr lang="en-US" sz="2800"/>
           </a:p>
         </p:txBody>
       </p:sp>
@@ -7628,8 +5152,36 @@
             <a:pPr marL="0" indent="0">
               <a:buNone/>
             </a:pPr>
-            <a:r>
-              <a:rPr lang="en-US" sz="1250" dirty="0">
+            <a:endParaRPr lang="en-US" sz="1250"/>
+          </a:p>
+        </p:txBody>
+      </p:sp>
+      <p:sp>
+        <p:nvSpPr>
+          <p:cNvPr id="7" name="Text 5"/>
+          <p:cNvSpPr/>
+          <p:nvPr/>
+        </p:nvSpPr>
+        <p:spPr>
+          <a:xfrm>
+            <a:off x="11384280" y="6446520"/>
+            <a:ext cx="320040" cy="228600"/>
+          </a:xfrm>
+          <a:prstGeom prst="rect">
+            <a:avLst/>
+          </a:prstGeom>
+          <a:noFill/>
+          <a:ln/>
+        </p:spPr>
+        <p:txBody>
+          <a:bodyPr wrap="square" lIns="0" tIns="0" rIns="0" bIns="0" rtlCol="0" anchor="ctr"/>
+          <a:lstStyle/>
+          <a:p>
+            <a:pPr marL="0" indent="0" algn="r">
+              <a:buNone/>
+            </a:pPr>
+            <a:r>
+              <a:rPr lang="en-US" sz="850" b="1">
                 <a:solidFill>
                   <a:srgbClr val="64748B"/>
                 </a:solidFill>
@@ -7637,87 +5189,9 @@
                 <a:ea typeface="Aptos" pitchFamily="34" charset="-122"/>
                 <a:cs typeface="Aptos" pitchFamily="34" charset="-120"/>
               </a:rPr>
-              <a:t>Both environments show that processing closer to the device reduces response time.</a:t>
-            </a:r>
-            <a:endParaRPr lang="en-US" sz="1250" dirty="0"/>
-          </a:p>
-        </p:txBody>
-      </p:sp>
-      <p:sp>
-        <p:nvSpPr>
-          <p:cNvPr id="6" name="Text 4"/>
-          <p:cNvSpPr/>
-          <p:nvPr/>
-        </p:nvSpPr>
-        <p:spPr>
-          <a:xfrm>
-            <a:off x="502920" y="6492240"/>
-            <a:ext cx="7772400" cy="201168"/>
-          </a:xfrm>
-          <a:prstGeom prst="rect">
-            <a:avLst/>
-          </a:prstGeom>
-          <a:noFill/>
-          <a:ln/>
-        </p:spPr>
-        <p:txBody>
-          <a:bodyPr wrap="square" lIns="0" tIns="0" rIns="0" bIns="0" rtlCol="0" anchor="ctr"/>
-          <a:lstStyle/>
-          <a:p>
-            <a:pPr marL="0" indent="0">
-              <a:buNone/>
-            </a:pPr>
-            <a:r>
-              <a:rPr lang="en-US" sz="850" dirty="0">
-                <a:solidFill>
-                  <a:srgbClr val="64748B"/>
-                </a:solidFill>
-                <a:latin typeface="Aptos" pitchFamily="34" charset="0"/>
-                <a:ea typeface="Aptos" pitchFamily="34" charset="-122"/>
-                <a:cs typeface="Aptos" pitchFamily="34" charset="-120"/>
-              </a:rPr>
-              <a:t>Edge Computing in Industrial Communication • Sections VII–IX</a:t>
-            </a:r>
-            <a:endParaRPr lang="en-US" sz="850" dirty="0"/>
-          </a:p>
-        </p:txBody>
-      </p:sp>
-      <p:sp>
-        <p:nvSpPr>
-          <p:cNvPr id="7" name="Text 5"/>
-          <p:cNvSpPr/>
-          <p:nvPr/>
-        </p:nvSpPr>
-        <p:spPr>
-          <a:xfrm>
-            <a:off x="11384280" y="6446520"/>
-            <a:ext cx="320040" cy="228600"/>
-          </a:xfrm>
-          <a:prstGeom prst="rect">
-            <a:avLst/>
-          </a:prstGeom>
-          <a:noFill/>
-          <a:ln/>
-        </p:spPr>
-        <p:txBody>
-          <a:bodyPr wrap="square" lIns="0" tIns="0" rIns="0" bIns="0" rtlCol="0" anchor="ctr"/>
-          <a:lstStyle/>
-          <a:p>
-            <a:pPr marL="0" indent="0" algn="r">
-              <a:buNone/>
-            </a:pPr>
-            <a:r>
-              <a:rPr lang="en-US" sz="850" b="1" dirty="0">
-                <a:solidFill>
-                  <a:srgbClr val="64748B"/>
-                </a:solidFill>
-                <a:latin typeface="Aptos" pitchFamily="34" charset="0"/>
-                <a:ea typeface="Aptos" pitchFamily="34" charset="-122"/>
-                <a:cs typeface="Aptos" pitchFamily="34" charset="-120"/>
-              </a:rPr>
               <a:t>05</a:t>
             </a:r>
-            <a:endParaRPr lang="en-US" sz="850" dirty="0"/>
+            <a:endParaRPr lang="en-US" sz="850"/>
           </a:p>
         </p:txBody>
       </p:sp>
@@ -7768,14 +5242,14 @@
               <a:buNone/>
             </a:pPr>
             <a:r>
-              <a:rPr lang="en-US" sz="1080" dirty="0">
+              <a:rPr lang="en-US" sz="1080">
                 <a:solidFill>
                   <a:srgbClr val="64748B"/>
                 </a:solidFill>
               </a:rPr>
               <a:t>Latency in milliseconds (lower is better)</a:t>
             </a:r>
-            <a:endParaRPr lang="en-US" sz="1080" dirty="0"/>
+            <a:endParaRPr lang="en-US" sz="1080"/>
           </a:p>
         </p:txBody>
       </p:sp>
@@ -7836,14 +5310,14 @@
               <a:buNone/>
             </a:pPr>
             <a:r>
-              <a:rPr lang="en-US" sz="1100" b="1" dirty="0">
+              <a:rPr lang="en-US" sz="1100" b="1">
                 <a:solidFill>
                   <a:srgbClr val="64748B"/>
                 </a:solidFill>
               </a:rPr>
               <a:t>Home Wi‑Fi</a:t>
             </a:r>
-            <a:endParaRPr lang="en-US" sz="1100" dirty="0"/>
+            <a:endParaRPr lang="en-US" sz="1100"/>
           </a:p>
         </p:txBody>
       </p:sp>
@@ -7874,7 +5348,7 @@
               <a:buNone/>
             </a:pPr>
             <a:r>
-              <a:rPr lang="en-US" sz="2800" b="1" dirty="0">
+              <a:rPr lang="en-US" sz="2800" b="1">
                 <a:solidFill>
                   <a:srgbClr val="10B981"/>
                 </a:solidFill>
@@ -7884,7 +5358,7 @@
               </a:rPr>
               <a:t>95 vs 510 ms</a:t>
             </a:r>
-            <a:endParaRPr lang="en-US" sz="2800" dirty="0"/>
+            <a:endParaRPr lang="en-US" sz="2800"/>
           </a:p>
         </p:txBody>
       </p:sp>
@@ -7915,14 +5389,14 @@
               <a:buNone/>
             </a:pPr>
             <a:r>
-              <a:rPr lang="en-US" sz="1050" dirty="0">
+              <a:rPr lang="en-US" sz="1050">
                 <a:solidFill>
                   <a:srgbClr val="64748B"/>
                 </a:solidFill>
               </a:rPr>
               <a:t>Cloud took about 5.4× longer</a:t>
             </a:r>
-            <a:endParaRPr lang="en-US" sz="1050" dirty="0"/>
+            <a:endParaRPr lang="en-US" sz="1050"/>
           </a:p>
         </p:txBody>
       </p:sp>
@@ -7953,14 +5427,14 @@
               <a:buNone/>
             </a:pPr>
             <a:r>
-              <a:rPr lang="en-US" sz="1100" b="1" dirty="0">
+              <a:rPr lang="en-US" sz="1100" b="1">
                 <a:solidFill>
                   <a:srgbClr val="64748B"/>
                 </a:solidFill>
               </a:rPr>
               <a:t>HSHL Wi‑Fi</a:t>
             </a:r>
-            <a:endParaRPr lang="en-US" sz="1100" dirty="0"/>
+            <a:endParaRPr lang="en-US" sz="1100"/>
           </a:p>
         </p:txBody>
       </p:sp>
@@ -7991,7 +5465,7 @@
               <a:buNone/>
             </a:pPr>
             <a:r>
-              <a:rPr lang="en-US" sz="2800" b="1" dirty="0">
+              <a:rPr lang="en-US" sz="2800" b="1">
                 <a:solidFill>
                   <a:srgbClr val="F59E0B"/>
                 </a:solidFill>
@@ -8001,7 +5475,7 @@
               </a:rPr>
               <a:t>422 vs 2170 ms</a:t>
             </a:r>
-            <a:endParaRPr lang="en-US" sz="2800" dirty="0"/>
+            <a:endParaRPr lang="en-US" sz="2800"/>
           </a:p>
         </p:txBody>
       </p:sp>
@@ -8032,14 +5506,14 @@
               <a:buNone/>
             </a:pPr>
             <a:r>
-              <a:rPr lang="en-US" sz="1050" dirty="0">
+              <a:rPr lang="en-US" sz="1050">
                 <a:solidFill>
                   <a:srgbClr val="64748B"/>
                 </a:solidFill>
               </a:rPr>
               <a:t>Cloud took about 5.1× longer</a:t>
             </a:r>
-            <a:endParaRPr lang="en-US" sz="1050" dirty="0"/>
+            <a:endParaRPr lang="en-US" sz="1050"/>
           </a:p>
         </p:txBody>
       </p:sp>
@@ -8051,1736 +5525,7 @@
 </p:sld>
 </file>
 
-<file path=ppt/slides/slide6.xml><?xml version="1.0" encoding="utf-8"?>
-<p:sld xmlns:a="http://schemas.openxmlformats.org/drawingml/2006/main" xmlns:r="http://schemas.openxmlformats.org/officeDocument/2006/relationships" xmlns:p="http://schemas.openxmlformats.org/presentationml/2006/main">
-  <p:cSld name="Slide 6">
-    <p:bg>
-      <p:bgPr>
-        <a:solidFill>
-          <a:srgbClr val="F8FAFC"/>
-        </a:solidFill>
-        <a:effectLst/>
-      </p:bgPr>
-    </p:bg>
-    <p:spTree>
-      <p:nvGrpSpPr>
-        <p:cNvPr id="1" name=""/>
-        <p:cNvGrpSpPr/>
-        <p:nvPr/>
-      </p:nvGrpSpPr>
-      <p:grpSpPr>
-        <a:xfrm>
-          <a:off x="0" y="0"/>
-          <a:ext cx="0" cy="0"/>
-          <a:chOff x="0" y="0"/>
-          <a:chExt cx="0" cy="0"/>
-        </a:xfrm>
-      </p:grpSpPr>
-      <p:sp>
-        <p:nvSpPr>
-          <p:cNvPr id="2" name="Shape 0"/>
-          <p:cNvSpPr/>
-          <p:nvPr/>
-        </p:nvSpPr>
-        <p:spPr>
-          <a:xfrm>
-            <a:off x="0" y="0"/>
-            <a:ext cx="12191695" cy="6858000"/>
-          </a:xfrm>
-          <a:prstGeom prst="rect">
-            <a:avLst/>
-          </a:prstGeom>
-          <a:solidFill>
-            <a:srgbClr val="F8FAFC"/>
-          </a:solidFill>
-          <a:ln w="12700">
-            <a:solidFill>
-              <a:srgbClr val="F8FAFC">
-                <a:alpha val="0"/>
-              </a:srgbClr>
-            </a:solidFill>
-            <a:prstDash val="solid"/>
-          </a:ln>
-        </p:spPr>
-        <p:txBody>
-          <a:bodyPr/>
-          <a:lstStyle/>
-          <a:p>
-            <a:endParaRPr lang="en-DE"/>
-          </a:p>
-        </p:txBody>
-      </p:sp>
-      <p:sp>
-        <p:nvSpPr>
-          <p:cNvPr id="3" name="Shape 1"/>
-          <p:cNvSpPr/>
-          <p:nvPr/>
-        </p:nvSpPr>
-        <p:spPr>
-          <a:xfrm>
-            <a:off x="0" y="0"/>
-            <a:ext cx="128016" cy="6858000"/>
-          </a:xfrm>
-          <a:prstGeom prst="rect">
-            <a:avLst/>
-          </a:prstGeom>
-          <a:solidFill>
-            <a:srgbClr val="2563EB"/>
-          </a:solidFill>
-          <a:ln w="12700">
-            <a:solidFill>
-              <a:srgbClr val="2563EB">
-                <a:alpha val="0"/>
-              </a:srgbClr>
-            </a:solidFill>
-            <a:prstDash val="solid"/>
-          </a:ln>
-        </p:spPr>
-        <p:txBody>
-          <a:bodyPr/>
-          <a:lstStyle/>
-          <a:p>
-            <a:endParaRPr lang="en-DE"/>
-          </a:p>
-        </p:txBody>
-      </p:sp>
-      <p:sp>
-        <p:nvSpPr>
-          <p:cNvPr id="4" name="Text 2"/>
-          <p:cNvSpPr/>
-          <p:nvPr/>
-        </p:nvSpPr>
-        <p:spPr>
-          <a:xfrm>
-            <a:off x="502920" y="384048"/>
-            <a:ext cx="10881360" cy="438912"/>
-          </a:xfrm>
-          <a:prstGeom prst="rect">
-            <a:avLst/>
-          </a:prstGeom>
-          <a:noFill/>
-          <a:ln/>
-        </p:spPr>
-        <p:txBody>
-          <a:bodyPr wrap="square" lIns="0" tIns="0" rIns="0" bIns="0" rtlCol="0" anchor="ctr">
-            <a:normAutofit/>
-          </a:bodyPr>
-          <a:lstStyle/>
-          <a:p>
-            <a:pPr marL="0" indent="0">
-              <a:buNone/>
-            </a:pPr>
-            <a:r>
-              <a:rPr lang="en-US" sz="2800" b="1" dirty="0">
-                <a:solidFill>
-                  <a:srgbClr val="0B172A"/>
-                </a:solidFill>
-                <a:latin typeface="Aptos Display" pitchFamily="34" charset="0"/>
-                <a:ea typeface="Aptos Display" pitchFamily="34" charset="-122"/>
-                <a:cs typeface="Aptos Display" pitchFamily="34" charset="-120"/>
-              </a:rPr>
-              <a:t>Comparative analysis: speed advantage</a:t>
-            </a:r>
-            <a:endParaRPr lang="en-US" sz="2800" dirty="0"/>
-          </a:p>
-        </p:txBody>
-      </p:sp>
-      <p:sp>
-        <p:nvSpPr>
-          <p:cNvPr id="5" name="Text 3"/>
-          <p:cNvSpPr/>
-          <p:nvPr/>
-        </p:nvSpPr>
-        <p:spPr>
-          <a:xfrm>
-            <a:off x="530352" y="868680"/>
-            <a:ext cx="10241280" cy="274320"/>
-          </a:xfrm>
-          <a:prstGeom prst="rect">
-            <a:avLst/>
-          </a:prstGeom>
-          <a:noFill/>
-          <a:ln/>
-        </p:spPr>
-        <p:txBody>
-          <a:bodyPr wrap="square" lIns="0" tIns="0" rIns="0" bIns="0" rtlCol="0" anchor="ctr">
-            <a:normAutofit/>
-          </a:bodyPr>
-          <a:lstStyle/>
-          <a:p>
-            <a:pPr marL="0" indent="0">
-              <a:buNone/>
-            </a:pPr>
-            <a:r>
-              <a:rPr lang="en-US" sz="1250" dirty="0">
-                <a:solidFill>
-                  <a:srgbClr val="64748B"/>
-                </a:solidFill>
-                <a:latin typeface="Aptos" pitchFamily="34" charset="0"/>
-                <a:ea typeface="Aptos" pitchFamily="34" charset="-122"/>
-                <a:cs typeface="Aptos" pitchFamily="34" charset="-120"/>
-              </a:rPr>
-              <a:t>The closest comparison is the stable home Wi‑Fi test: local edge vs remote cloud.</a:t>
-            </a:r>
-            <a:endParaRPr lang="en-US" sz="1250" dirty="0"/>
-          </a:p>
-        </p:txBody>
-      </p:sp>
-      <p:sp>
-        <p:nvSpPr>
-          <p:cNvPr id="6" name="Text 4"/>
-          <p:cNvSpPr/>
-          <p:nvPr/>
-        </p:nvSpPr>
-        <p:spPr>
-          <a:xfrm>
-            <a:off x="502920" y="6492240"/>
-            <a:ext cx="7772400" cy="201168"/>
-          </a:xfrm>
-          <a:prstGeom prst="rect">
-            <a:avLst/>
-          </a:prstGeom>
-          <a:noFill/>
-          <a:ln/>
-        </p:spPr>
-        <p:txBody>
-          <a:bodyPr wrap="square" lIns="0" tIns="0" rIns="0" bIns="0" rtlCol="0" anchor="ctr"/>
-          <a:lstStyle/>
-          <a:p>
-            <a:pPr marL="0" indent="0">
-              <a:buNone/>
-            </a:pPr>
-            <a:r>
-              <a:rPr lang="en-US" sz="850" dirty="0">
-                <a:solidFill>
-                  <a:srgbClr val="64748B"/>
-                </a:solidFill>
-                <a:latin typeface="Aptos" pitchFamily="34" charset="0"/>
-                <a:ea typeface="Aptos" pitchFamily="34" charset="-122"/>
-                <a:cs typeface="Aptos" pitchFamily="34" charset="-120"/>
-              </a:rPr>
-              <a:t>Edge Computing in Industrial Communication • Sections VII–IX</a:t>
-            </a:r>
-            <a:endParaRPr lang="en-US" sz="850" dirty="0"/>
-          </a:p>
-        </p:txBody>
-      </p:sp>
-      <p:sp>
-        <p:nvSpPr>
-          <p:cNvPr id="7" name="Text 5"/>
-          <p:cNvSpPr/>
-          <p:nvPr/>
-        </p:nvSpPr>
-        <p:spPr>
-          <a:xfrm>
-            <a:off x="11384280" y="6446520"/>
-            <a:ext cx="320040" cy="228600"/>
-          </a:xfrm>
-          <a:prstGeom prst="rect">
-            <a:avLst/>
-          </a:prstGeom>
-          <a:noFill/>
-          <a:ln/>
-        </p:spPr>
-        <p:txBody>
-          <a:bodyPr wrap="square" lIns="0" tIns="0" rIns="0" bIns="0" rtlCol="0" anchor="ctr"/>
-          <a:lstStyle/>
-          <a:p>
-            <a:pPr marL="0" indent="0" algn="r">
-              <a:buNone/>
-            </a:pPr>
-            <a:r>
-              <a:rPr lang="en-US" sz="850" b="1" dirty="0">
-                <a:solidFill>
-                  <a:srgbClr val="64748B"/>
-                </a:solidFill>
-                <a:latin typeface="Aptos" pitchFamily="34" charset="0"/>
-                <a:ea typeface="Aptos" pitchFamily="34" charset="-122"/>
-                <a:cs typeface="Aptos" pitchFamily="34" charset="-120"/>
-              </a:rPr>
-              <a:t>06</a:t>
-            </a:r>
-            <a:endParaRPr lang="en-US" sz="850" dirty="0"/>
-          </a:p>
-        </p:txBody>
-      </p:sp>
-      <p:sp>
-        <p:nvSpPr>
-          <p:cNvPr id="8" name="Shape 6"/>
-          <p:cNvSpPr/>
-          <p:nvPr/>
-        </p:nvSpPr>
-        <p:spPr>
-          <a:xfrm rot="1800000">
-            <a:off x="822960" y="1325880"/>
-            <a:ext cx="4572000" cy="4572000"/>
-          </a:xfrm>
-          <a:prstGeom prst="arc">
-            <a:avLst/>
-          </a:prstGeom>
-          <a:solidFill>
-            <a:srgbClr val="D1FAE5"/>
-          </a:solidFill>
-          <a:ln w="12700">
-            <a:solidFill>
-              <a:srgbClr val="D1FAE5">
-                <a:alpha val="0"/>
-              </a:srgbClr>
-            </a:solidFill>
-            <a:prstDash val="solid"/>
-          </a:ln>
-        </p:spPr>
-        <p:txBody>
-          <a:bodyPr/>
-          <a:lstStyle/>
-          <a:p>
-            <a:endParaRPr lang="en-DE"/>
-          </a:p>
-        </p:txBody>
-      </p:sp>
-      <p:sp>
-        <p:nvSpPr>
-          <p:cNvPr id="9" name="Text 7"/>
-          <p:cNvSpPr/>
-          <p:nvPr/>
-        </p:nvSpPr>
-        <p:spPr>
-          <a:xfrm>
-            <a:off x="1508760" y="2057400"/>
-            <a:ext cx="3291840" cy="914400"/>
-          </a:xfrm>
-          <a:prstGeom prst="rect">
-            <a:avLst/>
-          </a:prstGeom>
-          <a:noFill/>
-          <a:ln/>
-        </p:spPr>
-        <p:txBody>
-          <a:bodyPr wrap="square" lIns="0" tIns="0" rIns="0" bIns="0" rtlCol="0" anchor="ctr"/>
-          <a:lstStyle/>
-          <a:p>
-            <a:pPr marL="0" indent="0" algn="ctr">
-              <a:buNone/>
-            </a:pPr>
-            <a:r>
-              <a:rPr lang="en-US" sz="5600" b="1" dirty="0">
-                <a:solidFill>
-                  <a:srgbClr val="10B981"/>
-                </a:solidFill>
-                <a:latin typeface="Aptos Display" pitchFamily="34" charset="0"/>
-                <a:ea typeface="Aptos Display" pitchFamily="34" charset="-122"/>
-                <a:cs typeface="Aptos Display" pitchFamily="34" charset="-120"/>
-              </a:rPr>
-              <a:t>5.4×</a:t>
-            </a:r>
-            <a:endParaRPr lang="en-US" sz="5600" dirty="0"/>
-          </a:p>
-        </p:txBody>
-      </p:sp>
-      <p:sp>
-        <p:nvSpPr>
-          <p:cNvPr id="10" name="Text 8"/>
-          <p:cNvSpPr/>
-          <p:nvPr/>
-        </p:nvSpPr>
-        <p:spPr>
-          <a:xfrm>
-            <a:off x="1481328" y="2971800"/>
-            <a:ext cx="3337560" cy="594360"/>
-          </a:xfrm>
-          <a:prstGeom prst="rect">
-            <a:avLst/>
-          </a:prstGeom>
-          <a:noFill/>
-          <a:ln/>
-        </p:spPr>
-        <p:txBody>
-          <a:bodyPr wrap="square" lIns="0" tIns="0" rIns="0" bIns="0" rtlCol="0" anchor="ctr">
-            <a:normAutofit/>
-          </a:bodyPr>
-          <a:lstStyle/>
-          <a:p>
-            <a:pPr marL="0" indent="0" algn="ctr">
-              <a:buNone/>
-            </a:pPr>
-            <a:r>
-              <a:rPr lang="en-US" sz="1700" b="1" dirty="0">
-                <a:solidFill>
-                  <a:srgbClr val="0B172A"/>
-                </a:solidFill>
-              </a:rPr>
-              <a:t>cloud took longer</a:t>
-            </a:r>
-            <a:endParaRPr lang="en-US" sz="1700" dirty="0"/>
-          </a:p>
-          <a:p>
-            <a:pPr marL="0" indent="0" algn="ctr">
-              <a:buNone/>
-            </a:pPr>
-            <a:r>
-              <a:rPr lang="en-US" sz="1700" b="1" dirty="0">
-                <a:solidFill>
-                  <a:srgbClr val="0B172A"/>
-                </a:solidFill>
-              </a:rPr>
-              <a:t>in stable home Wi‑Fi</a:t>
-            </a:r>
-            <a:endParaRPr lang="en-US" sz="1700" dirty="0"/>
-          </a:p>
-        </p:txBody>
-      </p:sp>
-      <p:sp>
-        <p:nvSpPr>
-          <p:cNvPr id="11" name="Text 9"/>
-          <p:cNvSpPr/>
-          <p:nvPr/>
-        </p:nvSpPr>
-        <p:spPr>
-          <a:xfrm>
-            <a:off x="1691640" y="3749040"/>
-            <a:ext cx="2926080" cy="237744"/>
-          </a:xfrm>
-          <a:prstGeom prst="rect">
-            <a:avLst/>
-          </a:prstGeom>
-          <a:noFill/>
-          <a:ln/>
-        </p:spPr>
-        <p:txBody>
-          <a:bodyPr wrap="square" lIns="0" tIns="0" rIns="0" bIns="0" rtlCol="0" anchor="ctr"/>
-          <a:lstStyle/>
-          <a:p>
-            <a:pPr marL="0" indent="0" algn="ctr">
-              <a:buNone/>
-            </a:pPr>
-            <a:r>
-              <a:rPr lang="en-US" sz="1200" dirty="0">
-                <a:solidFill>
-                  <a:srgbClr val="64748B"/>
-                </a:solidFill>
-              </a:rPr>
-              <a:t>510 ms ÷ 95 ms ≈ 5.37</a:t>
-            </a:r>
-            <a:endParaRPr lang="en-US" sz="1200" dirty="0"/>
-          </a:p>
-        </p:txBody>
-      </p:sp>
-      <p:sp>
-        <p:nvSpPr>
-          <p:cNvPr id="12" name="Shape 10"/>
-          <p:cNvSpPr/>
-          <p:nvPr/>
-        </p:nvSpPr>
-        <p:spPr>
-          <a:xfrm>
-            <a:off x="6583680" y="1417320"/>
-            <a:ext cx="4434840" cy="4251960"/>
-          </a:xfrm>
-          <a:prstGeom prst="roundRect">
-            <a:avLst>
-              <a:gd name="adj" fmla="val 1290"/>
-            </a:avLst>
-          </a:prstGeom>
-          <a:solidFill>
-            <a:srgbClr val="FFFFFF"/>
-          </a:solidFill>
-          <a:ln w="12700">
-            <a:solidFill>
-              <a:srgbClr val="E5E7EB"/>
-            </a:solidFill>
-            <a:prstDash val="solid"/>
-          </a:ln>
-          <a:effectLst>
-            <a:outerShdw blurRad="19050" dist="12700" dir="2700000" algn="bl" rotWithShape="0">
-              <a:srgbClr val="000000">
-                <a:alpha val="8000"/>
-              </a:srgbClr>
-            </a:outerShdw>
-          </a:effectLst>
-        </p:spPr>
-        <p:txBody>
-          <a:bodyPr/>
-          <a:lstStyle/>
-          <a:p>
-            <a:endParaRPr lang="en-DE"/>
-          </a:p>
-        </p:txBody>
-      </p:sp>
-      <p:sp>
-        <p:nvSpPr>
-          <p:cNvPr id="13" name="Text 11"/>
-          <p:cNvSpPr/>
-          <p:nvPr/>
-        </p:nvSpPr>
-        <p:spPr>
-          <a:xfrm>
-            <a:off x="6903720" y="1783080"/>
-            <a:ext cx="3840480" cy="329184"/>
-          </a:xfrm>
-          <a:prstGeom prst="rect">
-            <a:avLst/>
-          </a:prstGeom>
-          <a:noFill/>
-          <a:ln/>
-        </p:spPr>
-        <p:txBody>
-          <a:bodyPr wrap="square" lIns="0" tIns="0" rIns="0" bIns="0" rtlCol="0" anchor="ctr"/>
-          <a:lstStyle/>
-          <a:p>
-            <a:pPr marL="0" indent="0">
-              <a:buNone/>
-            </a:pPr>
-            <a:r>
-              <a:rPr lang="en-US" sz="1800" b="1" dirty="0">
-                <a:solidFill>
-                  <a:srgbClr val="0B172A"/>
-                </a:solidFill>
-              </a:rPr>
-              <a:t>Why this matters in industry</a:t>
-            </a:r>
-            <a:endParaRPr lang="en-US" sz="1800" dirty="0"/>
-          </a:p>
-        </p:txBody>
-      </p:sp>
-      <p:sp>
-        <p:nvSpPr>
-          <p:cNvPr id="14" name="Shape 12"/>
-          <p:cNvSpPr/>
-          <p:nvPr/>
-        </p:nvSpPr>
-        <p:spPr>
-          <a:xfrm>
-            <a:off x="6931152" y="2482596"/>
-            <a:ext cx="82296" cy="82296"/>
-          </a:xfrm>
-          <a:prstGeom prst="ellipse">
-            <a:avLst/>
-          </a:prstGeom>
-          <a:solidFill>
-            <a:srgbClr val="06B6D4"/>
-          </a:solidFill>
-          <a:ln w="12700">
-            <a:solidFill>
-              <a:srgbClr val="06B6D4">
-                <a:alpha val="0"/>
-              </a:srgbClr>
-            </a:solidFill>
-            <a:prstDash val="solid"/>
-          </a:ln>
-        </p:spPr>
-        <p:txBody>
-          <a:bodyPr/>
-          <a:lstStyle/>
-          <a:p>
-            <a:endParaRPr lang="en-DE"/>
-          </a:p>
-        </p:txBody>
-      </p:sp>
-      <p:sp>
-        <p:nvSpPr>
-          <p:cNvPr id="15" name="Text 13"/>
-          <p:cNvSpPr/>
-          <p:nvPr/>
-        </p:nvSpPr>
-        <p:spPr>
-          <a:xfrm>
-            <a:off x="7095744" y="2423160"/>
-            <a:ext cx="3566160" cy="246888"/>
-          </a:xfrm>
-          <a:prstGeom prst="rect">
-            <a:avLst/>
-          </a:prstGeom>
-          <a:noFill/>
-          <a:ln/>
-        </p:spPr>
-        <p:txBody>
-          <a:bodyPr wrap="square" lIns="0" tIns="0" rIns="0" bIns="0" rtlCol="0" anchor="ctr">
-            <a:normAutofit/>
-          </a:bodyPr>
-          <a:lstStyle/>
-          <a:p>
-            <a:pPr marL="0" indent="0">
-              <a:buNone/>
-            </a:pPr>
-            <a:r>
-              <a:rPr lang="en-US" sz="1220" dirty="0">
-                <a:solidFill>
-                  <a:srgbClr val="1E293B"/>
-                </a:solidFill>
-              </a:rPr>
-              <a:t>Fault detection must react quickly.</a:t>
-            </a:r>
-            <a:endParaRPr lang="en-US" sz="1220" dirty="0"/>
-          </a:p>
-        </p:txBody>
-      </p:sp>
-      <p:sp>
-        <p:nvSpPr>
-          <p:cNvPr id="16" name="Shape 14"/>
-          <p:cNvSpPr/>
-          <p:nvPr/>
-        </p:nvSpPr>
-        <p:spPr>
-          <a:xfrm>
-            <a:off x="6931152" y="2939796"/>
-            <a:ext cx="82296" cy="82296"/>
-          </a:xfrm>
-          <a:prstGeom prst="ellipse">
-            <a:avLst/>
-          </a:prstGeom>
-          <a:solidFill>
-            <a:srgbClr val="06B6D4"/>
-          </a:solidFill>
-          <a:ln w="12700">
-            <a:solidFill>
-              <a:srgbClr val="06B6D4">
-                <a:alpha val="0"/>
-              </a:srgbClr>
-            </a:solidFill>
-            <a:prstDash val="solid"/>
-          </a:ln>
-        </p:spPr>
-        <p:txBody>
-          <a:bodyPr/>
-          <a:lstStyle/>
-          <a:p>
-            <a:endParaRPr lang="en-DE"/>
-          </a:p>
-        </p:txBody>
-      </p:sp>
-      <p:sp>
-        <p:nvSpPr>
-          <p:cNvPr id="17" name="Text 15"/>
-          <p:cNvSpPr/>
-          <p:nvPr/>
-        </p:nvSpPr>
-        <p:spPr>
-          <a:xfrm>
-            <a:off x="7095744" y="2880360"/>
-            <a:ext cx="3657600" cy="246888"/>
-          </a:xfrm>
-          <a:prstGeom prst="rect">
-            <a:avLst/>
-          </a:prstGeom>
-          <a:noFill/>
-          <a:ln/>
-        </p:spPr>
-        <p:txBody>
-          <a:bodyPr wrap="square" lIns="0" tIns="0" rIns="0" bIns="0" rtlCol="0" anchor="ctr">
-            <a:normAutofit fontScale="85000" lnSpcReduction="10000"/>
-          </a:bodyPr>
-          <a:lstStyle/>
-          <a:p>
-            <a:pPr marL="0" indent="0">
-              <a:buNone/>
-            </a:pPr>
-            <a:r>
-              <a:rPr lang="en-US" sz="1220" dirty="0">
-                <a:solidFill>
-                  <a:srgbClr val="1E293B"/>
-                </a:solidFill>
-              </a:rPr>
-              <a:t>Machine stop commands cannot wait for slow internet round trips.</a:t>
-            </a:r>
-            <a:endParaRPr lang="en-US" sz="1220" dirty="0"/>
-          </a:p>
-        </p:txBody>
-      </p:sp>
-      <p:sp>
-        <p:nvSpPr>
-          <p:cNvPr id="18" name="Shape 16"/>
-          <p:cNvSpPr/>
-          <p:nvPr/>
-        </p:nvSpPr>
-        <p:spPr>
-          <a:xfrm>
-            <a:off x="6931152" y="3552444"/>
-            <a:ext cx="82296" cy="82296"/>
-          </a:xfrm>
-          <a:prstGeom prst="ellipse">
-            <a:avLst/>
-          </a:prstGeom>
-          <a:solidFill>
-            <a:srgbClr val="06B6D4"/>
-          </a:solidFill>
-          <a:ln w="12700">
-            <a:solidFill>
-              <a:srgbClr val="06B6D4">
-                <a:alpha val="0"/>
-              </a:srgbClr>
-            </a:solidFill>
-            <a:prstDash val="solid"/>
-          </a:ln>
-        </p:spPr>
-        <p:txBody>
-          <a:bodyPr/>
-          <a:lstStyle/>
-          <a:p>
-            <a:endParaRPr lang="en-DE"/>
-          </a:p>
-        </p:txBody>
-      </p:sp>
-      <p:sp>
-        <p:nvSpPr>
-          <p:cNvPr id="19" name="Text 17"/>
-          <p:cNvSpPr/>
-          <p:nvPr/>
-        </p:nvSpPr>
-        <p:spPr>
-          <a:xfrm>
-            <a:off x="7095744" y="3493008"/>
-            <a:ext cx="3566160" cy="246888"/>
-          </a:xfrm>
-          <a:prstGeom prst="rect">
-            <a:avLst/>
-          </a:prstGeom>
-          <a:noFill/>
-          <a:ln/>
-        </p:spPr>
-        <p:txBody>
-          <a:bodyPr wrap="square" lIns="0" tIns="0" rIns="0" bIns="0" rtlCol="0" anchor="ctr">
-            <a:normAutofit fontScale="92500"/>
-          </a:bodyPr>
-          <a:lstStyle/>
-          <a:p>
-            <a:pPr marL="0" indent="0">
-              <a:buNone/>
-            </a:pPr>
-            <a:r>
-              <a:rPr lang="en-US" sz="1220" dirty="0">
-                <a:solidFill>
-                  <a:srgbClr val="1E293B"/>
-                </a:solidFill>
-              </a:rPr>
-              <a:t>Local processing is better for alarms and control decisions.</a:t>
-            </a:r>
-            <a:endParaRPr lang="en-US" sz="1220" dirty="0"/>
-          </a:p>
-        </p:txBody>
-      </p:sp>
-      <p:sp>
-        <p:nvSpPr>
-          <p:cNvPr id="20" name="Text 18"/>
-          <p:cNvSpPr/>
-          <p:nvPr/>
-        </p:nvSpPr>
-        <p:spPr>
-          <a:xfrm>
-            <a:off x="6931152" y="4617720"/>
-            <a:ext cx="3611880" cy="530352"/>
-          </a:xfrm>
-          <a:prstGeom prst="rect">
-            <a:avLst/>
-          </a:prstGeom>
-          <a:noFill/>
-          <a:ln/>
-        </p:spPr>
-        <p:txBody>
-          <a:bodyPr wrap="square" lIns="254" tIns="254" rIns="254" bIns="254" rtlCol="0" anchor="ctr">
-            <a:normAutofit fontScale="92500" lnSpcReduction="20000"/>
-          </a:bodyPr>
-          <a:lstStyle/>
-          <a:p>
-            <a:pPr marL="0" indent="0">
-              <a:buNone/>
-            </a:pPr>
-            <a:r>
-              <a:rPr lang="en-US" sz="1400" b="1" dirty="0">
-                <a:solidFill>
-                  <a:srgbClr val="1E293B"/>
-                </a:solidFill>
-              </a:rPr>
-              <a:t>Main message: edge reduces the communication path and keeps response time closer to real-time needs.</a:t>
-            </a:r>
-            <a:endParaRPr lang="en-US" sz="1400" dirty="0"/>
-          </a:p>
-        </p:txBody>
-      </p:sp>
-    </p:spTree>
-  </p:cSld>
-  <p:clrMapOvr>
-    <a:masterClrMapping/>
-  </p:clrMapOvr>
-</p:sld>
-</file>
-
-<file path=ppt/slides/slide7.xml><?xml version="1.0" encoding="utf-8"?>
-<p:sld xmlns:a="http://schemas.openxmlformats.org/drawingml/2006/main" xmlns:r="http://schemas.openxmlformats.org/officeDocument/2006/relationships" xmlns:p="http://schemas.openxmlformats.org/presentationml/2006/main">
-  <p:cSld name="Slide 7">
-    <p:bg>
-      <p:bgPr>
-        <a:solidFill>
-          <a:srgbClr val="F8FAFC"/>
-        </a:solidFill>
-        <a:effectLst/>
-      </p:bgPr>
-    </p:bg>
-    <p:spTree>
-      <p:nvGrpSpPr>
-        <p:cNvPr id="1" name=""/>
-        <p:cNvGrpSpPr/>
-        <p:nvPr/>
-      </p:nvGrpSpPr>
-      <p:grpSpPr>
-        <a:xfrm>
-          <a:off x="0" y="0"/>
-          <a:ext cx="0" cy="0"/>
-          <a:chOff x="0" y="0"/>
-          <a:chExt cx="0" cy="0"/>
-        </a:xfrm>
-      </p:grpSpPr>
-      <p:sp>
-        <p:nvSpPr>
-          <p:cNvPr id="2" name="Shape 0"/>
-          <p:cNvSpPr/>
-          <p:nvPr/>
-        </p:nvSpPr>
-        <p:spPr>
-          <a:xfrm>
-            <a:off x="0" y="0"/>
-            <a:ext cx="12191695" cy="6858000"/>
-          </a:xfrm>
-          <a:prstGeom prst="rect">
-            <a:avLst/>
-          </a:prstGeom>
-          <a:solidFill>
-            <a:srgbClr val="F8FAFC"/>
-          </a:solidFill>
-          <a:ln w="12700">
-            <a:solidFill>
-              <a:srgbClr val="F8FAFC">
-                <a:alpha val="0"/>
-              </a:srgbClr>
-            </a:solidFill>
-            <a:prstDash val="solid"/>
-          </a:ln>
-        </p:spPr>
-        <p:txBody>
-          <a:bodyPr/>
-          <a:lstStyle/>
-          <a:p>
-            <a:endParaRPr lang="en-DE"/>
-          </a:p>
-        </p:txBody>
-      </p:sp>
-      <p:sp>
-        <p:nvSpPr>
-          <p:cNvPr id="3" name="Shape 1"/>
-          <p:cNvSpPr/>
-          <p:nvPr/>
-        </p:nvSpPr>
-        <p:spPr>
-          <a:xfrm>
-            <a:off x="0" y="0"/>
-            <a:ext cx="128016" cy="6858000"/>
-          </a:xfrm>
-          <a:prstGeom prst="rect">
-            <a:avLst/>
-          </a:prstGeom>
-          <a:solidFill>
-            <a:srgbClr val="2563EB"/>
-          </a:solidFill>
-          <a:ln w="12700">
-            <a:solidFill>
-              <a:srgbClr val="2563EB">
-                <a:alpha val="0"/>
-              </a:srgbClr>
-            </a:solidFill>
-            <a:prstDash val="solid"/>
-          </a:ln>
-        </p:spPr>
-        <p:txBody>
-          <a:bodyPr/>
-          <a:lstStyle/>
-          <a:p>
-            <a:endParaRPr lang="en-DE"/>
-          </a:p>
-        </p:txBody>
-      </p:sp>
-      <p:sp>
-        <p:nvSpPr>
-          <p:cNvPr id="4" name="Text 2"/>
-          <p:cNvSpPr/>
-          <p:nvPr/>
-        </p:nvSpPr>
-        <p:spPr>
-          <a:xfrm>
-            <a:off x="502920" y="384048"/>
-            <a:ext cx="10881360" cy="438912"/>
-          </a:xfrm>
-          <a:prstGeom prst="rect">
-            <a:avLst/>
-          </a:prstGeom>
-          <a:noFill/>
-          <a:ln/>
-        </p:spPr>
-        <p:txBody>
-          <a:bodyPr wrap="square" lIns="0" tIns="0" rIns="0" bIns="0" rtlCol="0" anchor="ctr">
-            <a:normAutofit/>
-          </a:bodyPr>
-          <a:lstStyle/>
-          <a:p>
-            <a:pPr marL="0" indent="0">
-              <a:buNone/>
-            </a:pPr>
-            <a:r>
-              <a:rPr lang="en-US" sz="2800" b="1" dirty="0">
-                <a:solidFill>
-                  <a:srgbClr val="0B172A"/>
-                </a:solidFill>
-                <a:latin typeface="Aptos Display" pitchFamily="34" charset="0"/>
-                <a:ea typeface="Aptos Display" pitchFamily="34" charset="-122"/>
-                <a:cs typeface="Aptos Display" pitchFamily="34" charset="-120"/>
-              </a:rPr>
-              <a:t>Network quality changes the result</a:t>
-            </a:r>
-            <a:endParaRPr lang="en-US" sz="2800" dirty="0"/>
-          </a:p>
-        </p:txBody>
-      </p:sp>
-      <p:sp>
-        <p:nvSpPr>
-          <p:cNvPr id="5" name="Text 3"/>
-          <p:cNvSpPr/>
-          <p:nvPr/>
-        </p:nvSpPr>
-        <p:spPr>
-          <a:xfrm>
-            <a:off x="530352" y="868680"/>
-            <a:ext cx="10241280" cy="274320"/>
-          </a:xfrm>
-          <a:prstGeom prst="rect">
-            <a:avLst/>
-          </a:prstGeom>
-          <a:noFill/>
-          <a:ln/>
-        </p:spPr>
-        <p:txBody>
-          <a:bodyPr wrap="square" lIns="0" tIns="0" rIns="0" bIns="0" rtlCol="0" anchor="ctr">
-            <a:normAutofit/>
-          </a:bodyPr>
-          <a:lstStyle/>
-          <a:p>
-            <a:pPr marL="0" indent="0">
-              <a:buNone/>
-            </a:pPr>
-            <a:r>
-              <a:rPr lang="en-US" sz="1250" dirty="0">
-                <a:solidFill>
-                  <a:srgbClr val="64748B"/>
-                </a:solidFill>
-                <a:latin typeface="Aptos" pitchFamily="34" charset="0"/>
-                <a:ea typeface="Aptos" pitchFamily="34" charset="-122"/>
-                <a:cs typeface="Aptos" pitchFamily="34" charset="-120"/>
-              </a:rPr>
-              <a:t>Shared or crowded networks increase latency, but cloud is affected more.</a:t>
-            </a:r>
-            <a:endParaRPr lang="en-US" sz="1250" dirty="0"/>
-          </a:p>
-        </p:txBody>
-      </p:sp>
-      <p:sp>
-        <p:nvSpPr>
-          <p:cNvPr id="6" name="Text 4"/>
-          <p:cNvSpPr/>
-          <p:nvPr/>
-        </p:nvSpPr>
-        <p:spPr>
-          <a:xfrm>
-            <a:off x="502920" y="6492240"/>
-            <a:ext cx="7772400" cy="201168"/>
-          </a:xfrm>
-          <a:prstGeom prst="rect">
-            <a:avLst/>
-          </a:prstGeom>
-          <a:noFill/>
-          <a:ln/>
-        </p:spPr>
-        <p:txBody>
-          <a:bodyPr wrap="square" lIns="0" tIns="0" rIns="0" bIns="0" rtlCol="0" anchor="ctr"/>
-          <a:lstStyle/>
-          <a:p>
-            <a:pPr marL="0" indent="0">
-              <a:buNone/>
-            </a:pPr>
-            <a:r>
-              <a:rPr lang="en-US" sz="850" dirty="0">
-                <a:solidFill>
-                  <a:srgbClr val="64748B"/>
-                </a:solidFill>
-                <a:latin typeface="Aptos" pitchFamily="34" charset="0"/>
-                <a:ea typeface="Aptos" pitchFamily="34" charset="-122"/>
-                <a:cs typeface="Aptos" pitchFamily="34" charset="-120"/>
-              </a:rPr>
-              <a:t>Edge Computing in Industrial Communication • Sections VII–IX</a:t>
-            </a:r>
-            <a:endParaRPr lang="en-US" sz="850" dirty="0"/>
-          </a:p>
-        </p:txBody>
-      </p:sp>
-      <p:sp>
-        <p:nvSpPr>
-          <p:cNvPr id="7" name="Text 5"/>
-          <p:cNvSpPr/>
-          <p:nvPr/>
-        </p:nvSpPr>
-        <p:spPr>
-          <a:xfrm>
-            <a:off x="11384280" y="6446520"/>
-            <a:ext cx="320040" cy="228600"/>
-          </a:xfrm>
-          <a:prstGeom prst="rect">
-            <a:avLst/>
-          </a:prstGeom>
-          <a:noFill/>
-          <a:ln/>
-        </p:spPr>
-        <p:txBody>
-          <a:bodyPr wrap="square" lIns="0" tIns="0" rIns="0" bIns="0" rtlCol="0" anchor="ctr"/>
-          <a:lstStyle/>
-          <a:p>
-            <a:pPr marL="0" indent="0" algn="r">
-              <a:buNone/>
-            </a:pPr>
-            <a:r>
-              <a:rPr lang="en-US" sz="850" b="1" dirty="0">
-                <a:solidFill>
-                  <a:srgbClr val="64748B"/>
-                </a:solidFill>
-                <a:latin typeface="Aptos" pitchFamily="34" charset="0"/>
-                <a:ea typeface="Aptos" pitchFamily="34" charset="-122"/>
-                <a:cs typeface="Aptos" pitchFamily="34" charset="-120"/>
-              </a:rPr>
-              <a:t>07</a:t>
-            </a:r>
-            <a:endParaRPr lang="en-US" sz="850" dirty="0"/>
-          </a:p>
-        </p:txBody>
-      </p:sp>
-      <p:sp>
-        <p:nvSpPr>
-          <p:cNvPr id="8" name="Text 6"/>
-          <p:cNvSpPr/>
-          <p:nvPr/>
-        </p:nvSpPr>
-        <p:spPr>
-          <a:xfrm>
-            <a:off x="731520" y="1417320"/>
-            <a:ext cx="5120640" cy="292608"/>
-          </a:xfrm>
-          <a:prstGeom prst="rect">
-            <a:avLst/>
-          </a:prstGeom>
-          <a:noFill/>
-          <a:ln/>
-        </p:spPr>
-        <p:txBody>
-          <a:bodyPr wrap="square" lIns="0" tIns="0" rIns="0" bIns="0" rtlCol="0" anchor="ctr"/>
-          <a:lstStyle/>
-          <a:p>
-            <a:pPr marL="0" indent="0">
-              <a:buNone/>
-            </a:pPr>
-            <a:r>
-              <a:rPr lang="en-US" sz="1800" b="1" dirty="0">
-                <a:solidFill>
-                  <a:srgbClr val="0B172A"/>
-                </a:solidFill>
-              </a:rPr>
-              <a:t>Edge latency increased on shared Wi‑Fi</a:t>
-            </a:r>
-            <a:endParaRPr lang="en-US" sz="1800" dirty="0"/>
-          </a:p>
-        </p:txBody>
-      </p:sp>
-      <p:sp>
-        <p:nvSpPr>
-          <p:cNvPr id="9" name="Shape 7"/>
-          <p:cNvSpPr/>
-          <p:nvPr/>
-        </p:nvSpPr>
-        <p:spPr>
-          <a:xfrm>
-            <a:off x="914400" y="4526280"/>
-            <a:ext cx="1005840" cy="502920"/>
-          </a:xfrm>
-          <a:prstGeom prst="rect">
-            <a:avLst/>
-          </a:prstGeom>
-          <a:solidFill>
-            <a:srgbClr val="14B8A6"/>
-          </a:solidFill>
-          <a:ln w="12700">
-            <a:solidFill>
-              <a:srgbClr val="14B8A6">
-                <a:alpha val="0"/>
-              </a:srgbClr>
-            </a:solidFill>
-            <a:prstDash val="solid"/>
-          </a:ln>
-        </p:spPr>
-        <p:txBody>
-          <a:bodyPr/>
-          <a:lstStyle/>
-          <a:p>
-            <a:endParaRPr lang="en-DE"/>
-          </a:p>
-        </p:txBody>
-      </p:sp>
-      <p:sp>
-        <p:nvSpPr>
-          <p:cNvPr id="10" name="Shape 8"/>
-          <p:cNvSpPr/>
-          <p:nvPr/>
-        </p:nvSpPr>
-        <p:spPr>
-          <a:xfrm>
-            <a:off x="2743200" y="2834640"/>
-            <a:ext cx="1005840" cy="2194560"/>
-          </a:xfrm>
-          <a:prstGeom prst="rect">
-            <a:avLst/>
-          </a:prstGeom>
-          <a:solidFill>
-            <a:srgbClr val="F59E0B"/>
-          </a:solidFill>
-          <a:ln w="12700">
-            <a:solidFill>
-              <a:srgbClr val="F59E0B">
-                <a:alpha val="0"/>
-              </a:srgbClr>
-            </a:solidFill>
-            <a:prstDash val="solid"/>
-          </a:ln>
-        </p:spPr>
-        <p:txBody>
-          <a:bodyPr/>
-          <a:lstStyle/>
-          <a:p>
-            <a:endParaRPr lang="en-DE"/>
-          </a:p>
-        </p:txBody>
-      </p:sp>
-      <p:sp>
-        <p:nvSpPr>
-          <p:cNvPr id="11" name="Text 9"/>
-          <p:cNvSpPr/>
-          <p:nvPr/>
-        </p:nvSpPr>
-        <p:spPr>
-          <a:xfrm>
-            <a:off x="777240" y="4160520"/>
-            <a:ext cx="1280160" cy="228600"/>
-          </a:xfrm>
-          <a:prstGeom prst="rect">
-            <a:avLst/>
-          </a:prstGeom>
-          <a:noFill/>
-          <a:ln/>
-        </p:spPr>
-        <p:txBody>
-          <a:bodyPr wrap="square" lIns="0" tIns="0" rIns="0" bIns="0" rtlCol="0" anchor="ctr"/>
-          <a:lstStyle/>
-          <a:p>
-            <a:pPr marL="0" indent="0" algn="ctr">
-              <a:buNone/>
-            </a:pPr>
-            <a:r>
-              <a:rPr lang="en-US" sz="1300" b="1" dirty="0">
-                <a:solidFill>
-                  <a:srgbClr val="14B8A6"/>
-                </a:solidFill>
-              </a:rPr>
-              <a:t>95 ms</a:t>
-            </a:r>
-            <a:endParaRPr lang="en-US" sz="1300" dirty="0"/>
-          </a:p>
-        </p:txBody>
-      </p:sp>
-      <p:sp>
-        <p:nvSpPr>
-          <p:cNvPr id="12" name="Text 10"/>
-          <p:cNvSpPr/>
-          <p:nvPr/>
-        </p:nvSpPr>
-        <p:spPr>
-          <a:xfrm>
-            <a:off x="2578608" y="2468880"/>
-            <a:ext cx="1325880" cy="228600"/>
-          </a:xfrm>
-          <a:prstGeom prst="rect">
-            <a:avLst/>
-          </a:prstGeom>
-          <a:noFill/>
-          <a:ln/>
-        </p:spPr>
-        <p:txBody>
-          <a:bodyPr wrap="square" lIns="0" tIns="0" rIns="0" bIns="0" rtlCol="0" anchor="ctr"/>
-          <a:lstStyle/>
-          <a:p>
-            <a:pPr marL="0" indent="0" algn="ctr">
-              <a:buNone/>
-            </a:pPr>
-            <a:r>
-              <a:rPr lang="en-US" sz="1300" b="1" dirty="0">
-                <a:solidFill>
-                  <a:srgbClr val="F59E0B"/>
-                </a:solidFill>
-              </a:rPr>
-              <a:t>422 ms</a:t>
-            </a:r>
-            <a:endParaRPr lang="en-US" sz="1300" dirty="0"/>
-          </a:p>
-        </p:txBody>
-      </p:sp>
-      <p:sp>
-        <p:nvSpPr>
-          <p:cNvPr id="13" name="Text 11"/>
-          <p:cNvSpPr/>
-          <p:nvPr/>
-        </p:nvSpPr>
-        <p:spPr>
-          <a:xfrm>
-            <a:off x="731520" y="5257800"/>
-            <a:ext cx="1417320" cy="219456"/>
-          </a:xfrm>
-          <a:prstGeom prst="rect">
-            <a:avLst/>
-          </a:prstGeom>
-          <a:noFill/>
-          <a:ln/>
-        </p:spPr>
-        <p:txBody>
-          <a:bodyPr wrap="square" lIns="0" tIns="0" rIns="0" bIns="0" rtlCol="0" anchor="ctr"/>
-          <a:lstStyle/>
-          <a:p>
-            <a:pPr marL="0" indent="0" algn="ctr">
-              <a:buNone/>
-            </a:pPr>
-            <a:r>
-              <a:rPr lang="en-US" sz="1100" dirty="0">
-                <a:solidFill>
-                  <a:srgbClr val="64748B"/>
-                </a:solidFill>
-              </a:rPr>
-              <a:t>Home</a:t>
-            </a:r>
-            <a:endParaRPr lang="en-US" sz="1100" dirty="0"/>
-          </a:p>
-        </p:txBody>
-      </p:sp>
-      <p:sp>
-        <p:nvSpPr>
-          <p:cNvPr id="14" name="Text 12"/>
-          <p:cNvSpPr/>
-          <p:nvPr/>
-        </p:nvSpPr>
-        <p:spPr>
-          <a:xfrm>
-            <a:off x="2423160" y="5257800"/>
-            <a:ext cx="1691640" cy="219456"/>
-          </a:xfrm>
-          <a:prstGeom prst="rect">
-            <a:avLst/>
-          </a:prstGeom>
-          <a:noFill/>
-          <a:ln/>
-        </p:spPr>
-        <p:txBody>
-          <a:bodyPr wrap="square" lIns="0" tIns="0" rIns="0" bIns="0" rtlCol="0" anchor="ctr"/>
-          <a:lstStyle/>
-          <a:p>
-            <a:pPr marL="0" indent="0" algn="ctr">
-              <a:buNone/>
-            </a:pPr>
-            <a:r>
-              <a:rPr lang="en-US" sz="1100" dirty="0">
-                <a:solidFill>
-                  <a:srgbClr val="64748B"/>
-                </a:solidFill>
-              </a:rPr>
-              <a:t>HSHL shared</a:t>
-            </a:r>
-            <a:endParaRPr lang="en-US" sz="1100" dirty="0"/>
-          </a:p>
-        </p:txBody>
-      </p:sp>
-      <p:sp>
-        <p:nvSpPr>
-          <p:cNvPr id="15" name="Shape 13"/>
-          <p:cNvSpPr/>
-          <p:nvPr/>
-        </p:nvSpPr>
-        <p:spPr>
-          <a:xfrm>
-            <a:off x="685800" y="5029200"/>
-            <a:ext cx="4114800" cy="0"/>
-          </a:xfrm>
-          <a:prstGeom prst="line">
-            <a:avLst/>
-          </a:prstGeom>
-          <a:noFill/>
-          <a:ln w="15240">
-            <a:solidFill>
-              <a:srgbClr val="E2E8F0"/>
-            </a:solidFill>
-            <a:prstDash val="solid"/>
-          </a:ln>
-        </p:spPr>
-        <p:txBody>
-          <a:bodyPr/>
-          <a:lstStyle/>
-          <a:p>
-            <a:endParaRPr lang="en-DE"/>
-          </a:p>
-        </p:txBody>
-      </p:sp>
-      <p:sp>
-        <p:nvSpPr>
-          <p:cNvPr id="16" name="Text 14"/>
-          <p:cNvSpPr/>
-          <p:nvPr/>
-        </p:nvSpPr>
-        <p:spPr>
-          <a:xfrm>
-            <a:off x="4572000" y="2880360"/>
-            <a:ext cx="2011680" cy="228600"/>
-          </a:xfrm>
-          <a:prstGeom prst="rect">
-            <a:avLst/>
-          </a:prstGeom>
-          <a:noFill/>
-          <a:ln/>
-        </p:spPr>
-        <p:txBody>
-          <a:bodyPr wrap="square" lIns="0" tIns="0" rIns="0" bIns="0" rtlCol="0" anchor="ctr">
-            <a:normAutofit fontScale="85000" lnSpcReduction="10000"/>
-          </a:bodyPr>
-          <a:lstStyle/>
-          <a:p>
-            <a:pPr marL="0" indent="0">
-              <a:buNone/>
-            </a:pPr>
-            <a:r>
-              <a:rPr lang="en-US" sz="1100" b="1" dirty="0">
-                <a:solidFill>
-                  <a:srgbClr val="64748B"/>
-                </a:solidFill>
-              </a:rPr>
-              <a:t>Increase caused by shared network</a:t>
-            </a:r>
-            <a:endParaRPr lang="en-US" sz="1100" dirty="0"/>
-          </a:p>
-        </p:txBody>
-      </p:sp>
-      <p:sp>
-        <p:nvSpPr>
-          <p:cNvPr id="17" name="Text 15"/>
-          <p:cNvSpPr/>
-          <p:nvPr/>
-        </p:nvSpPr>
-        <p:spPr>
-          <a:xfrm>
-            <a:off x="4572000" y="3200400"/>
-            <a:ext cx="2011680" cy="512064"/>
-          </a:xfrm>
-          <a:prstGeom prst="rect">
-            <a:avLst/>
-          </a:prstGeom>
-          <a:noFill/>
-          <a:ln/>
-        </p:spPr>
-        <p:txBody>
-          <a:bodyPr wrap="square" lIns="0" tIns="0" rIns="0" bIns="0" rtlCol="0" anchor="ctr">
-            <a:normAutofit/>
-          </a:bodyPr>
-          <a:lstStyle/>
-          <a:p>
-            <a:pPr marL="0" indent="0">
-              <a:buNone/>
-            </a:pPr>
-            <a:r>
-              <a:rPr lang="en-US" sz="2800" b="1" dirty="0">
-                <a:solidFill>
-                  <a:srgbClr val="F59E0B"/>
-                </a:solidFill>
-                <a:latin typeface="Aptos Display" pitchFamily="34" charset="0"/>
-                <a:ea typeface="Aptos Display" pitchFamily="34" charset="-122"/>
-                <a:cs typeface="Aptos Display" pitchFamily="34" charset="-120"/>
-              </a:rPr>
-              <a:t>4.4×</a:t>
-            </a:r>
-            <a:endParaRPr lang="en-US" sz="2800" dirty="0"/>
-          </a:p>
-        </p:txBody>
-      </p:sp>
-      <p:sp>
-        <p:nvSpPr>
-          <p:cNvPr id="18" name="Text 16"/>
-          <p:cNvSpPr/>
-          <p:nvPr/>
-        </p:nvSpPr>
-        <p:spPr>
-          <a:xfrm>
-            <a:off x="4572000" y="3749040"/>
-            <a:ext cx="2011680" cy="292608"/>
-          </a:xfrm>
-          <a:prstGeom prst="rect">
-            <a:avLst/>
-          </a:prstGeom>
-          <a:noFill/>
-          <a:ln/>
-        </p:spPr>
-        <p:txBody>
-          <a:bodyPr wrap="square" lIns="0" tIns="0" rIns="0" bIns="0" rtlCol="0" anchor="ctr">
-            <a:normAutofit/>
-          </a:bodyPr>
-          <a:lstStyle/>
-          <a:p>
-            <a:pPr marL="0" indent="0">
-              <a:buNone/>
-            </a:pPr>
-            <a:r>
-              <a:rPr lang="en-US" sz="1050" dirty="0">
-                <a:solidFill>
-                  <a:srgbClr val="64748B"/>
-                </a:solidFill>
-              </a:rPr>
-              <a:t>422 ÷ 95</a:t>
-            </a:r>
-            <a:endParaRPr lang="en-US" sz="1050" dirty="0"/>
-          </a:p>
-        </p:txBody>
-      </p:sp>
-      <p:sp>
-        <p:nvSpPr>
-          <p:cNvPr id="19" name="Shape 17"/>
-          <p:cNvSpPr/>
-          <p:nvPr/>
-        </p:nvSpPr>
-        <p:spPr>
-          <a:xfrm>
-            <a:off x="6720840" y="1417320"/>
-            <a:ext cx="0" cy="4343400"/>
-          </a:xfrm>
-          <a:prstGeom prst="line">
-            <a:avLst/>
-          </a:prstGeom>
-          <a:noFill/>
-          <a:ln w="12700">
-            <a:solidFill>
-              <a:srgbClr val="E2E8F0"/>
-            </a:solidFill>
-            <a:prstDash val="solid"/>
-          </a:ln>
-        </p:spPr>
-        <p:txBody>
-          <a:bodyPr/>
-          <a:lstStyle/>
-          <a:p>
-            <a:endParaRPr lang="en-DE"/>
-          </a:p>
-        </p:txBody>
-      </p:sp>
-      <p:sp>
-        <p:nvSpPr>
-          <p:cNvPr id="20" name="Text 18"/>
-          <p:cNvSpPr/>
-          <p:nvPr/>
-        </p:nvSpPr>
-        <p:spPr>
-          <a:xfrm>
-            <a:off x="7360920" y="1645920"/>
-            <a:ext cx="3474720" cy="292608"/>
-          </a:xfrm>
-          <a:prstGeom prst="rect">
-            <a:avLst/>
-          </a:prstGeom>
-          <a:noFill/>
-          <a:ln/>
-        </p:spPr>
-        <p:txBody>
-          <a:bodyPr wrap="square" lIns="0" tIns="0" rIns="0" bIns="0" rtlCol="0" anchor="ctr"/>
-          <a:lstStyle/>
-          <a:p>
-            <a:pPr marL="0" indent="0">
-              <a:buNone/>
-            </a:pPr>
-            <a:r>
-              <a:rPr lang="en-US" sz="1800" b="1" dirty="0">
-                <a:solidFill>
-                  <a:srgbClr val="0B172A"/>
-                </a:solidFill>
-              </a:rPr>
-              <a:t>Recommendation</a:t>
-            </a:r>
-            <a:endParaRPr lang="en-US" sz="1800" dirty="0"/>
-          </a:p>
-        </p:txBody>
-      </p:sp>
-      <p:sp>
-        <p:nvSpPr>
-          <p:cNvPr id="21" name="Shape 19"/>
-          <p:cNvSpPr/>
-          <p:nvPr/>
-        </p:nvSpPr>
-        <p:spPr>
-          <a:xfrm>
-            <a:off x="7388352" y="2391156"/>
-            <a:ext cx="82296" cy="82296"/>
-          </a:xfrm>
-          <a:prstGeom prst="ellipse">
-            <a:avLst/>
-          </a:prstGeom>
-          <a:solidFill>
-            <a:srgbClr val="06B6D4"/>
-          </a:solidFill>
-          <a:ln w="12700">
-            <a:solidFill>
-              <a:srgbClr val="06B6D4">
-                <a:alpha val="0"/>
-              </a:srgbClr>
-            </a:solidFill>
-            <a:prstDash val="solid"/>
-          </a:ln>
-        </p:spPr>
-        <p:txBody>
-          <a:bodyPr/>
-          <a:lstStyle/>
-          <a:p>
-            <a:endParaRPr lang="en-DE"/>
-          </a:p>
-        </p:txBody>
-      </p:sp>
-      <p:sp>
-        <p:nvSpPr>
-          <p:cNvPr id="22" name="Text 20"/>
-          <p:cNvSpPr/>
-          <p:nvPr/>
-        </p:nvSpPr>
-        <p:spPr>
-          <a:xfrm>
-            <a:off x="7552944" y="2331720"/>
-            <a:ext cx="3474720" cy="246888"/>
-          </a:xfrm>
-          <a:prstGeom prst="rect">
-            <a:avLst/>
-          </a:prstGeom>
-          <a:noFill/>
-          <a:ln/>
-        </p:spPr>
-        <p:txBody>
-          <a:bodyPr wrap="square" lIns="0" tIns="0" rIns="0" bIns="0" rtlCol="0" anchor="ctr">
-            <a:normAutofit/>
-          </a:bodyPr>
-          <a:lstStyle/>
-          <a:p>
-            <a:pPr marL="0" indent="0">
-              <a:buNone/>
-            </a:pPr>
-            <a:r>
-              <a:rPr lang="en-US" sz="1220" dirty="0">
-                <a:solidFill>
-                  <a:srgbClr val="1E293B"/>
-                </a:solidFill>
-              </a:rPr>
-              <a:t>Use a dedicated local industrial network.</a:t>
-            </a:r>
-            <a:endParaRPr lang="en-US" sz="1220" dirty="0"/>
-          </a:p>
-        </p:txBody>
-      </p:sp>
-      <p:sp>
-        <p:nvSpPr>
-          <p:cNvPr id="23" name="Shape 21"/>
-          <p:cNvSpPr/>
-          <p:nvPr/>
-        </p:nvSpPr>
-        <p:spPr>
-          <a:xfrm>
-            <a:off x="7388352" y="2939796"/>
-            <a:ext cx="82296" cy="82296"/>
-          </a:xfrm>
-          <a:prstGeom prst="ellipse">
-            <a:avLst/>
-          </a:prstGeom>
-          <a:solidFill>
-            <a:srgbClr val="06B6D4"/>
-          </a:solidFill>
-          <a:ln w="12700">
-            <a:solidFill>
-              <a:srgbClr val="06B6D4">
-                <a:alpha val="0"/>
-              </a:srgbClr>
-            </a:solidFill>
-            <a:prstDash val="solid"/>
-          </a:ln>
-        </p:spPr>
-        <p:txBody>
-          <a:bodyPr/>
-          <a:lstStyle/>
-          <a:p>
-            <a:endParaRPr lang="en-DE"/>
-          </a:p>
-        </p:txBody>
-      </p:sp>
-      <p:sp>
-        <p:nvSpPr>
-          <p:cNvPr id="24" name="Text 22"/>
-          <p:cNvSpPr/>
-          <p:nvPr/>
-        </p:nvSpPr>
-        <p:spPr>
-          <a:xfrm>
-            <a:off x="7552944" y="2880360"/>
-            <a:ext cx="3611880" cy="246888"/>
-          </a:xfrm>
-          <a:prstGeom prst="rect">
-            <a:avLst/>
-          </a:prstGeom>
-          <a:noFill/>
-          <a:ln/>
-        </p:spPr>
-        <p:txBody>
-          <a:bodyPr wrap="square" lIns="0" tIns="0" rIns="0" bIns="0" rtlCol="0" anchor="ctr">
-            <a:normAutofit fontScale="77500" lnSpcReduction="20000"/>
-          </a:bodyPr>
-          <a:lstStyle/>
-          <a:p>
-            <a:pPr marL="0" indent="0">
-              <a:buNone/>
-            </a:pPr>
-            <a:r>
-              <a:rPr lang="en-US" sz="1220" dirty="0">
-                <a:solidFill>
-                  <a:srgbClr val="1E293B"/>
-                </a:solidFill>
-              </a:rPr>
-              <a:t>Prefer Industrial Ethernet, private 5G, or reserved wireless channels.</a:t>
-            </a:r>
-            <a:endParaRPr lang="en-US" sz="1220" dirty="0"/>
-          </a:p>
-        </p:txBody>
-      </p:sp>
-      <p:sp>
-        <p:nvSpPr>
-          <p:cNvPr id="25" name="Shape 23"/>
-          <p:cNvSpPr/>
-          <p:nvPr/>
-        </p:nvSpPr>
-        <p:spPr>
-          <a:xfrm>
-            <a:off x="7388352" y="3735324"/>
-            <a:ext cx="82296" cy="82296"/>
-          </a:xfrm>
-          <a:prstGeom prst="ellipse">
-            <a:avLst/>
-          </a:prstGeom>
-          <a:solidFill>
-            <a:srgbClr val="06B6D4"/>
-          </a:solidFill>
-          <a:ln w="12700">
-            <a:solidFill>
-              <a:srgbClr val="06B6D4">
-                <a:alpha val="0"/>
-              </a:srgbClr>
-            </a:solidFill>
-            <a:prstDash val="solid"/>
-          </a:ln>
-        </p:spPr>
-        <p:txBody>
-          <a:bodyPr/>
-          <a:lstStyle/>
-          <a:p>
-            <a:endParaRPr lang="en-DE"/>
-          </a:p>
-        </p:txBody>
-      </p:sp>
-      <p:sp>
-        <p:nvSpPr>
-          <p:cNvPr id="26" name="Text 24"/>
-          <p:cNvSpPr/>
-          <p:nvPr/>
-        </p:nvSpPr>
-        <p:spPr>
-          <a:xfrm>
-            <a:off x="7552944" y="3675888"/>
-            <a:ext cx="3657600" cy="246888"/>
-          </a:xfrm>
-          <a:prstGeom prst="rect">
-            <a:avLst/>
-          </a:prstGeom>
-          <a:noFill/>
-          <a:ln/>
-        </p:spPr>
-        <p:txBody>
-          <a:bodyPr wrap="square" lIns="0" tIns="0" rIns="0" bIns="0" rtlCol="0" anchor="ctr">
-            <a:normAutofit fontScale="85000" lnSpcReduction="10000"/>
-          </a:bodyPr>
-          <a:lstStyle/>
-          <a:p>
-            <a:pPr marL="0" indent="0">
-              <a:buNone/>
-            </a:pPr>
-            <a:r>
-              <a:rPr lang="en-US" sz="1220" dirty="0">
-                <a:solidFill>
-                  <a:srgbClr val="1E293B"/>
-                </a:solidFill>
-              </a:rPr>
-              <a:t>Avoid relying only on shared public Wi‑Fi for time-critical control.</a:t>
-            </a:r>
-            <a:endParaRPr lang="en-US" sz="1220" dirty="0"/>
-          </a:p>
-        </p:txBody>
-      </p:sp>
-      <p:sp>
-        <p:nvSpPr>
-          <p:cNvPr id="27" name="Text 25"/>
-          <p:cNvSpPr/>
-          <p:nvPr/>
-        </p:nvSpPr>
-        <p:spPr>
-          <a:xfrm>
-            <a:off x="7360920" y="4846320"/>
-            <a:ext cx="3703320" cy="457200"/>
-          </a:xfrm>
-          <a:prstGeom prst="rect">
-            <a:avLst/>
-          </a:prstGeom>
-          <a:noFill/>
-          <a:ln/>
-        </p:spPr>
-        <p:txBody>
-          <a:bodyPr wrap="square" lIns="254" tIns="254" rIns="254" bIns="254" rtlCol="0" anchor="ctr">
-            <a:normAutofit lnSpcReduction="10000"/>
-          </a:bodyPr>
-          <a:lstStyle/>
-          <a:p>
-            <a:pPr marL="0" indent="0">
-              <a:buNone/>
-            </a:pPr>
-            <a:r>
-              <a:rPr lang="en-US" sz="1500" b="1" dirty="0">
-                <a:solidFill>
-                  <a:srgbClr val="1E293B"/>
-                </a:solidFill>
-              </a:rPr>
-              <a:t>Even in the worse HSHL network, edge was still about 5.1× faster than cloud.</a:t>
-            </a:r>
-            <a:endParaRPr lang="en-US" sz="1500" dirty="0"/>
-          </a:p>
-        </p:txBody>
-      </p:sp>
-    </p:spTree>
-  </p:cSld>
-  <p:clrMapOvr>
-    <a:masterClrMapping/>
-  </p:clrMapOvr>
-</p:sld>
-</file>
-
-<file path=ppt/slides/slide8.xml><?xml version="1.0" encoding="utf-8"?>
+<file path=ppt/slides/slide5.xml><?xml version="1.0" encoding="utf-8"?>
 <p:sld xmlns:a="http://schemas.openxmlformats.org/drawingml/2006/main" xmlns:r="http://schemas.openxmlformats.org/officeDocument/2006/relationships" xmlns:p="http://schemas.openxmlformats.org/presentationml/2006/main">
   <p:cSld name="Slide 8">
     <p:bg>
@@ -9900,7 +5645,7 @@
               <a:buNone/>
             </a:pPr>
             <a:r>
-              <a:rPr lang="en-US" sz="2800" b="1" dirty="0">
+              <a:rPr lang="en-US" sz="2800" b="1">
                 <a:solidFill>
                   <a:srgbClr val="0B172A"/>
                 </a:solidFill>
@@ -9908,22 +5653,136 @@
                 <a:ea typeface="Aptos Display" pitchFamily="34" charset="-122"/>
                 <a:cs typeface="Aptos Display" pitchFamily="34" charset="-120"/>
               </a:rPr>
-              <a:t>Latency relation: what increases delay?</a:t>
-            </a:r>
-            <a:endParaRPr lang="en-US" sz="2800" dirty="0"/>
-          </a:p>
-        </p:txBody>
-      </p:sp>
-      <p:sp>
-        <p:nvSpPr>
-          <p:cNvPr id="5" name="Text 3"/>
-          <p:cNvSpPr/>
-          <p:nvPr/>
-        </p:nvSpPr>
-        <p:spPr>
-          <a:xfrm>
-            <a:off x="530352" y="868680"/>
-            <a:ext cx="10241280" cy="274320"/>
+              <a:t>Latency Formulation</a:t>
+            </a:r>
+            <a:endParaRPr lang="en-US" sz="2800"/>
+          </a:p>
+        </p:txBody>
+      </p:sp>
+      <p:sp>
+        <p:nvSpPr>
+          <p:cNvPr id="7" name="Text 5"/>
+          <p:cNvSpPr/>
+          <p:nvPr/>
+        </p:nvSpPr>
+        <p:spPr>
+          <a:xfrm>
+            <a:off x="11384280" y="6446520"/>
+            <a:ext cx="320040" cy="228600"/>
+          </a:xfrm>
+          <a:prstGeom prst="rect">
+            <a:avLst/>
+          </a:prstGeom>
+          <a:noFill/>
+          <a:ln/>
+        </p:spPr>
+        <p:txBody>
+          <a:bodyPr wrap="square" lIns="0" tIns="0" rIns="0" bIns="0" rtlCol="0" anchor="ctr"/>
+          <a:lstStyle/>
+          <a:p>
+            <a:pPr marL="0" indent="0" algn="r">
+              <a:buNone/>
+            </a:pPr>
+            <a:r>
+              <a:rPr lang="en-US" sz="850" b="1">
+                <a:solidFill>
+                  <a:srgbClr val="64748B"/>
+                </a:solidFill>
+                <a:latin typeface="Aptos" pitchFamily="34" charset="0"/>
+                <a:ea typeface="Aptos" pitchFamily="34" charset="-122"/>
+                <a:cs typeface="Aptos" pitchFamily="34" charset="-120"/>
+              </a:rPr>
+              <a:t>08</a:t>
+            </a:r>
+            <a:endParaRPr lang="en-US" sz="850"/>
+          </a:p>
+        </p:txBody>
+      </p:sp>
+      <p:sp>
+        <p:nvSpPr>
+          <p:cNvPr id="8" name="Text 6"/>
+          <p:cNvSpPr/>
+          <p:nvPr/>
+        </p:nvSpPr>
+        <p:spPr>
+          <a:xfrm>
+            <a:off x="822960" y="1463040"/>
+            <a:ext cx="4434840" cy="713232"/>
+          </a:xfrm>
+          <a:prstGeom prst="rect">
+            <a:avLst/>
+          </a:prstGeom>
+          <a:noFill/>
+          <a:ln/>
+        </p:spPr>
+        <p:txBody>
+          <a:bodyPr wrap="square" lIns="0" tIns="0" rIns="0" bIns="0" rtlCol="0" anchor="ctr"/>
+          <a:lstStyle/>
+          <a:p>
+            <a:pPr marL="0" indent="0">
+              <a:buNone/>
+            </a:pPr>
+            <a:r>
+              <a:rPr lang="en-US" sz="3800" b="1">
+                <a:solidFill>
+                  <a:srgbClr val="2563EB"/>
+                </a:solidFill>
+                <a:latin typeface="Aptos Display" pitchFamily="34" charset="0"/>
+                <a:ea typeface="Aptos Display" pitchFamily="34" charset="-122"/>
+                <a:cs typeface="Aptos Display" pitchFamily="34" charset="-120"/>
+              </a:rPr>
+              <a:t>C = X / L + D / R</a:t>
+            </a:r>
+            <a:endParaRPr lang="en-US" sz="3800"/>
+          </a:p>
+        </p:txBody>
+      </p:sp>
+      <p:sp>
+        <p:nvSpPr>
+          <p:cNvPr id="9" name="Text 7"/>
+          <p:cNvSpPr/>
+          <p:nvPr/>
+        </p:nvSpPr>
+        <p:spPr>
+          <a:xfrm>
+            <a:off x="914400" y="2331720"/>
+            <a:ext cx="2011680" cy="256032"/>
+          </a:xfrm>
+          <a:prstGeom prst="rect">
+            <a:avLst/>
+          </a:prstGeom>
+          <a:noFill/>
+          <a:ln/>
+        </p:spPr>
+        <p:txBody>
+          <a:bodyPr wrap="square" lIns="0" tIns="0" rIns="0" bIns="0" rtlCol="0" anchor="ctr"/>
+          <a:lstStyle/>
+          <a:p>
+            <a:pPr marL="0" indent="0">
+              <a:buNone/>
+            </a:pPr>
+            <a:r>
+              <a:rPr lang="en-US" sz="1400" b="1">
+                <a:solidFill>
+                  <a:srgbClr val="0B172A"/>
+                </a:solidFill>
+              </a:rPr>
+              <a:t>C = latency</a:t>
+            </a:r>
+            <a:endParaRPr lang="en-US" sz="1400"/>
+          </a:p>
+        </p:txBody>
+      </p:sp>
+      <p:sp>
+        <p:nvSpPr>
+          <p:cNvPr id="10" name="Text 8"/>
+          <p:cNvSpPr/>
+          <p:nvPr/>
+        </p:nvSpPr>
+        <p:spPr>
+          <a:xfrm>
+            <a:off x="914400" y="2697480"/>
+            <a:ext cx="5212080" cy="256032"/>
           </a:xfrm>
           <a:prstGeom prst="rect">
             <a:avLst/>
@@ -9941,30 +5800,27 @@
               <a:buNone/>
             </a:pPr>
             <a:r>
-              <a:rPr lang="en-US" sz="1250" dirty="0">
+              <a:rPr lang="en-US" sz="1240">
                 <a:solidFill>
                   <a:srgbClr val="64748B"/>
                 </a:solidFill>
-                <a:latin typeface="Aptos" pitchFamily="34" charset="0"/>
-                <a:ea typeface="Aptos" pitchFamily="34" charset="-122"/>
-                <a:cs typeface="Aptos" pitchFamily="34" charset="-120"/>
-              </a:rPr>
-              <a:t>The paper discusses latency using distance, bandwidth, data rate, and resources.</a:t>
-            </a:r>
-            <a:endParaRPr lang="en-US" sz="1250" dirty="0"/>
-          </a:p>
-        </p:txBody>
-      </p:sp>
-      <p:sp>
-        <p:nvSpPr>
-          <p:cNvPr id="6" name="Text 4"/>
-          <p:cNvSpPr/>
-          <p:nvPr/>
-        </p:nvSpPr>
-        <p:spPr>
-          <a:xfrm>
-            <a:off x="502920" y="6492240"/>
-            <a:ext cx="7772400" cy="201168"/>
+              </a:rPr>
+              <a:t>X = distance  •  L = bandwidth  •  D = data rate  •  R = computing resources</a:t>
+            </a:r>
+            <a:endParaRPr lang="en-US" sz="1240"/>
+          </a:p>
+        </p:txBody>
+      </p:sp>
+      <p:sp>
+        <p:nvSpPr>
+          <p:cNvPr id="11" name="Text 9"/>
+          <p:cNvSpPr/>
+          <p:nvPr/>
+        </p:nvSpPr>
+        <p:spPr>
+          <a:xfrm>
+            <a:off x="822960" y="3703320"/>
+            <a:ext cx="1645920" cy="228600"/>
           </a:xfrm>
           <a:prstGeom prst="rect">
             <a:avLst/>
@@ -9980,205 +5836,14 @@
               <a:buNone/>
             </a:pPr>
             <a:r>
-              <a:rPr lang="en-US" sz="850" dirty="0">
-                <a:solidFill>
-                  <a:srgbClr val="64748B"/>
-                </a:solidFill>
-                <a:latin typeface="Aptos" pitchFamily="34" charset="0"/>
-                <a:ea typeface="Aptos" pitchFamily="34" charset="-122"/>
-                <a:cs typeface="Aptos" pitchFamily="34" charset="-120"/>
-              </a:rPr>
-              <a:t>Edge Computing in Industrial Communication • Sections VII–IX</a:t>
-            </a:r>
-            <a:endParaRPr lang="en-US" sz="850" dirty="0"/>
-          </a:p>
-        </p:txBody>
-      </p:sp>
-      <p:sp>
-        <p:nvSpPr>
-          <p:cNvPr id="7" name="Text 5"/>
-          <p:cNvSpPr/>
-          <p:nvPr/>
-        </p:nvSpPr>
-        <p:spPr>
-          <a:xfrm>
-            <a:off x="11384280" y="6446520"/>
-            <a:ext cx="320040" cy="228600"/>
-          </a:xfrm>
-          <a:prstGeom prst="rect">
-            <a:avLst/>
-          </a:prstGeom>
-          <a:noFill/>
-          <a:ln/>
-        </p:spPr>
-        <p:txBody>
-          <a:bodyPr wrap="square" lIns="0" tIns="0" rIns="0" bIns="0" rtlCol="0" anchor="ctr"/>
-          <a:lstStyle/>
-          <a:p>
-            <a:pPr marL="0" indent="0" algn="r">
-              <a:buNone/>
-            </a:pPr>
-            <a:r>
-              <a:rPr lang="en-US" sz="850" b="1" dirty="0">
-                <a:solidFill>
-                  <a:srgbClr val="64748B"/>
-                </a:solidFill>
-                <a:latin typeface="Aptos" pitchFamily="34" charset="0"/>
-                <a:ea typeface="Aptos" pitchFamily="34" charset="-122"/>
-                <a:cs typeface="Aptos" pitchFamily="34" charset="-120"/>
-              </a:rPr>
-              <a:t>08</a:t>
-            </a:r>
-            <a:endParaRPr lang="en-US" sz="850" dirty="0"/>
-          </a:p>
-        </p:txBody>
-      </p:sp>
-      <p:sp>
-        <p:nvSpPr>
-          <p:cNvPr id="8" name="Text 6"/>
-          <p:cNvSpPr/>
-          <p:nvPr/>
-        </p:nvSpPr>
-        <p:spPr>
-          <a:xfrm>
-            <a:off x="822960" y="1463040"/>
-            <a:ext cx="4434840" cy="713232"/>
-          </a:xfrm>
-          <a:prstGeom prst="rect">
-            <a:avLst/>
-          </a:prstGeom>
-          <a:noFill/>
-          <a:ln/>
-        </p:spPr>
-        <p:txBody>
-          <a:bodyPr wrap="square" lIns="0" tIns="0" rIns="0" bIns="0" rtlCol="0" anchor="ctr"/>
-          <a:lstStyle/>
-          <a:p>
-            <a:pPr marL="0" indent="0">
-              <a:buNone/>
-            </a:pPr>
-            <a:r>
-              <a:rPr lang="en-US" sz="3800" b="1" dirty="0">
-                <a:solidFill>
-                  <a:srgbClr val="2563EB"/>
-                </a:solidFill>
-                <a:latin typeface="Aptos Display" pitchFamily="34" charset="0"/>
-                <a:ea typeface="Aptos Display" pitchFamily="34" charset="-122"/>
-                <a:cs typeface="Aptos Display" pitchFamily="34" charset="-120"/>
-              </a:rPr>
-              <a:t>C = X / L + D / R</a:t>
-            </a:r>
-            <a:endParaRPr lang="en-US" sz="3800" dirty="0"/>
-          </a:p>
-        </p:txBody>
-      </p:sp>
-      <p:sp>
-        <p:nvSpPr>
-          <p:cNvPr id="9" name="Text 7"/>
-          <p:cNvSpPr/>
-          <p:nvPr/>
-        </p:nvSpPr>
-        <p:spPr>
-          <a:xfrm>
-            <a:off x="914400" y="2331720"/>
-            <a:ext cx="2011680" cy="256032"/>
-          </a:xfrm>
-          <a:prstGeom prst="rect">
-            <a:avLst/>
-          </a:prstGeom>
-          <a:noFill/>
-          <a:ln/>
-        </p:spPr>
-        <p:txBody>
-          <a:bodyPr wrap="square" lIns="0" tIns="0" rIns="0" bIns="0" rtlCol="0" anchor="ctr"/>
-          <a:lstStyle/>
-          <a:p>
-            <a:pPr marL="0" indent="0">
-              <a:buNone/>
-            </a:pPr>
-            <a:r>
-              <a:rPr lang="en-US" sz="1400" b="1" dirty="0">
-                <a:solidFill>
-                  <a:srgbClr val="0B172A"/>
-                </a:solidFill>
-              </a:rPr>
-              <a:t>C = latency</a:t>
-            </a:r>
-            <a:endParaRPr lang="en-US" sz="1400" dirty="0"/>
-          </a:p>
-        </p:txBody>
-      </p:sp>
-      <p:sp>
-        <p:nvSpPr>
-          <p:cNvPr id="10" name="Text 8"/>
-          <p:cNvSpPr/>
-          <p:nvPr/>
-        </p:nvSpPr>
-        <p:spPr>
-          <a:xfrm>
-            <a:off x="914400" y="2697480"/>
-            <a:ext cx="5212080" cy="256032"/>
-          </a:xfrm>
-          <a:prstGeom prst="rect">
-            <a:avLst/>
-          </a:prstGeom>
-          <a:noFill/>
-          <a:ln/>
-        </p:spPr>
-        <p:txBody>
-          <a:bodyPr wrap="square" lIns="0" tIns="0" rIns="0" bIns="0" rtlCol="0" anchor="ctr">
-            <a:normAutofit/>
-          </a:bodyPr>
-          <a:lstStyle/>
-          <a:p>
-            <a:pPr marL="0" indent="0">
-              <a:buNone/>
-            </a:pPr>
-            <a:r>
-              <a:rPr lang="en-US" sz="1240" dirty="0">
-                <a:solidFill>
-                  <a:srgbClr val="64748B"/>
-                </a:solidFill>
-              </a:rPr>
-              <a:t>X = distance  •  L = bandwidth  •  D = data rate  •  R = computing resources</a:t>
-            </a:r>
-            <a:endParaRPr lang="en-US" sz="1240" dirty="0"/>
-          </a:p>
-        </p:txBody>
-      </p:sp>
-      <p:sp>
-        <p:nvSpPr>
-          <p:cNvPr id="11" name="Text 9"/>
-          <p:cNvSpPr/>
-          <p:nvPr/>
-        </p:nvSpPr>
-        <p:spPr>
-          <a:xfrm>
-            <a:off x="822960" y="3703320"/>
-            <a:ext cx="1645920" cy="228600"/>
-          </a:xfrm>
-          <a:prstGeom prst="rect">
-            <a:avLst/>
-          </a:prstGeom>
-          <a:noFill/>
-          <a:ln/>
-        </p:spPr>
-        <p:txBody>
-          <a:bodyPr wrap="square" lIns="0" tIns="0" rIns="0" bIns="0" rtlCol="0" anchor="ctr"/>
-          <a:lstStyle/>
-          <a:p>
-            <a:pPr marL="0" indent="0">
-              <a:buNone/>
-            </a:pPr>
-            <a:r>
-              <a:rPr lang="en-US" sz="1500" b="1" dirty="0">
+              <a:rPr lang="en-US" sz="1500" b="1">
                 <a:solidFill>
                   <a:srgbClr val="10B981"/>
                 </a:solidFill>
               </a:rPr>
               <a:t>Edge path</a:t>
             </a:r>
-            <a:endParaRPr lang="en-US" sz="1500" dirty="0"/>
+            <a:endParaRPr lang="en-US" sz="1500"/>
           </a:p>
         </p:txBody>
       </p:sp>
@@ -10238,14 +5903,14 @@
               <a:buNone/>
             </a:pPr>
             <a:r>
-              <a:rPr lang="en-US" sz="1150" b="1" dirty="0">
+              <a:rPr lang="en-US" sz="1150" b="1">
                 <a:solidFill>
                   <a:srgbClr val="10B981"/>
                 </a:solidFill>
               </a:rPr>
               <a:t>short X</a:t>
             </a:r>
-            <a:endParaRPr lang="en-US" sz="1150" dirty="0"/>
+            <a:endParaRPr lang="en-US" sz="1150"/>
           </a:p>
         </p:txBody>
       </p:sp>
@@ -10274,14 +5939,14 @@
               <a:buNone/>
             </a:pPr>
             <a:r>
-              <a:rPr lang="en-US" sz="1500" b="1" dirty="0">
+              <a:rPr lang="en-US" sz="1500" b="1">
                 <a:solidFill>
                   <a:srgbClr val="F59E0B"/>
                 </a:solidFill>
               </a:rPr>
               <a:t>Cloud path</a:t>
             </a:r>
-            <a:endParaRPr lang="en-US" sz="1500" dirty="0"/>
+            <a:endParaRPr lang="en-US" sz="1500"/>
           </a:p>
         </p:txBody>
       </p:sp>
@@ -10341,14 +6006,14 @@
               <a:buNone/>
             </a:pPr>
             <a:r>
-              <a:rPr lang="en-US" sz="1150" b="1" dirty="0">
+              <a:rPr lang="en-US" sz="1150" b="1">
                 <a:solidFill>
                   <a:srgbClr val="F59E0B"/>
                 </a:solidFill>
               </a:rPr>
               <a:t>large internet X</a:t>
             </a:r>
-            <a:endParaRPr lang="en-US" sz="1150" dirty="0"/>
+            <a:endParaRPr lang="en-US" sz="1150"/>
           </a:p>
         </p:txBody>
       </p:sp>
@@ -10414,18 +6079,18 @@
           <a:bodyPr wrap="square" lIns="0" tIns="0" rIns="0" bIns="0" rtlCol="0" anchor="ctr"/>
           <a:lstStyle/>
           <a:p>
-            <a:pPr marL="0" indent="0">
-              <a:buNone/>
-            </a:pPr>
-            <a:r>
-              <a:rPr lang="en-US" sz="1800" b="1" dirty="0">
+            <a:r>
+              <a:rPr lang="en-US" b="1">
                 <a:solidFill>
                   <a:srgbClr val="0B172A"/>
                 </a:solidFill>
-              </a:rPr>
-              <a:t>Interpretation</a:t>
-            </a:r>
-            <a:endParaRPr lang="en-US" sz="1800" dirty="0"/>
+                <a:latin typeface="Aptos Display" pitchFamily="34" charset="0"/>
+                <a:ea typeface="Aptos Display" pitchFamily="34" charset="-122"/>
+                <a:cs typeface="Aptos Display" pitchFamily="34" charset="-120"/>
+              </a:rPr>
+              <a:t>What increases delay?</a:t>
+            </a:r>
+            <a:endParaRPr lang="en-US" sz="1800"/>
           </a:p>
         </p:txBody>
       </p:sp>
@@ -10482,7 +6147,7 @@
         </p:spPr>
         <p:txBody>
           <a:bodyPr wrap="square" lIns="0" tIns="0" rIns="0" bIns="0" rtlCol="0" anchor="ctr">
-            <a:normAutofit fontScale="85000" lnSpcReduction="10000"/>
+            <a:noAutofit/>
           </a:bodyPr>
           <a:lstStyle/>
           <a:p>
@@ -10490,14 +6155,14 @@
               <a:buNone/>
             </a:pPr>
             <a:r>
-              <a:rPr lang="en-US" sz="1220" dirty="0">
+              <a:rPr lang="en-US" sz="1100">
                 <a:solidFill>
                   <a:srgbClr val="1E293B"/>
                 </a:solidFill>
               </a:rPr>
               <a:t>Edge reduces the distance X because processing is local.</a:t>
             </a:r>
-            <a:endParaRPr lang="en-US" sz="1220" dirty="0"/>
+            <a:endParaRPr lang="en-US" sz="1100"/>
           </a:p>
         </p:txBody>
       </p:sp>
@@ -10562,14 +6227,14 @@
               <a:buNone/>
             </a:pPr>
             <a:r>
-              <a:rPr lang="en-US" sz="1220" dirty="0">
+              <a:rPr lang="en-US" sz="1220">
                 <a:solidFill>
                   <a:srgbClr val="1E293B"/>
                 </a:solidFill>
               </a:rPr>
               <a:t>A shared network lowers available bandwidth L.</a:t>
             </a:r>
-            <a:endParaRPr lang="en-US" sz="1220" dirty="0"/>
+            <a:endParaRPr lang="en-US" sz="1220"/>
           </a:p>
         </p:txBody>
       </p:sp>
@@ -10626,7 +6291,7 @@
         </p:spPr>
         <p:txBody>
           <a:bodyPr wrap="square" lIns="0" tIns="0" rIns="0" bIns="0" rtlCol="0" anchor="ctr">
-            <a:normAutofit fontScale="77500" lnSpcReduction="20000"/>
+            <a:noAutofit/>
           </a:bodyPr>
           <a:lstStyle/>
           <a:p>
@@ -10634,14 +6299,14 @@
               <a:buNone/>
             </a:pPr>
             <a:r>
-              <a:rPr lang="en-US" sz="1220" dirty="0">
+              <a:rPr lang="en-US" sz="1100">
                 <a:solidFill>
                   <a:srgbClr val="1E293B"/>
                 </a:solidFill>
               </a:rPr>
               <a:t>Cloud routes are longer, so strict millisecond response is harder.</a:t>
             </a:r>
-            <a:endParaRPr lang="en-US" sz="1220" dirty="0"/>
+            <a:endParaRPr lang="en-US" sz="1100"/>
           </a:p>
         </p:txBody>
       </p:sp>
@@ -10653,7 +6318,7 @@
 </p:sld>
 </file>
 
-<file path=ppt/slides/slide9.xml><?xml version="1.0" encoding="utf-8"?>
+<file path=ppt/slides/slide6.xml><?xml version="1.0" encoding="utf-8"?>
 <p:sld xmlns:a="http://schemas.openxmlformats.org/drawingml/2006/main" xmlns:r="http://schemas.openxmlformats.org/officeDocument/2006/relationships" xmlns:p="http://schemas.openxmlformats.org/presentationml/2006/main">
   <p:cSld>
     <p:spTree>
@@ -10724,7 +6389,7 @@
           <a:lstStyle/>
           <a:p>
             <a:r>
-              <a:rPr lang="en-US" sz="3467" b="1" dirty="0">
+              <a:rPr lang="en-US" sz="3467" b="1">
                 <a:solidFill>
                   <a:srgbClr val="FFFFFF"/>
                 </a:solidFill>
@@ -10734,44 +6399,7 @@
               </a:rPr>
               <a:t>Edge vs. Cloud: Full Comparison</a:t>
             </a:r>
-            <a:endParaRPr lang="en-US" sz="3467" dirty="0"/>
-          </a:p>
-        </p:txBody>
-      </p:sp>
-      <p:sp>
-        <p:nvSpPr>
-          <p:cNvPr id="4" name="Text 2"/>
-          <p:cNvSpPr/>
-          <p:nvPr/>
-        </p:nvSpPr>
-        <p:spPr>
-          <a:xfrm>
-            <a:off x="9387840" y="0"/>
-            <a:ext cx="2438400" cy="1280160"/>
-          </a:xfrm>
-          <a:prstGeom prst="rect">
-            <a:avLst/>
-          </a:prstGeom>
-          <a:noFill/>
-          <a:ln/>
-        </p:spPr>
-        <p:txBody>
-          <a:bodyPr wrap="square" lIns="0" tIns="0" rIns="0" bIns="0" rtlCol="0" anchor="ctr"/>
-          <a:lstStyle/>
-          <a:p>
-            <a:pPr algn="r"/>
-            <a:r>
-              <a:rPr lang="en-US" sz="1733" b="1" dirty="0">
-                <a:solidFill>
-                  <a:srgbClr val="00B4D8"/>
-                </a:solidFill>
-                <a:latin typeface="Calibri" pitchFamily="34" charset="0"/>
-                <a:ea typeface="Calibri" pitchFamily="34" charset="-122"/>
-                <a:cs typeface="Calibri" pitchFamily="34" charset="-120"/>
-              </a:rPr>
-              <a:t>§ IX · Table III</a:t>
-            </a:r>
-            <a:endParaRPr lang="en-US" sz="1733" dirty="0"/>
+            <a:endParaRPr lang="en-US" sz="3467"/>
           </a:p>
         </p:txBody>
       </p:sp>
@@ -10781,10 +6409,16 @@
           <p:cNvGraphicFramePr>
             <a:graphicFrameLocks noGrp="1"/>
           </p:cNvGraphicFramePr>
-          <p:nvPr/>
+          <p:nvPr>
+            <p:extLst>
+              <p:ext uri="{D42A27DB-BD31-4B8C-83A1-F6EECF244321}">
+                <p14:modId xmlns:p14="http://schemas.microsoft.com/office/powerpoint/2010/main" val="3942223678"/>
+              </p:ext>
+            </p:extLst>
+          </p:nvPr>
         </p:nvGraphicFramePr>
         <p:xfrm>
-          <a:off x="426720" y="1402080"/>
+          <a:off x="475881" y="1923189"/>
           <a:ext cx="11338560" cy="3998976"/>
         </p:xfrm>
         <a:graphic>
@@ -10824,7 +6458,7 @@
                         <a:buNone/>
                       </a:pPr>
                       <a:r>
-                        <a:rPr lang="en-US" sz="1600" b="1" dirty="0">
+                        <a:rPr lang="en-US" sz="1600" b="1">
                           <a:solidFill>
                             <a:srgbClr val="FFFFFF"/>
                           </a:solidFill>
@@ -10834,7 +6468,7 @@
                         </a:rPr>
                         <a:t>Criterion</a:t>
                       </a:r>
-                      <a:endParaRPr lang="en-US" sz="1600" dirty="0">
+                      <a:endParaRPr lang="en-US" sz="1600">
                         <a:latin typeface="Calibri" charset="0"/>
                         <a:ea typeface="Calibri" charset="0"/>
                         <a:cs typeface="Calibri" charset="0"/>
@@ -10892,7 +6526,7 @@
                         <a:buNone/>
                       </a:pPr>
                       <a:r>
-                        <a:rPr lang="en-US" sz="1600" b="1" dirty="0">
+                        <a:rPr lang="en-US" sz="1600" b="1">
                           <a:solidFill>
                             <a:srgbClr val="FFFFFF"/>
                           </a:solidFill>
@@ -10902,7 +6536,7 @@
                         </a:rPr>
                         <a:t>Edge Computing</a:t>
                       </a:r>
-                      <a:endParaRPr lang="en-US" sz="1600" dirty="0">
+                      <a:endParaRPr lang="en-US" sz="1600">
                         <a:latin typeface="Calibri" charset="0"/>
                         <a:ea typeface="Calibri" charset="0"/>
                         <a:cs typeface="Calibri" charset="0"/>
@@ -10960,7 +6594,7 @@
                         <a:buNone/>
                       </a:pPr>
                       <a:r>
-                        <a:rPr lang="en-US" sz="1600" b="1" dirty="0">
+                        <a:rPr lang="en-US" sz="1600" b="1">
                           <a:solidFill>
                             <a:srgbClr val="FFFFFF"/>
                           </a:solidFill>
@@ -10970,7 +6604,7 @@
                         </a:rPr>
                         <a:t>Cloud Computing</a:t>
                       </a:r>
-                      <a:endParaRPr lang="en-US" sz="1600" dirty="0">
+                      <a:endParaRPr lang="en-US" sz="1600">
                         <a:latin typeface="Calibri" charset="0"/>
                         <a:ea typeface="Calibri" charset="0"/>
                         <a:cs typeface="Calibri" charset="0"/>
@@ -11035,7 +6669,7 @@
                         <a:buNone/>
                       </a:pPr>
                       <a:r>
-                        <a:rPr lang="en-US" sz="1600" dirty="0">
+                        <a:rPr lang="en-US" sz="1600">
                           <a:solidFill>
                             <a:srgbClr val="1E293B"/>
                           </a:solidFill>
@@ -11045,7 +6679,7 @@
                         </a:rPr>
                         <a:t>Latency (stable network)</a:t>
                       </a:r>
-                      <a:endParaRPr lang="en-US" sz="1600" dirty="0">
+                      <a:endParaRPr lang="en-US" sz="1600">
                         <a:latin typeface="Calibri" charset="0"/>
                         <a:ea typeface="Calibri" charset="0"/>
                         <a:cs typeface="Calibri" charset="0"/>
@@ -11100,7 +6734,7 @@
                         <a:buNone/>
                       </a:pPr>
                       <a:r>
-                        <a:rPr lang="en-US" sz="1600" b="1" dirty="0">
+                        <a:rPr lang="en-US" sz="1600" b="1">
                           <a:solidFill>
                             <a:srgbClr val="047857"/>
                           </a:solidFill>
@@ -11110,7 +6744,7 @@
                         </a:rPr>
                         <a:t>95 ms</a:t>
                       </a:r>
-                      <a:endParaRPr lang="en-US" sz="1600" dirty="0">
+                      <a:endParaRPr lang="en-US" sz="1600">
                         <a:latin typeface="Calibri" charset="0"/>
                         <a:ea typeface="Calibri" charset="0"/>
                         <a:cs typeface="Calibri" charset="0"/>
@@ -11168,7 +6802,7 @@
                         <a:buNone/>
                       </a:pPr>
                       <a:r>
-                        <a:rPr lang="en-US" sz="1600" b="1" dirty="0">
+                        <a:rPr lang="en-US" sz="1600" b="1">
                           <a:solidFill>
                             <a:srgbClr val="92400E"/>
                           </a:solidFill>
@@ -11178,7 +6812,7 @@
                         </a:rPr>
                         <a:t>510 ms</a:t>
                       </a:r>
-                      <a:endParaRPr lang="en-US" sz="1600" dirty="0">
+                      <a:endParaRPr lang="en-US" sz="1600">
                         <a:latin typeface="Calibri" charset="0"/>
                         <a:ea typeface="Calibri" charset="0"/>
                         <a:cs typeface="Calibri" charset="0"/>
@@ -11243,7 +6877,7 @@
                         <a:buNone/>
                       </a:pPr>
                       <a:r>
-                        <a:rPr lang="en-US" sz="1600" dirty="0">
+                        <a:rPr lang="en-US" sz="1600">
                           <a:solidFill>
                             <a:srgbClr val="1E293B"/>
                           </a:solidFill>
@@ -11253,7 +6887,7 @@
                         </a:rPr>
                         <a:t>Latency (shared network)</a:t>
                       </a:r>
-                      <a:endParaRPr lang="en-US" sz="1600" dirty="0">
+                      <a:endParaRPr lang="en-US" sz="1600">
                         <a:latin typeface="Calibri" charset="0"/>
                         <a:ea typeface="Calibri" charset="0"/>
                         <a:cs typeface="Calibri" charset="0"/>
@@ -11308,7 +6942,7 @@
                         <a:buNone/>
                       </a:pPr>
                       <a:r>
-                        <a:rPr lang="en-US" sz="1600" b="1" dirty="0">
+                        <a:rPr lang="en-US" sz="1600" b="1">
                           <a:solidFill>
                             <a:srgbClr val="047857"/>
                           </a:solidFill>
@@ -11318,7 +6952,7 @@
                         </a:rPr>
                         <a:t>422 ms</a:t>
                       </a:r>
-                      <a:endParaRPr lang="en-US" sz="1600" dirty="0">
+                      <a:endParaRPr lang="en-US" sz="1600">
                         <a:latin typeface="Calibri" charset="0"/>
                         <a:ea typeface="Calibri" charset="0"/>
                         <a:cs typeface="Calibri" charset="0"/>
@@ -11376,7 +7010,7 @@
                         <a:buNone/>
                       </a:pPr>
                       <a:r>
-                        <a:rPr lang="en-US" sz="1600" b="1" dirty="0">
+                        <a:rPr lang="en-US" sz="1600" b="1">
                           <a:solidFill>
                             <a:srgbClr val="DC2626"/>
                           </a:solidFill>
@@ -11386,7 +7020,7 @@
                         </a:rPr>
                         <a:t>2,170 ms</a:t>
                       </a:r>
-                      <a:endParaRPr lang="en-US" sz="1600" dirty="0">
+                      <a:endParaRPr lang="en-US" sz="1600">
                         <a:latin typeface="Calibri" charset="0"/>
                         <a:ea typeface="Calibri" charset="0"/>
                         <a:cs typeface="Calibri" charset="0"/>
@@ -11451,7 +7085,7 @@
                         <a:buNone/>
                       </a:pPr>
                       <a:r>
-                        <a:rPr lang="en-US" sz="1600" dirty="0">
+                        <a:rPr lang="en-US" sz="1600">
                           <a:solidFill>
                             <a:srgbClr val="1E293B"/>
                           </a:solidFill>
@@ -11461,7 +7095,7 @@
                         </a:rPr>
                         <a:t>Speed advantage</a:t>
                       </a:r>
-                      <a:endParaRPr lang="en-US" sz="1600" dirty="0">
+                      <a:endParaRPr lang="en-US" sz="1600">
                         <a:latin typeface="Calibri" charset="0"/>
                         <a:ea typeface="Calibri" charset="0"/>
                         <a:cs typeface="Calibri" charset="0"/>
@@ -11516,7 +7150,7 @@
                         <a:buNone/>
                       </a:pPr>
                       <a:r>
-                        <a:rPr lang="en-US" sz="1600" b="1" dirty="0">
+                        <a:rPr lang="en-US" sz="1600" b="1">
                           <a:solidFill>
                             <a:srgbClr val="1D4ED8"/>
                           </a:solidFill>
@@ -11526,7 +7160,7 @@
                         </a:rPr>
                         <a:t>5.1× – 5.4× faster in every test</a:t>
                       </a:r>
-                      <a:endParaRPr lang="en-US" sz="1600" dirty="0">
+                      <a:endParaRPr lang="en-US" sz="1600">
                         <a:latin typeface="Calibri" charset="0"/>
                         <a:ea typeface="Calibri" charset="0"/>
                         <a:cs typeface="Calibri" charset="0"/>
@@ -11601,7 +7235,7 @@
                         <a:buNone/>
                       </a:pPr>
                       <a:r>
-                        <a:rPr lang="en-US" sz="1600" dirty="0">
+                        <a:rPr lang="en-US" sz="1600">
                           <a:solidFill>
                             <a:srgbClr val="1E293B"/>
                           </a:solidFill>
@@ -11611,7 +7245,7 @@
                         </a:rPr>
                         <a:t>Offline operation</a:t>
                       </a:r>
-                      <a:endParaRPr lang="en-US" sz="1600" dirty="0">
+                      <a:endParaRPr lang="en-US" sz="1600">
                         <a:latin typeface="Calibri" charset="0"/>
                         <a:ea typeface="Calibri" charset="0"/>
                         <a:cs typeface="Calibri" charset="0"/>
@@ -11666,7 +7300,7 @@
                         <a:buNone/>
                       </a:pPr>
                       <a:r>
-                        <a:rPr lang="en-US" sz="1600" b="1" dirty="0">
+                        <a:rPr lang="en-US" sz="1600" b="1">
                           <a:solidFill>
                             <a:srgbClr val="047857"/>
                           </a:solidFill>
@@ -11676,7 +7310,7 @@
                         </a:rPr>
                         <a:t>✓  Yes</a:t>
                       </a:r>
-                      <a:endParaRPr lang="en-US" sz="1600" dirty="0">
+                      <a:endParaRPr lang="en-US" sz="1600">
                         <a:latin typeface="Calibri" charset="0"/>
                         <a:ea typeface="Calibri" charset="0"/>
                         <a:cs typeface="Calibri" charset="0"/>
@@ -11734,7 +7368,7 @@
                         <a:buNone/>
                       </a:pPr>
                       <a:r>
-                        <a:rPr lang="en-US" sz="1600" b="1" dirty="0">
+                        <a:rPr lang="en-US" sz="1600" b="1">
                           <a:solidFill>
                             <a:srgbClr val="DC2626"/>
                           </a:solidFill>
@@ -11744,7 +7378,7 @@
                         </a:rPr>
                         <a:t>✗  No</a:t>
                       </a:r>
-                      <a:endParaRPr lang="en-US" sz="1600" dirty="0">
+                      <a:endParaRPr lang="en-US" sz="1600">
                         <a:latin typeface="Calibri" charset="0"/>
                         <a:ea typeface="Calibri" charset="0"/>
                         <a:cs typeface="Calibri" charset="0"/>
@@ -11809,7 +7443,7 @@
                         <a:buNone/>
                       </a:pPr>
                       <a:r>
-                        <a:rPr lang="en-US" sz="1600" dirty="0">
+                        <a:rPr lang="en-US" sz="1600">
                           <a:solidFill>
                             <a:srgbClr val="1E293B"/>
                           </a:solidFill>
@@ -11819,7 +7453,7 @@
                         </a:rPr>
                         <a:t>Suitable for real-time</a:t>
                       </a:r>
-                      <a:endParaRPr lang="en-US" sz="1600" dirty="0">
+                      <a:endParaRPr lang="en-US" sz="1600">
                         <a:latin typeface="Calibri" charset="0"/>
                         <a:ea typeface="Calibri" charset="0"/>
                         <a:cs typeface="Calibri" charset="0"/>
@@ -11874,7 +7508,7 @@
                         <a:buNone/>
                       </a:pPr>
                       <a:r>
-                        <a:rPr lang="en-US" sz="1600" b="1" dirty="0">
+                        <a:rPr lang="en-US" sz="1600" b="1">
                           <a:solidFill>
                             <a:srgbClr val="047857"/>
                           </a:solidFill>
@@ -11884,7 +7518,7 @@
                         </a:rPr>
                         <a:t>✓  Yes</a:t>
                       </a:r>
-                      <a:endParaRPr lang="en-US" sz="1600" dirty="0">
+                      <a:endParaRPr lang="en-US" sz="1600">
                         <a:latin typeface="Calibri" charset="0"/>
                         <a:ea typeface="Calibri" charset="0"/>
                         <a:cs typeface="Calibri" charset="0"/>
@@ -11942,7 +7576,7 @@
                         <a:buNone/>
                       </a:pPr>
                       <a:r>
-                        <a:rPr lang="en-US" sz="1600" dirty="0">
+                        <a:rPr lang="en-US" sz="1600">
                           <a:solidFill>
                             <a:srgbClr val="92400E"/>
                           </a:solidFill>
@@ -11952,7 +7586,7 @@
                         </a:rPr>
                         <a:t>Limited</a:t>
                       </a:r>
-                      <a:endParaRPr lang="en-US" sz="1600" dirty="0">
+                      <a:endParaRPr lang="en-US" sz="1600">
                         <a:latin typeface="Calibri" charset="0"/>
                         <a:ea typeface="Calibri" charset="0"/>
                         <a:cs typeface="Calibri" charset="0"/>
@@ -12017,7 +7651,7 @@
                         <a:buNone/>
                       </a:pPr>
                       <a:r>
-                        <a:rPr lang="en-US" sz="1600" dirty="0">
+                        <a:rPr lang="en-US" sz="1600">
                           <a:solidFill>
                             <a:srgbClr val="1E293B"/>
                           </a:solidFill>
@@ -12027,7 +7661,7 @@
                         </a:rPr>
                         <a:t>Network dependency</a:t>
                       </a:r>
-                      <a:endParaRPr lang="en-US" sz="1600" dirty="0">
+                      <a:endParaRPr lang="en-US" sz="1600">
                         <a:latin typeface="Calibri" charset="0"/>
                         <a:ea typeface="Calibri" charset="0"/>
                         <a:cs typeface="Calibri" charset="0"/>
@@ -12082,7 +7716,7 @@
                         <a:buNone/>
                       </a:pPr>
                       <a:r>
-                        <a:rPr lang="en-US" sz="1600" dirty="0">
+                        <a:rPr lang="en-US" sz="1600">
                           <a:solidFill>
                             <a:srgbClr val="047857"/>
                           </a:solidFill>
@@ -12092,7 +7726,7 @@
                         </a:rPr>
                         <a:t>Local network</a:t>
                       </a:r>
-                      <a:endParaRPr lang="en-US" sz="1600" dirty="0">
+                      <a:endParaRPr lang="en-US" sz="1600">
                         <a:latin typeface="Calibri" charset="0"/>
                         <a:ea typeface="Calibri" charset="0"/>
                         <a:cs typeface="Calibri" charset="0"/>
@@ -12150,7 +7784,7 @@
                         <a:buNone/>
                       </a:pPr>
                       <a:r>
-                        <a:rPr lang="en-US" sz="1600" dirty="0">
+                        <a:rPr lang="en-US" sz="1600">
                           <a:solidFill>
                             <a:srgbClr val="92400E"/>
                           </a:solidFill>
@@ -12160,7 +7794,7 @@
                         </a:rPr>
                         <a:t>Internet required</a:t>
                       </a:r>
-                      <a:endParaRPr lang="en-US" sz="1600" dirty="0">
+                      <a:endParaRPr lang="en-US" sz="1600">
                         <a:latin typeface="Calibri" charset="0"/>
                         <a:ea typeface="Calibri" charset="0"/>
                         <a:cs typeface="Calibri" charset="0"/>
@@ -12225,7 +7859,7 @@
                         <a:buNone/>
                       </a:pPr>
                       <a:r>
-                        <a:rPr lang="en-US" sz="1600" dirty="0">
+                        <a:rPr lang="en-US" sz="1600">
                           <a:solidFill>
                             <a:srgbClr val="1E293B"/>
                           </a:solidFill>
@@ -12235,7 +7869,7 @@
                         </a:rPr>
                         <a:t>Storage &amp; analysis scale</a:t>
                       </a:r>
-                      <a:endParaRPr lang="en-US" sz="1600" dirty="0">
+                      <a:endParaRPr lang="en-US" sz="1600">
                         <a:latin typeface="Calibri" charset="0"/>
                         <a:ea typeface="Calibri" charset="0"/>
                         <a:cs typeface="Calibri" charset="0"/>
@@ -12290,7 +7924,7 @@
                         <a:buNone/>
                       </a:pPr>
                       <a:r>
-                        <a:rPr lang="en-US" sz="1600" dirty="0">
+                        <a:rPr lang="en-US" sz="1600">
                           <a:solidFill>
                             <a:srgbClr val="64748B"/>
                           </a:solidFill>
@@ -12300,7 +7934,7 @@
                         </a:rPr>
                         <a:t>Limited</a:t>
                       </a:r>
-                      <a:endParaRPr lang="en-US" sz="1600" dirty="0">
+                      <a:endParaRPr lang="en-US" sz="1600">
                         <a:latin typeface="Calibri" charset="0"/>
                         <a:ea typeface="Calibri" charset="0"/>
                         <a:cs typeface="Calibri" charset="0"/>
@@ -12358,7 +7992,7 @@
                         <a:buNone/>
                       </a:pPr>
                       <a:r>
-                        <a:rPr lang="en-US" sz="1600" b="1" dirty="0">
+                        <a:rPr lang="en-US" sz="1600" b="1">
                           <a:solidFill>
                             <a:srgbClr val="047857"/>
                           </a:solidFill>
@@ -12368,7 +8002,7 @@
                         </a:rPr>
                         <a:t>✓  High</a:t>
                       </a:r>
-                      <a:endParaRPr lang="en-US" sz="1600" dirty="0">
+                      <a:endParaRPr lang="en-US" sz="1600">
                         <a:latin typeface="Calibri" charset="0"/>
                         <a:ea typeface="Calibri" charset="0"/>
                         <a:cs typeface="Calibri" charset="0"/>
@@ -12429,48 +8063,14 @@
       </p:graphicFrame>
       <p:sp>
         <p:nvSpPr>
-          <p:cNvPr id="6" name="Shape 3"/>
-          <p:cNvSpPr/>
-          <p:nvPr/>
-        </p:nvSpPr>
-        <p:spPr>
-          <a:xfrm>
-            <a:off x="426720" y="5888736"/>
-            <a:ext cx="11338560" cy="853440"/>
-          </a:xfrm>
-          <a:prstGeom prst="roundRect">
-            <a:avLst>
-              <a:gd name="adj" fmla="val 11429"/>
-            </a:avLst>
-          </a:prstGeom>
-          <a:solidFill>
-            <a:srgbClr val="EFF6FF"/>
-          </a:solidFill>
-          <a:ln w="12700">
-            <a:solidFill>
-              <a:srgbClr val="BFDBFE"/>
-            </a:solidFill>
-            <a:prstDash val="solid"/>
-          </a:ln>
-        </p:spPr>
-        <p:txBody>
-          <a:bodyPr/>
-          <a:lstStyle/>
-          <a:p>
-            <a:endParaRPr lang="en-DE" sz="2400"/>
-          </a:p>
-        </p:txBody>
-      </p:sp>
-      <p:sp>
-        <p:nvSpPr>
-          <p:cNvPr id="7" name="Text 4"/>
-          <p:cNvSpPr/>
-          <p:nvPr/>
-        </p:nvSpPr>
-        <p:spPr>
-          <a:xfrm>
-            <a:off x="670560" y="5949696"/>
-            <a:ext cx="10972800" cy="731520"/>
+          <p:cNvPr id="36" name="Text 34"/>
+          <p:cNvSpPr/>
+          <p:nvPr/>
+        </p:nvSpPr>
+        <p:spPr>
+          <a:xfrm>
+            <a:off x="854915" y="6268161"/>
+            <a:ext cx="9966960" cy="292608"/>
           </a:xfrm>
           <a:prstGeom prst="rect">
             <a:avLst/>
@@ -12479,32 +8079,23 @@
           <a:ln/>
         </p:spPr>
         <p:txBody>
-          <a:bodyPr wrap="square" rtlCol="0" anchor="ctr"/>
-          <a:lstStyle/>
-          <a:p>
-            <a:r>
-              <a:rPr lang="en-US" sz="1467" b="1" dirty="0">
-                <a:solidFill>
-                  <a:srgbClr val="1D4ED8"/>
-                </a:solidFill>
-                <a:latin typeface="Calibri" pitchFamily="34" charset="0"/>
-                <a:ea typeface="Calibri" pitchFamily="34" charset="-122"/>
-                <a:cs typeface="Calibri" pitchFamily="34" charset="-120"/>
-              </a:rPr>
-              <a:t>Conclusion: </a:t>
-            </a:r>
-            <a:r>
-              <a:rPr lang="en-US" sz="1467" dirty="0">
-                <a:solidFill>
-                  <a:srgbClr val="334155"/>
-                </a:solidFill>
-                <a:latin typeface="Calibri" pitchFamily="34" charset="0"/>
-                <a:ea typeface="Calibri" pitchFamily="34" charset="-122"/>
-                <a:cs typeface="Calibri" pitchFamily="34" charset="-120"/>
-              </a:rPr>
-              <a:t>A hybrid architecture is optimal — edge layer for latency-sensitive tasks (fault detection, process control, safety response); cloud layer for large-scale storage, model training, and enterprise reporting.</a:t>
-            </a:r>
-            <a:endParaRPr lang="en-US" sz="1467" dirty="0"/>
+          <a:bodyPr wrap="square" lIns="0" tIns="0" rIns="0" bIns="0" rtlCol="0" anchor="ctr">
+            <a:normAutofit/>
+          </a:bodyPr>
+          <a:lstStyle/>
+          <a:p>
+            <a:pPr marL="0" indent="0" algn="ctr">
+              <a:buNone/>
+            </a:pPr>
+            <a:r>
+              <a:rPr lang="en-US" sz="1500" b="1">
+                <a:solidFill>
+                  <a:srgbClr val="0B172A"/>
+                </a:solidFill>
+              </a:rPr>
+              <a:t>Edge is best for fast local actions. Cloud is best for heavy storage, training, reporting, and long-term analytics.</a:t>
+            </a:r>
+            <a:endParaRPr lang="en-US" sz="1500"/>
           </a:p>
         </p:txBody>
       </p:sp>

--- a/Presentation/Edge_vs_Cloud_Latency_Presentation.pptx
+++ b/Presentation/Edge_vs_Cloud_Latency_Presentation.pptx
@@ -5,15 +5,16 @@
     <p:sldMasterId id="2147483648" r:id="rId1"/>
   </p:sldMasterIdLst>
   <p:notesMasterIdLst>
-    <p:notesMasterId r:id="rId8"/>
+    <p:notesMasterId r:id="rId9"/>
   </p:notesMasterIdLst>
   <p:sldIdLst>
-    <p:sldId id="257" r:id="rId2"/>
-    <p:sldId id="258" r:id="rId3"/>
-    <p:sldId id="259" r:id="rId4"/>
-    <p:sldId id="260" r:id="rId5"/>
-    <p:sldId id="263" r:id="rId6"/>
-    <p:sldId id="267" r:id="rId7"/>
+    <p:sldId id="268" r:id="rId2"/>
+    <p:sldId id="257" r:id="rId3"/>
+    <p:sldId id="258" r:id="rId4"/>
+    <p:sldId id="259" r:id="rId5"/>
+    <p:sldId id="260" r:id="rId6"/>
+    <p:sldId id="263" r:id="rId7"/>
+    <p:sldId id="267" r:id="rId8"/>
   </p:sldIdLst>
   <p:sldSz cx="12192000" cy="6858000"/>
   <p:notesSz cx="6858000" cy="12192000"/>
@@ -109,6 +110,11 @@
       </a:defRPr>
     </a:lvl9pPr>
   </p:defaultTextStyle>
+  <p:extLst>
+    <p:ext uri="{EFAFB233-063F-42B5-8137-9DF3F51BA10A}">
+      <p15:sldGuideLst xmlns:p15="http://schemas.microsoft.com/office/powerpoint/2012/main"/>
+    </p:ext>
+  </p:extLst>
 </p:presentation>
 </file>
 
@@ -578,7 +584,13 @@
   <p:cSld>
     <p:spTree>
       <p:nvGrpSpPr>
-        <p:cNvPr id="1" name=""/>
+        <p:cNvPr id="1" name="">
+          <a:extLst>
+            <a:ext uri="{FF2B5EF4-FFF2-40B4-BE49-F238E27FC236}">
+              <a16:creationId xmlns:a16="http://schemas.microsoft.com/office/drawing/2014/main" id="{6E83D3CC-7D84-F18C-673B-6219129F1581}"/>
+            </a:ext>
+          </a:extLst>
+        </p:cNvPr>
         <p:cNvGrpSpPr/>
         <p:nvPr/>
       </p:nvGrpSpPr>
@@ -592,7 +604,13 @@
       </p:grpSpPr>
       <p:sp>
         <p:nvSpPr>
-          <p:cNvPr id="2" name="Slide Image Placeholder 1"/>
+          <p:cNvPr id="2" name="Slide Image Placeholder 1">
+            <a:extLst>
+              <a:ext uri="{FF2B5EF4-FFF2-40B4-BE49-F238E27FC236}">
+                <a16:creationId xmlns:a16="http://schemas.microsoft.com/office/drawing/2014/main" id="{54B12D27-7ADB-1645-DBB0-3D13C0BFB1AC}"/>
+              </a:ext>
+            </a:extLst>
+          </p:cNvPr>
           <p:cNvSpPr>
             <a:spLocks noGrp="1" noRot="1" noChangeAspect="1"/>
           </p:cNvSpPr>
@@ -604,7 +622,13 @@
       </p:sp>
       <p:sp>
         <p:nvSpPr>
-          <p:cNvPr id="3" name="Notes Placeholder 2"/>
+          <p:cNvPr id="3" name="Notes Placeholder 2">
+            <a:extLst>
+              <a:ext uri="{FF2B5EF4-FFF2-40B4-BE49-F238E27FC236}">
+                <a16:creationId xmlns:a16="http://schemas.microsoft.com/office/drawing/2014/main" id="{89842DB5-B9B2-A733-A73E-B8C58624D907}"/>
+              </a:ext>
+            </a:extLst>
+          </p:cNvPr>
           <p:cNvSpPr>
             <a:spLocks noGrp="1"/>
           </p:cNvSpPr>
@@ -619,14 +643,20 @@
           <a:p>
             <a:r>
               <a:rPr lang="en-US"/>
-              <a:t>Explain that latency means the full round-trip time. The test used a mobile phone as the client, a laptop as the local edge server, and an external internet server for cloud comparison.</a:t>
-            </a:r>
-          </a:p>
-        </p:txBody>
-      </p:sp>
-      <p:sp>
-        <p:nvSpPr>
-          <p:cNvPr id="4" name="Slide Number Placeholder 3"/>
+              <a:t>Say that in the edge test, the laptop acts like a small local server. The phone sends data over the same Wi-Fi network, the laptop processes it, and the response comes back without going to a remote cloud server.</a:t>
+            </a:r>
+          </a:p>
+        </p:txBody>
+      </p:sp>
+      <p:sp>
+        <p:nvSpPr>
+          <p:cNvPr id="4" name="Slide Number Placeholder 3">
+            <a:extLst>
+              <a:ext uri="{FF2B5EF4-FFF2-40B4-BE49-F238E27FC236}">
+                <a16:creationId xmlns:a16="http://schemas.microsoft.com/office/drawing/2014/main" id="{4154C515-0AE6-2916-1A41-FD0978E4564F}"/>
+              </a:ext>
+            </a:extLst>
+          </p:cNvPr>
           <p:cNvSpPr>
             <a:spLocks noGrp="1"/>
           </p:cNvSpPr>
@@ -650,7 +680,7 @@
     </p:spTree>
     <p:extLst>
       <p:ext uri="{BB962C8B-B14F-4D97-AF65-F5344CB8AC3E}">
-        <p14:creationId xmlns:p14="http://schemas.microsoft.com/office/powerpoint/2010/main" val="1024086991"/>
+        <p14:creationId xmlns:p14="http://schemas.microsoft.com/office/powerpoint/2010/main" val="2438840903"/>
       </p:ext>
     </p:extLst>
   </p:cSld>
@@ -706,7 +736,7 @@
           <a:p>
             <a:r>
               <a:rPr lang="en-US"/>
-              <a:t>Say that in the edge test, the laptop acts like a small local server. The phone sends data over the same Wi-Fi network, the laptop processes it, and the response comes back without going to a remote cloud server.</a:t>
+              <a:t>Explain that latency means the full round-trip time. The test used a mobile phone as the client, a laptop as the local edge server, and an external internet server for cloud comparison.</a:t>
             </a:r>
           </a:p>
         </p:txBody>
@@ -793,7 +823,7 @@
           <a:p>
             <a:r>
               <a:rPr lang="en-US"/>
-              <a:t>Explain that the cloud test used a remote HTTP server. The request must go through the public internet, reach the server, and return. This adds round-trip delay.</a:t>
+              <a:t>Say that in the edge test, the laptop acts like a small local server. The phone sends data over the same Wi-Fi network, the laptop processes it, and the response comes back without going to a remote cloud server.</a:t>
             </a:r>
           </a:p>
         </p:txBody>
@@ -880,7 +910,7 @@
           <a:p>
             <a:r>
               <a:rPr lang="en-US"/>
-              <a:t>Use the chart to show the numbers. At home, edge latency was 95 ms and cloud was 510 ms. At HSHL, edge was 422 ms and cloud was 2170 ms. The direction is the same: edge is lower.</a:t>
+              <a:t>Explain that the cloud test used a remote HTTP server. The request must go through the public internet, reach the server, and return. This adds round-trip delay.</a:t>
             </a:r>
           </a:p>
         </p:txBody>
@@ -967,7 +997,7 @@
           <a:p>
             <a:r>
               <a:rPr lang="en-US"/>
-              <a:t>This slide explains the equation in easy words. Edge reduces X because data travels a short local distance. Shared Wi-Fi reduces effective bandwidth, so latency rises. Cloud has a much longer internet route.</a:t>
+              <a:t>Use the chart to show the numbers. At home, edge latency was 95 ms and cloud was 510 ms. At HSHL, edge was 422 ms and cloud was 2170 ms. The direction is the same: edge is lower.</a:t>
             </a:r>
           </a:p>
         </p:txBody>
@@ -1054,7 +1084,7 @@
           <a:p>
             <a:r>
               <a:rPr lang="en-US"/>
-              <a:t>Table III from the paper summarises all key dimensions. Notice that storage and analysis scale is the ONE area where cloud wins. This is why the paper recommends a hybrid approach: edge handles all time-sensitive operations, cloud handles everything that doesn't require an immediate response (storage, analytics, AI model retraining).</a:t>
+              <a:t>This slide explains the equation in easy words. Edge reduces X because data travels a short local distance. Shared Wi-Fi reduces effective bandwidth, so latency rises. Cloud has a much longer internet route.</a:t>
             </a:r>
           </a:p>
         </p:txBody>
@@ -1077,6 +1107,93 @@
             <a:fld id="{F7021451-1387-4CA6-816F-3879F97B5CBC}" type="slidenum">
               <a:rPr lang="en-US"/>
               <a:t>6</a:t>
+            </a:fld>
+            <a:endParaRPr lang="en-US"/>
+          </a:p>
+        </p:txBody>
+      </p:sp>
+    </p:spTree>
+    <p:extLst>
+      <p:ext uri="{BB962C8B-B14F-4D97-AF65-F5344CB8AC3E}">
+        <p14:creationId xmlns:p14="http://schemas.microsoft.com/office/powerpoint/2010/main" val="1024086991"/>
+      </p:ext>
+    </p:extLst>
+  </p:cSld>
+  <p:clrMapOvr>
+    <a:masterClrMapping/>
+  </p:clrMapOvr>
+</p:notes>
+</file>
+
+<file path=ppt/notesSlides/notesSlide7.xml><?xml version="1.0" encoding="utf-8"?>
+<p:notes xmlns:a="http://schemas.openxmlformats.org/drawingml/2006/main" xmlns:r="http://schemas.openxmlformats.org/officeDocument/2006/relationships" xmlns:p="http://schemas.openxmlformats.org/presentationml/2006/main">
+  <p:cSld>
+    <p:spTree>
+      <p:nvGrpSpPr>
+        <p:cNvPr id="1" name=""/>
+        <p:cNvGrpSpPr/>
+        <p:nvPr/>
+      </p:nvGrpSpPr>
+      <p:grpSpPr>
+        <a:xfrm>
+          <a:off x="0" y="0"/>
+          <a:ext cx="0" cy="0"/>
+          <a:chOff x="0" y="0"/>
+          <a:chExt cx="0" cy="0"/>
+        </a:xfrm>
+      </p:grpSpPr>
+      <p:sp>
+        <p:nvSpPr>
+          <p:cNvPr id="2" name="Slide Image Placeholder 1"/>
+          <p:cNvSpPr>
+            <a:spLocks noGrp="1" noRot="1" noChangeAspect="1"/>
+          </p:cNvSpPr>
+          <p:nvPr>
+            <p:ph type="sldImg"/>
+          </p:nvPr>
+        </p:nvSpPr>
+        <p:spPr/>
+      </p:sp>
+      <p:sp>
+        <p:nvSpPr>
+          <p:cNvPr id="3" name="Notes Placeholder 2"/>
+          <p:cNvSpPr>
+            <a:spLocks noGrp="1"/>
+          </p:cNvSpPr>
+          <p:nvPr>
+            <p:ph type="body" idx="1"/>
+          </p:nvPr>
+        </p:nvSpPr>
+        <p:spPr/>
+        <p:txBody>
+          <a:bodyPr/>
+          <a:lstStyle/>
+          <a:p>
+            <a:r>
+              <a:rPr lang="en-US"/>
+              <a:t>Table III from the paper summarises all key dimensions. Notice that storage and analysis scale is the ONE area where cloud wins. This is why the paper recommends a hybrid approach: edge handles all time-sensitive operations, cloud handles everything that doesn't require an immediate response (storage, analytics, AI model retraining).</a:t>
+            </a:r>
+          </a:p>
+        </p:txBody>
+      </p:sp>
+      <p:sp>
+        <p:nvSpPr>
+          <p:cNvPr id="4" name="Slide Number Placeholder 3"/>
+          <p:cNvSpPr>
+            <a:spLocks noGrp="1"/>
+          </p:cNvSpPr>
+          <p:nvPr>
+            <p:ph type="sldNum" sz="quarter" idx="10"/>
+          </p:nvPr>
+        </p:nvSpPr>
+        <p:spPr/>
+        <p:txBody>
+          <a:bodyPr/>
+          <a:lstStyle/>
+          <a:p>
+            <a:fld id="{F7021451-1387-4CA6-816F-3879F97B5CBC}" type="slidenum">
+              <a:rPr lang="en-US"/>
+              <a:t>7</a:t>
             </a:fld>
             <a:endParaRPr lang="en-US"/>
           </a:p>
@@ -1409,6 +1526,273 @@
 
 <file path=ppt/slides/slide1.xml><?xml version="1.0" encoding="utf-8"?>
 <p:sld xmlns:a="http://schemas.openxmlformats.org/drawingml/2006/main" xmlns:r="http://schemas.openxmlformats.org/officeDocument/2006/relationships" xmlns:p="http://schemas.openxmlformats.org/presentationml/2006/main">
+  <p:cSld>
+    <p:bg>
+      <p:bgPr>
+        <a:solidFill>
+          <a:srgbClr val="F8FAFC"/>
+        </a:solidFill>
+        <a:effectLst/>
+      </p:bgPr>
+    </p:bg>
+    <p:spTree>
+      <p:nvGrpSpPr>
+        <p:cNvPr id="1" name="">
+          <a:extLst>
+            <a:ext uri="{FF2B5EF4-FFF2-40B4-BE49-F238E27FC236}">
+              <a16:creationId xmlns:a16="http://schemas.microsoft.com/office/drawing/2014/main" id="{9130459A-53A9-BD5B-5EEF-0B4F2007E081}"/>
+            </a:ext>
+          </a:extLst>
+        </p:cNvPr>
+        <p:cNvGrpSpPr/>
+        <p:nvPr/>
+      </p:nvGrpSpPr>
+      <p:grpSpPr>
+        <a:xfrm>
+          <a:off x="0" y="0"/>
+          <a:ext cx="0" cy="0"/>
+          <a:chOff x="0" y="0"/>
+          <a:chExt cx="0" cy="0"/>
+        </a:xfrm>
+      </p:grpSpPr>
+      <p:sp>
+        <p:nvSpPr>
+          <p:cNvPr id="3" name="Shape 1">
+            <a:extLst>
+              <a:ext uri="{FF2B5EF4-FFF2-40B4-BE49-F238E27FC236}">
+                <a16:creationId xmlns:a16="http://schemas.microsoft.com/office/drawing/2014/main" id="{4DD03136-E4C0-0DAA-28DA-2BD5E6A07FA6}"/>
+              </a:ext>
+            </a:extLst>
+          </p:cNvPr>
+          <p:cNvSpPr/>
+          <p:nvPr/>
+        </p:nvSpPr>
+        <p:spPr>
+          <a:xfrm>
+            <a:off x="0" y="0"/>
+            <a:ext cx="128016" cy="6858000"/>
+          </a:xfrm>
+          <a:prstGeom prst="rect">
+            <a:avLst/>
+          </a:prstGeom>
+          <a:solidFill>
+            <a:srgbClr val="2563EB"/>
+          </a:solidFill>
+          <a:ln w="12700">
+            <a:solidFill>
+              <a:srgbClr val="2563EB">
+                <a:alpha val="0"/>
+              </a:srgbClr>
+            </a:solidFill>
+            <a:prstDash val="solid"/>
+          </a:ln>
+        </p:spPr>
+        <p:txBody>
+          <a:bodyPr/>
+          <a:lstStyle/>
+          <a:p>
+            <a:endParaRPr lang="en-DE"/>
+          </a:p>
+        </p:txBody>
+      </p:sp>
+      <p:sp>
+        <p:nvSpPr>
+          <p:cNvPr id="4" name="Text 2">
+            <a:extLst>
+              <a:ext uri="{FF2B5EF4-FFF2-40B4-BE49-F238E27FC236}">
+                <a16:creationId xmlns:a16="http://schemas.microsoft.com/office/drawing/2014/main" id="{2AE7F8F0-1F0C-387B-4448-78239C79AF0C}"/>
+              </a:ext>
+            </a:extLst>
+          </p:cNvPr>
+          <p:cNvSpPr/>
+          <p:nvPr/>
+        </p:nvSpPr>
+        <p:spPr>
+          <a:xfrm>
+            <a:off x="1188720" y="2742784"/>
+            <a:ext cx="5658889" cy="686216"/>
+          </a:xfrm>
+          <a:prstGeom prst="rect">
+            <a:avLst/>
+          </a:prstGeom>
+          <a:noFill/>
+          <a:ln/>
+        </p:spPr>
+        <p:txBody>
+          <a:bodyPr wrap="square" lIns="0" tIns="0" rIns="0" bIns="0" rtlCol="0" anchor="ctr">
+            <a:noAutofit/>
+          </a:bodyPr>
+          <a:lstStyle/>
+          <a:p>
+            <a:pPr marL="0" indent="0">
+              <a:buNone/>
+            </a:pPr>
+            <a:r>
+              <a:rPr lang="en-US" sz="4000" b="1" dirty="0">
+                <a:solidFill>
+                  <a:schemeClr val="accent2"/>
+                </a:solidFill>
+                <a:latin typeface="+mj-lt"/>
+                <a:ea typeface="Aptos Display" pitchFamily="34" charset="-122"/>
+                <a:cs typeface="Aptos Display" pitchFamily="34" charset="-120"/>
+              </a:rPr>
+              <a:t>Only “HSHL”  </a:t>
+            </a:r>
+            <a:r>
+              <a:rPr lang="en-US" sz="4000" b="1" dirty="0" err="1">
+                <a:solidFill>
+                  <a:schemeClr val="accent2"/>
+                </a:solidFill>
+                <a:latin typeface="+mj-lt"/>
+                <a:ea typeface="Aptos Display" pitchFamily="34" charset="-122"/>
+                <a:cs typeface="Aptos Display" pitchFamily="34" charset="-120"/>
+              </a:rPr>
+              <a:t>Wifi</a:t>
+            </a:r>
+            <a:r>
+              <a:rPr lang="en-US" sz="4000" b="1" dirty="0">
+                <a:solidFill>
+                  <a:schemeClr val="accent2"/>
+                </a:solidFill>
+                <a:latin typeface="+mj-lt"/>
+                <a:ea typeface="Aptos Display" pitchFamily="34" charset="-122"/>
+                <a:cs typeface="Aptos Display" pitchFamily="34" charset="-120"/>
+              </a:rPr>
+              <a:t> USER</a:t>
+            </a:r>
+            <a:endParaRPr lang="en-US" sz="4000" dirty="0">
+              <a:solidFill>
+                <a:schemeClr val="accent2"/>
+              </a:solidFill>
+              <a:latin typeface="+mj-lt"/>
+            </a:endParaRPr>
+          </a:p>
+        </p:txBody>
+      </p:sp>
+      <p:sp>
+        <p:nvSpPr>
+          <p:cNvPr id="6" name="Text 4">
+            <a:extLst>
+              <a:ext uri="{FF2B5EF4-FFF2-40B4-BE49-F238E27FC236}">
+                <a16:creationId xmlns:a16="http://schemas.microsoft.com/office/drawing/2014/main" id="{C548FF9C-25A3-A045-BC25-D28645176F15}"/>
+              </a:ext>
+            </a:extLst>
+          </p:cNvPr>
+          <p:cNvSpPr/>
+          <p:nvPr/>
+        </p:nvSpPr>
+        <p:spPr>
+          <a:xfrm>
+            <a:off x="502920" y="6492240"/>
+            <a:ext cx="7772400" cy="201168"/>
+          </a:xfrm>
+          <a:prstGeom prst="rect">
+            <a:avLst/>
+          </a:prstGeom>
+          <a:noFill/>
+          <a:ln/>
+        </p:spPr>
+        <p:txBody>
+          <a:bodyPr wrap="square" lIns="0" tIns="0" rIns="0" bIns="0" rtlCol="0" anchor="ctr"/>
+          <a:lstStyle/>
+          <a:p>
+            <a:pPr marL="0" indent="0">
+              <a:buNone/>
+            </a:pPr>
+            <a:endParaRPr lang="en-US" sz="850"/>
+          </a:p>
+        </p:txBody>
+      </p:sp>
+      <p:sp>
+        <p:nvSpPr>
+          <p:cNvPr id="7" name="Text 5">
+            <a:extLst>
+              <a:ext uri="{FF2B5EF4-FFF2-40B4-BE49-F238E27FC236}">
+                <a16:creationId xmlns:a16="http://schemas.microsoft.com/office/drawing/2014/main" id="{AD12924C-D3D3-A054-49F3-F49585B21B4A}"/>
+              </a:ext>
+            </a:extLst>
+          </p:cNvPr>
+          <p:cNvSpPr/>
+          <p:nvPr/>
+        </p:nvSpPr>
+        <p:spPr>
+          <a:xfrm>
+            <a:off x="11384280" y="6446520"/>
+            <a:ext cx="320040" cy="228600"/>
+          </a:xfrm>
+          <a:prstGeom prst="rect">
+            <a:avLst/>
+          </a:prstGeom>
+          <a:noFill/>
+          <a:ln/>
+        </p:spPr>
+        <p:txBody>
+          <a:bodyPr wrap="square" lIns="0" tIns="0" rIns="0" bIns="0" rtlCol="0" anchor="ctr"/>
+          <a:lstStyle/>
+          <a:p>
+            <a:pPr marL="0" indent="0" algn="r">
+              <a:buNone/>
+            </a:pPr>
+            <a:r>
+              <a:rPr lang="en-US" sz="850" b="1">
+                <a:solidFill>
+                  <a:srgbClr val="64748B"/>
+                </a:solidFill>
+                <a:latin typeface="Aptos" pitchFamily="34" charset="0"/>
+                <a:ea typeface="Aptos" pitchFamily="34" charset="-122"/>
+                <a:cs typeface="Aptos" pitchFamily="34" charset="-120"/>
+              </a:rPr>
+              <a:t>03</a:t>
+            </a:r>
+            <a:endParaRPr lang="en-US" sz="850"/>
+          </a:p>
+        </p:txBody>
+      </p:sp>
+      <p:pic>
+        <p:nvPicPr>
+          <p:cNvPr id="5" name="Picture 4">
+            <a:extLst>
+              <a:ext uri="{FF2B5EF4-FFF2-40B4-BE49-F238E27FC236}">
+                <a16:creationId xmlns:a16="http://schemas.microsoft.com/office/drawing/2014/main" id="{A3148068-6652-E8D2-22A6-D11BEB80DBE5}"/>
+              </a:ext>
+            </a:extLst>
+          </p:cNvPr>
+          <p:cNvPicPr>
+            <a:picLocks noChangeAspect="1"/>
+          </p:cNvPicPr>
+          <p:nvPr/>
+        </p:nvPicPr>
+        <p:blipFill>
+          <a:blip r:embed="rId3"/>
+          <a:stretch>
+            <a:fillRect/>
+          </a:stretch>
+        </p:blipFill>
+        <p:spPr>
+          <a:xfrm>
+            <a:off x="7514534" y="1039091"/>
+            <a:ext cx="3574964" cy="4634345"/>
+          </a:xfrm>
+          <a:prstGeom prst="rect">
+            <a:avLst/>
+          </a:prstGeom>
+        </p:spPr>
+      </p:pic>
+    </p:spTree>
+    <p:extLst>
+      <p:ext uri="{BB962C8B-B14F-4D97-AF65-F5344CB8AC3E}">
+        <p14:creationId xmlns:p14="http://schemas.microsoft.com/office/powerpoint/2010/main" val="2211815942"/>
+      </p:ext>
+    </p:extLst>
+  </p:cSld>
+  <p:clrMapOvr>
+    <a:masterClrMapping/>
+  </p:clrMapOvr>
+</p:sld>
+</file>
+
+<file path=ppt/slides/slide2.xml><?xml version="1.0" encoding="utf-8"?>
+<p:sld xmlns:a="http://schemas.openxmlformats.org/drawingml/2006/main" xmlns:r="http://schemas.openxmlformats.org/officeDocument/2006/relationships" xmlns:p="http://schemas.openxmlformats.org/presentationml/2006/main">
   <p:cSld name="Slide 2">
     <p:bg>
       <p:bgPr>
@@ -2270,7 +2654,7 @@
 </p:sld>
 </file>
 
-<file path=ppt/slides/slide2.xml><?xml version="1.0" encoding="utf-8"?>
+<file path=ppt/slides/slide3.xml><?xml version="1.0" encoding="utf-8"?>
 <p:sld xmlns:a="http://schemas.openxmlformats.org/drawingml/2006/main" xmlns:r="http://schemas.openxmlformats.org/officeDocument/2006/relationships" xmlns:p="http://schemas.openxmlformats.org/presentationml/2006/main">
   <p:cSld name="Slide 3">
     <p:bg>
@@ -3494,7 +3878,7 @@
 </p:sld>
 </file>
 
-<file path=ppt/slides/slide3.xml><?xml version="1.0" encoding="utf-8"?>
+<file path=ppt/slides/slide4.xml><?xml version="1.0" encoding="utf-8"?>
 <p:sld xmlns:a="http://schemas.openxmlformats.org/drawingml/2006/main" xmlns:r="http://schemas.openxmlformats.org/officeDocument/2006/relationships" xmlns:p="http://schemas.openxmlformats.org/presentationml/2006/main">
   <p:cSld name="Slide 4">
     <p:bg>
@@ -4992,7 +5376,7 @@
 </p:sld>
 </file>
 
-<file path=ppt/slides/slide4.xml><?xml version="1.0" encoding="utf-8"?>
+<file path=ppt/slides/slide5.xml><?xml version="1.0" encoding="utf-8"?>
 <p:sld xmlns:a="http://schemas.openxmlformats.org/drawingml/2006/main" xmlns:r="http://schemas.openxmlformats.org/officeDocument/2006/relationships" xmlns:p="http://schemas.openxmlformats.org/presentationml/2006/main">
   <p:cSld name="Slide 5">
     <p:bg>
@@ -5525,7 +5909,7 @@
 </p:sld>
 </file>
 
-<file path=ppt/slides/slide5.xml><?xml version="1.0" encoding="utf-8"?>
+<file path=ppt/slides/slide6.xml><?xml version="1.0" encoding="utf-8"?>
 <p:sld xmlns:a="http://schemas.openxmlformats.org/drawingml/2006/main" xmlns:r="http://schemas.openxmlformats.org/officeDocument/2006/relationships" xmlns:p="http://schemas.openxmlformats.org/presentationml/2006/main">
   <p:cSld name="Slide 8">
     <p:bg>
@@ -6318,7 +6702,7 @@
 </p:sld>
 </file>
 
-<file path=ppt/slides/slide6.xml><?xml version="1.0" encoding="utf-8"?>
+<file path=ppt/slides/slide7.xml><?xml version="1.0" encoding="utf-8"?>
 <p:sld xmlns:a="http://schemas.openxmlformats.org/drawingml/2006/main" xmlns:r="http://schemas.openxmlformats.org/officeDocument/2006/relationships" xmlns:p="http://schemas.openxmlformats.org/presentationml/2006/main">
   <p:cSld>
     <p:spTree>
